--- a/overlays/ai-readiness/assets/ai-readiness-overlay.pptx
+++ b/overlays/ai-readiness/assets/ai-readiness-overlay.pptx
@@ -107,6 +107,11 @@
       </a:defRPr>
     </a:lvl9pPr>
   </p:defaultTextStyle>
+  <p:extLst>
+    <p:ext uri="{EFAFB233-063F-42B5-8137-9DF3F51BA10A}">
+      <p15:sldGuideLst xmlns:p15="http://schemas.microsoft.com/office/powerpoint/2012/main"/>
+    </p:ext>
+  </p:extLst>
 </p:presentation>
 </file>
 
@@ -192,7 +197,7 @@
           <a:p>
             <a:fld id="{F20A3B31-D471-5A47-BC87-621EE19B9076}" type="datetimeFigureOut">
               <a:rPr lang="de-DE" smtClean="0"/>
-              <a:t>07.10.26</a:t>
+              <a:t>23.10.26</a:t>
             </a:fld>
             <a:endParaRPr lang="de-DE"/>
           </a:p>
@@ -693,7 +698,7 @@
           <a:p>
             <a:fld id="{F1BE32F3-6E7D-E743-81E1-37767E4B13F6}" type="datetimeFigureOut">
               <a:rPr lang="de-DE" smtClean="0"/>
-              <a:t>07.10.26</a:t>
+              <a:t>23.10.26</a:t>
             </a:fld>
             <a:endParaRPr lang="de-DE"/>
           </a:p>
@@ -893,7 +898,7 @@
           <a:p>
             <a:fld id="{F1BE32F3-6E7D-E743-81E1-37767E4B13F6}" type="datetimeFigureOut">
               <a:rPr lang="de-DE" smtClean="0"/>
-              <a:t>07.10.26</a:t>
+              <a:t>23.10.26</a:t>
             </a:fld>
             <a:endParaRPr lang="de-DE"/>
           </a:p>
@@ -1103,7 +1108,7 @@
           <a:p>
             <a:fld id="{F1BE32F3-6E7D-E743-81E1-37767E4B13F6}" type="datetimeFigureOut">
               <a:rPr lang="de-DE" smtClean="0"/>
-              <a:t>07.10.26</a:t>
+              <a:t>23.10.26</a:t>
             </a:fld>
             <a:endParaRPr lang="de-DE"/>
           </a:p>
@@ -1303,7 +1308,7 @@
           <a:p>
             <a:fld id="{F1BE32F3-6E7D-E743-81E1-37767E4B13F6}" type="datetimeFigureOut">
               <a:rPr lang="de-DE" smtClean="0"/>
-              <a:t>07.10.26</a:t>
+              <a:t>23.10.26</a:t>
             </a:fld>
             <a:endParaRPr lang="de-DE"/>
           </a:p>
@@ -1579,7 +1584,7 @@
           <a:p>
             <a:fld id="{F1BE32F3-6E7D-E743-81E1-37767E4B13F6}" type="datetimeFigureOut">
               <a:rPr lang="de-DE" smtClean="0"/>
-              <a:t>07.10.26</a:t>
+              <a:t>23.10.26</a:t>
             </a:fld>
             <a:endParaRPr lang="de-DE"/>
           </a:p>
@@ -1847,7 +1852,7 @@
           <a:p>
             <a:fld id="{F1BE32F3-6E7D-E743-81E1-37767E4B13F6}" type="datetimeFigureOut">
               <a:rPr lang="de-DE" smtClean="0"/>
-              <a:t>07.10.26</a:t>
+              <a:t>23.10.26</a:t>
             </a:fld>
             <a:endParaRPr lang="de-DE"/>
           </a:p>
@@ -2262,7 +2267,7 @@
           <a:p>
             <a:fld id="{F1BE32F3-6E7D-E743-81E1-37767E4B13F6}" type="datetimeFigureOut">
               <a:rPr lang="de-DE" smtClean="0"/>
-              <a:t>07.10.26</a:t>
+              <a:t>23.10.26</a:t>
             </a:fld>
             <a:endParaRPr lang="de-DE"/>
           </a:p>
@@ -2404,7 +2409,7 @@
           <a:p>
             <a:fld id="{F1BE32F3-6E7D-E743-81E1-37767E4B13F6}" type="datetimeFigureOut">
               <a:rPr lang="de-DE" smtClean="0"/>
-              <a:t>07.10.26</a:t>
+              <a:t>23.10.26</a:t>
             </a:fld>
             <a:endParaRPr lang="de-DE"/>
           </a:p>
@@ -2517,7 +2522,7 @@
           <a:p>
             <a:fld id="{F1BE32F3-6E7D-E743-81E1-37767E4B13F6}" type="datetimeFigureOut">
               <a:rPr lang="de-DE" smtClean="0"/>
-              <a:t>07.10.26</a:t>
+              <a:t>23.10.26</a:t>
             </a:fld>
             <a:endParaRPr lang="de-DE"/>
           </a:p>
@@ -2830,7 +2835,7 @@
           <a:p>
             <a:fld id="{F1BE32F3-6E7D-E743-81E1-37767E4B13F6}" type="datetimeFigureOut">
               <a:rPr lang="de-DE" smtClean="0"/>
-              <a:t>07.10.26</a:t>
+              <a:t>23.10.26</a:t>
             </a:fld>
             <a:endParaRPr lang="de-DE"/>
           </a:p>
@@ -3119,7 +3124,7 @@
           <a:p>
             <a:fld id="{F1BE32F3-6E7D-E743-81E1-37767E4B13F6}" type="datetimeFigureOut">
               <a:rPr lang="de-DE" smtClean="0"/>
-              <a:t>07.10.26</a:t>
+              <a:t>23.10.26</a:t>
             </a:fld>
             <a:endParaRPr lang="de-DE"/>
           </a:p>
@@ -3362,7 +3367,7 @@
           <a:p>
             <a:fld id="{F1BE32F3-6E7D-E743-81E1-37767E4B13F6}" type="datetimeFigureOut">
               <a:rPr lang="de-DE" smtClean="0"/>
-              <a:t>07.10.26</a:t>
+              <a:t>23.10.26</a:t>
             </a:fld>
             <a:endParaRPr lang="de-DE"/>
           </a:p>
@@ -5110,10 +5115,10 @@
       </p:grpSp>
       <p:grpSp>
         <p:nvGrpSpPr>
-          <p:cNvPr id="168" name="Group 167">
+          <p:cNvPr id="166" name="Group 165">
             <a:extLst>
               <a:ext uri="{FF2B5EF4-FFF2-40B4-BE49-F238E27FC236}">
-                <a16:creationId xmlns:a16="http://schemas.microsoft.com/office/drawing/2014/main" id="{7EB54859-520D-9B16-EA17-BCA64E4FC0F1}"/>
+                <a16:creationId xmlns:a16="http://schemas.microsoft.com/office/drawing/2014/main" id="{A61609E5-EB2F-D050-9918-11FF005E872D}"/>
               </a:ext>
             </a:extLst>
           </p:cNvPr>
@@ -5122,2985 +5127,3232 @@
         </p:nvGrpSpPr>
         <p:grpSpPr>
           <a:xfrm>
-            <a:off x="5063204" y="1428723"/>
-            <a:ext cx="5248650" cy="1128787"/>
-            <a:chOff x="5953075" y="1293779"/>
-            <a:chExt cx="5248650" cy="972767"/>
+            <a:off x="5245516" y="1324001"/>
+            <a:ext cx="6762865" cy="5143944"/>
+            <a:chOff x="5150266" y="1036486"/>
+            <a:chExt cx="6762865" cy="5143944"/>
           </a:xfrm>
         </p:grpSpPr>
-        <p:sp>
-          <p:nvSpPr>
-            <p:cNvPr id="169" name="Rounded Rectangle 168">
+        <p:grpSp>
+          <p:nvGrpSpPr>
+            <p:cNvPr id="167" name="Group 166">
               <a:extLst>
                 <a:ext uri="{FF2B5EF4-FFF2-40B4-BE49-F238E27FC236}">
-                  <a16:creationId xmlns:a16="http://schemas.microsoft.com/office/drawing/2014/main" id="{483EE693-966A-7825-2790-6FD5FD55EA41}"/>
+                  <a16:creationId xmlns:a16="http://schemas.microsoft.com/office/drawing/2014/main" id="{12983BA4-9879-6502-7F85-70C41FE3E854}"/>
                 </a:ext>
               </a:extLst>
             </p:cNvPr>
-            <p:cNvSpPr/>
+            <p:cNvGrpSpPr/>
             <p:nvPr/>
-          </p:nvSpPr>
-          <p:spPr>
+          </p:nvGrpSpPr>
+          <p:grpSpPr>
             <a:xfrm>
-              <a:off x="5953075" y="1293780"/>
-              <a:ext cx="5248650" cy="972766"/>
+              <a:off x="5150266" y="1036486"/>
+              <a:ext cx="6762865" cy="5143944"/>
+              <a:chOff x="5150266" y="1036486"/>
+              <a:chExt cx="6762865" cy="5143944"/>
             </a:xfrm>
-            <a:prstGeom prst="roundRect">
-              <a:avLst/>
-            </a:prstGeom>
-            <a:noFill/>
-            <a:ln w="38100"/>
-          </p:spPr>
-          <p:style>
-            <a:lnRef idx="2">
-              <a:schemeClr val="accent1">
-                <a:shade val="15000"/>
-              </a:schemeClr>
-            </a:lnRef>
-            <a:fillRef idx="1">
-              <a:schemeClr val="accent1"/>
-            </a:fillRef>
-            <a:effectRef idx="0">
-              <a:schemeClr val="accent1"/>
-            </a:effectRef>
-            <a:fontRef idx="minor">
-              <a:schemeClr val="lt1"/>
-            </a:fontRef>
-          </p:style>
-          <p:txBody>
-            <a:bodyPr rtlCol="0" anchor="ctr"/>
-            <a:lstStyle/>
-            <a:p>
-              <a:pPr algn="ctr"/>
-              <a:endParaRPr lang="en-US" noProof="0" dirty="0"/>
-            </a:p>
-          </p:txBody>
-        </p:sp>
-        <p:sp>
-          <p:nvSpPr>
-            <p:cNvPr id="170" name="Round Same-side Corner of Rectangle 169">
+          </p:grpSpPr>
+          <p:grpSp>
+            <p:nvGrpSpPr>
+              <p:cNvPr id="242" name="Group 241">
+                <a:extLst>
+                  <a:ext uri="{FF2B5EF4-FFF2-40B4-BE49-F238E27FC236}">
+                    <a16:creationId xmlns:a16="http://schemas.microsoft.com/office/drawing/2014/main" id="{BE6E9668-8903-4D03-7BE1-FB5809E2E4D3}"/>
+                  </a:ext>
+                </a:extLst>
+              </p:cNvPr>
+              <p:cNvGrpSpPr/>
+              <p:nvPr/>
+            </p:nvGrpSpPr>
+            <p:grpSpPr>
+              <a:xfrm>
+                <a:off x="5164618" y="1047077"/>
+                <a:ext cx="5248650" cy="1128787"/>
+                <a:chOff x="5953075" y="1293779"/>
+                <a:chExt cx="5248650" cy="972767"/>
+              </a:xfrm>
+            </p:grpSpPr>
+            <p:sp>
+              <p:nvSpPr>
+                <p:cNvPr id="316" name="Rounded Rectangle 315">
+                  <a:extLst>
+                    <a:ext uri="{FF2B5EF4-FFF2-40B4-BE49-F238E27FC236}">
+                      <a16:creationId xmlns:a16="http://schemas.microsoft.com/office/drawing/2014/main" id="{A864278C-A386-25AB-29D5-68DA0820648B}"/>
+                    </a:ext>
+                  </a:extLst>
+                </p:cNvPr>
+                <p:cNvSpPr/>
+                <p:nvPr/>
+              </p:nvSpPr>
+              <p:spPr>
+                <a:xfrm>
+                  <a:off x="5953075" y="1293780"/>
+                  <a:ext cx="5248650" cy="972766"/>
+                </a:xfrm>
+                <a:prstGeom prst="roundRect">
+                  <a:avLst/>
+                </a:prstGeom>
+                <a:noFill/>
+                <a:ln w="38100"/>
+              </p:spPr>
+              <p:style>
+                <a:lnRef idx="2">
+                  <a:schemeClr val="accent1">
+                    <a:shade val="15000"/>
+                  </a:schemeClr>
+                </a:lnRef>
+                <a:fillRef idx="1">
+                  <a:schemeClr val="accent1"/>
+                </a:fillRef>
+                <a:effectRef idx="0">
+                  <a:schemeClr val="accent1"/>
+                </a:effectRef>
+                <a:fontRef idx="minor">
+                  <a:schemeClr val="lt1"/>
+                </a:fontRef>
+              </p:style>
+              <p:txBody>
+                <a:bodyPr rtlCol="0" anchor="ctr"/>
+                <a:lstStyle/>
+                <a:p>
+                  <a:pPr algn="ctr"/>
+                  <a:endParaRPr lang="en-US" noProof="0" dirty="0"/>
+                </a:p>
+              </p:txBody>
+            </p:sp>
+            <p:sp>
+              <p:nvSpPr>
+                <p:cNvPr id="317" name="Round Same-side Corner of Rectangle 316">
+                  <a:extLst>
+                    <a:ext uri="{FF2B5EF4-FFF2-40B4-BE49-F238E27FC236}">
+                      <a16:creationId xmlns:a16="http://schemas.microsoft.com/office/drawing/2014/main" id="{9683CE8A-7CB9-3CC7-FAC3-B84517FC8C8F}"/>
+                    </a:ext>
+                  </a:extLst>
+                </p:cNvPr>
+                <p:cNvSpPr/>
+                <p:nvPr/>
+              </p:nvSpPr>
+              <p:spPr>
+                <a:xfrm rot="16200000">
+                  <a:off x="5623970" y="1622885"/>
+                  <a:ext cx="972766" cy="314554"/>
+                </a:xfrm>
+                <a:prstGeom prst="round2SameRect">
+                  <a:avLst>
+                    <a:gd name="adj1" fmla="val 50000"/>
+                    <a:gd name="adj2" fmla="val 0"/>
+                  </a:avLst>
+                </a:prstGeom>
+                <a:ln w="38100"/>
+              </p:spPr>
+              <p:style>
+                <a:lnRef idx="2">
+                  <a:schemeClr val="accent1">
+                    <a:shade val="15000"/>
+                  </a:schemeClr>
+                </a:lnRef>
+                <a:fillRef idx="1">
+                  <a:schemeClr val="accent1"/>
+                </a:fillRef>
+                <a:effectRef idx="0">
+                  <a:schemeClr val="accent1"/>
+                </a:effectRef>
+                <a:fontRef idx="minor">
+                  <a:schemeClr val="lt1"/>
+                </a:fontRef>
+              </p:style>
+              <p:txBody>
+                <a:bodyPr rtlCol="0" anchor="ctr"/>
+                <a:lstStyle/>
+                <a:p>
+                  <a:pPr algn="ctr"/>
+                  <a:r>
+                    <a:rPr lang="en-US" sz="1000" b="1" noProof="0" dirty="0"/>
+                    <a:t>Guidance</a:t>
+                  </a:r>
+                </a:p>
+              </p:txBody>
+            </p:sp>
+          </p:grpSp>
+          <p:grpSp>
+            <p:nvGrpSpPr>
+              <p:cNvPr id="243" name="Group 242">
+                <a:extLst>
+                  <a:ext uri="{FF2B5EF4-FFF2-40B4-BE49-F238E27FC236}">
+                    <a16:creationId xmlns:a16="http://schemas.microsoft.com/office/drawing/2014/main" id="{861695BA-665F-6E6A-C8D4-84F42E08968F}"/>
+                  </a:ext>
+                </a:extLst>
+              </p:cNvPr>
+              <p:cNvGrpSpPr/>
+              <p:nvPr/>
+            </p:nvGrpSpPr>
+            <p:grpSpPr>
+              <a:xfrm>
+                <a:off x="5164617" y="5051643"/>
+                <a:ext cx="5248649" cy="1128787"/>
+                <a:chOff x="5953074" y="1293779"/>
+                <a:chExt cx="5248649" cy="972767"/>
+              </a:xfrm>
+            </p:grpSpPr>
+            <p:sp>
+              <p:nvSpPr>
+                <p:cNvPr id="314" name="Rounded Rectangle 313">
+                  <a:extLst>
+                    <a:ext uri="{FF2B5EF4-FFF2-40B4-BE49-F238E27FC236}">
+                      <a16:creationId xmlns:a16="http://schemas.microsoft.com/office/drawing/2014/main" id="{8CD9FC96-BEF8-DCF4-1E5B-0F250FA8201A}"/>
+                    </a:ext>
+                  </a:extLst>
+                </p:cNvPr>
+                <p:cNvSpPr/>
+                <p:nvPr/>
+              </p:nvSpPr>
+              <p:spPr>
+                <a:xfrm>
+                  <a:off x="5953074" y="1293780"/>
+                  <a:ext cx="5248649" cy="972766"/>
+                </a:xfrm>
+                <a:prstGeom prst="roundRect">
+                  <a:avLst/>
+                </a:prstGeom>
+                <a:noFill/>
+                <a:ln w="38100"/>
+              </p:spPr>
+              <p:style>
+                <a:lnRef idx="2">
+                  <a:schemeClr val="accent1">
+                    <a:shade val="15000"/>
+                  </a:schemeClr>
+                </a:lnRef>
+                <a:fillRef idx="1">
+                  <a:schemeClr val="accent1"/>
+                </a:fillRef>
+                <a:effectRef idx="0">
+                  <a:schemeClr val="accent1"/>
+                </a:effectRef>
+                <a:fontRef idx="minor">
+                  <a:schemeClr val="lt1"/>
+                </a:fontRef>
+              </p:style>
+              <p:txBody>
+                <a:bodyPr rtlCol="0" anchor="ctr"/>
+                <a:lstStyle/>
+                <a:p>
+                  <a:pPr algn="ctr"/>
+                  <a:endParaRPr lang="en-US" noProof="0" dirty="0"/>
+                </a:p>
+              </p:txBody>
+            </p:sp>
+            <p:sp>
+              <p:nvSpPr>
+                <p:cNvPr id="315" name="Round Same-side Corner of Rectangle 314">
+                  <a:extLst>
+                    <a:ext uri="{FF2B5EF4-FFF2-40B4-BE49-F238E27FC236}">
+                      <a16:creationId xmlns:a16="http://schemas.microsoft.com/office/drawing/2014/main" id="{BCB9B6CE-6CA7-F37D-04DD-7FD649B56010}"/>
+                    </a:ext>
+                  </a:extLst>
+                </p:cNvPr>
+                <p:cNvSpPr/>
+                <p:nvPr/>
+              </p:nvSpPr>
+              <p:spPr>
+                <a:xfrm rot="16200000">
+                  <a:off x="5623970" y="1622885"/>
+                  <a:ext cx="972766" cy="314554"/>
+                </a:xfrm>
+                <a:prstGeom prst="round2SameRect">
+                  <a:avLst>
+                    <a:gd name="adj1" fmla="val 50000"/>
+                    <a:gd name="adj2" fmla="val 0"/>
+                  </a:avLst>
+                </a:prstGeom>
+                <a:ln w="38100"/>
+              </p:spPr>
+              <p:style>
+                <a:lnRef idx="2">
+                  <a:schemeClr val="accent1">
+                    <a:shade val="15000"/>
+                  </a:schemeClr>
+                </a:lnRef>
+                <a:fillRef idx="1">
+                  <a:schemeClr val="accent1"/>
+                </a:fillRef>
+                <a:effectRef idx="0">
+                  <a:schemeClr val="accent1"/>
+                </a:effectRef>
+                <a:fontRef idx="minor">
+                  <a:schemeClr val="lt1"/>
+                </a:fontRef>
+              </p:style>
+              <p:txBody>
+                <a:bodyPr rtlCol="0" anchor="ctr"/>
+                <a:lstStyle/>
+                <a:p>
+                  <a:pPr algn="ctr"/>
+                  <a:r>
+                    <a:rPr lang="en-US" sz="1000" b="1" noProof="0" dirty="0"/>
+                    <a:t>Foundation</a:t>
+                  </a:r>
+                </a:p>
+              </p:txBody>
+            </p:sp>
+          </p:grpSp>
+          <p:grpSp>
+            <p:nvGrpSpPr>
+              <p:cNvPr id="244" name="Group 243">
+                <a:extLst>
+                  <a:ext uri="{FF2B5EF4-FFF2-40B4-BE49-F238E27FC236}">
+                    <a16:creationId xmlns:a16="http://schemas.microsoft.com/office/drawing/2014/main" id="{617301B6-A5BF-C58F-7CCE-0D63A5A35067}"/>
+                  </a:ext>
+                </a:extLst>
+              </p:cNvPr>
+              <p:cNvGrpSpPr/>
+              <p:nvPr/>
+            </p:nvGrpSpPr>
+            <p:grpSpPr>
+              <a:xfrm>
+                <a:off x="10547593" y="1036486"/>
+                <a:ext cx="1365538" cy="5133352"/>
+                <a:chOff x="8916768" y="2942618"/>
+                <a:chExt cx="1365538" cy="5133352"/>
+              </a:xfrm>
+            </p:grpSpPr>
+            <p:sp>
+              <p:nvSpPr>
+                <p:cNvPr id="312" name="Rounded Rectangle 311">
+                  <a:extLst>
+                    <a:ext uri="{FF2B5EF4-FFF2-40B4-BE49-F238E27FC236}">
+                      <a16:creationId xmlns:a16="http://schemas.microsoft.com/office/drawing/2014/main" id="{6E67EBFA-496E-0B80-99C0-4FA1A6F01FD8}"/>
+                    </a:ext>
+                  </a:extLst>
+                </p:cNvPr>
+                <p:cNvSpPr/>
+                <p:nvPr/>
+              </p:nvSpPr>
+              <p:spPr>
+                <a:xfrm>
+                  <a:off x="8916768" y="2942618"/>
+                  <a:ext cx="1365538" cy="5133352"/>
+                </a:xfrm>
+                <a:prstGeom prst="roundRect">
+                  <a:avLst/>
+                </a:prstGeom>
+                <a:noFill/>
+                <a:ln w="38100"/>
+              </p:spPr>
+              <p:style>
+                <a:lnRef idx="2">
+                  <a:schemeClr val="accent1">
+                    <a:shade val="15000"/>
+                  </a:schemeClr>
+                </a:lnRef>
+                <a:fillRef idx="1">
+                  <a:schemeClr val="accent1"/>
+                </a:fillRef>
+                <a:effectRef idx="0">
+                  <a:schemeClr val="accent1"/>
+                </a:effectRef>
+                <a:fontRef idx="minor">
+                  <a:schemeClr val="lt1"/>
+                </a:fontRef>
+              </p:style>
+              <p:txBody>
+                <a:bodyPr rtlCol="0" anchor="ctr"/>
+                <a:lstStyle/>
+                <a:p>
+                  <a:pPr algn="ctr"/>
+                  <a:endParaRPr lang="en-US" noProof="0" dirty="0"/>
+                </a:p>
+              </p:txBody>
+            </p:sp>
+            <p:sp>
+              <p:nvSpPr>
+                <p:cNvPr id="313" name="Round Same-side Corner of Rectangle 312">
+                  <a:extLst>
+                    <a:ext uri="{FF2B5EF4-FFF2-40B4-BE49-F238E27FC236}">
+                      <a16:creationId xmlns:a16="http://schemas.microsoft.com/office/drawing/2014/main" id="{50B57108-7861-0E7E-DB54-1337CECA8ABC}"/>
+                    </a:ext>
+                  </a:extLst>
+                </p:cNvPr>
+                <p:cNvSpPr/>
+                <p:nvPr/>
+              </p:nvSpPr>
+              <p:spPr>
+                <a:xfrm>
+                  <a:off x="8916768" y="2942618"/>
+                  <a:ext cx="1365538" cy="314554"/>
+                </a:xfrm>
+                <a:prstGeom prst="round2SameRect">
+                  <a:avLst>
+                    <a:gd name="adj1" fmla="val 50000"/>
+                    <a:gd name="adj2" fmla="val 0"/>
+                  </a:avLst>
+                </a:prstGeom>
+                <a:ln w="38100"/>
+              </p:spPr>
+              <p:style>
+                <a:lnRef idx="2">
+                  <a:schemeClr val="accent1">
+                    <a:shade val="15000"/>
+                  </a:schemeClr>
+                </a:lnRef>
+                <a:fillRef idx="1">
+                  <a:schemeClr val="accent1"/>
+                </a:fillRef>
+                <a:effectRef idx="0">
+                  <a:schemeClr val="accent1"/>
+                </a:effectRef>
+                <a:fontRef idx="minor">
+                  <a:schemeClr val="lt1"/>
+                </a:fontRef>
+              </p:style>
+              <p:txBody>
+                <a:bodyPr rtlCol="0" anchor="ctr"/>
+                <a:lstStyle/>
+                <a:p>
+                  <a:pPr algn="ctr"/>
+                  <a:r>
+                    <a:rPr lang="en-US" sz="1000" b="1" noProof="0" dirty="0"/>
+                    <a:t>Guiding Principles</a:t>
+                  </a:r>
+                </a:p>
+              </p:txBody>
+            </p:sp>
+          </p:grpSp>
+          <p:sp>
+            <p:nvSpPr>
+              <p:cNvPr id="245" name="Round Same-side Corner of Rectangle 244">
+                <a:extLst>
+                  <a:ext uri="{FF2B5EF4-FFF2-40B4-BE49-F238E27FC236}">
+                    <a16:creationId xmlns:a16="http://schemas.microsoft.com/office/drawing/2014/main" id="{E967F782-E506-244F-D269-675968607680}"/>
+                  </a:ext>
+                </a:extLst>
+              </p:cNvPr>
+              <p:cNvSpPr/>
+              <p:nvPr/>
+            </p:nvSpPr>
+            <p:spPr>
+              <a:xfrm rot="16200000">
+                <a:off x="4697433" y="4139144"/>
+                <a:ext cx="1220220" cy="314554"/>
+              </a:xfrm>
+              <a:prstGeom prst="round2SameRect">
+                <a:avLst>
+                  <a:gd name="adj1" fmla="val 50000"/>
+                  <a:gd name="adj2" fmla="val 0"/>
+                </a:avLst>
+              </a:prstGeom>
+              <a:ln w="38100"/>
+            </p:spPr>
+            <p:style>
+              <a:lnRef idx="2">
+                <a:schemeClr val="accent1">
+                  <a:shade val="15000"/>
+                </a:schemeClr>
+              </a:lnRef>
+              <a:fillRef idx="1">
+                <a:schemeClr val="accent1"/>
+              </a:fillRef>
+              <a:effectRef idx="0">
+                <a:schemeClr val="accent1"/>
+              </a:effectRef>
+              <a:fontRef idx="minor">
+                <a:schemeClr val="lt1"/>
+              </a:fontRef>
+            </p:style>
+            <p:txBody>
+              <a:bodyPr rtlCol="0" anchor="ctr"/>
+              <a:lstStyle/>
+              <a:p>
+                <a:pPr algn="ctr"/>
+                <a:r>
+                  <a:rPr lang="en-US" sz="1000" b="1" noProof="0" dirty="0"/>
+                  <a:t>System Layer</a:t>
+                </a:r>
+              </a:p>
+            </p:txBody>
+          </p:sp>
+          <p:sp>
+            <p:nvSpPr>
+              <p:cNvPr id="246" name="Round Same-side Corner of Rectangle 245">
+                <a:extLst>
+                  <a:ext uri="{FF2B5EF4-FFF2-40B4-BE49-F238E27FC236}">
+                    <a16:creationId xmlns:a16="http://schemas.microsoft.com/office/drawing/2014/main" id="{01DC5979-03AA-DF63-2312-E0E59CD7A43F}"/>
+                  </a:ext>
+                </a:extLst>
+              </p:cNvPr>
+              <p:cNvSpPr/>
+              <p:nvPr/>
+            </p:nvSpPr>
+            <p:spPr>
+              <a:xfrm rot="16200000">
+                <a:off x="4697433" y="2773811"/>
+                <a:ext cx="1220220" cy="314554"/>
+              </a:xfrm>
+              <a:prstGeom prst="round2SameRect">
+                <a:avLst>
+                  <a:gd name="adj1" fmla="val 50000"/>
+                  <a:gd name="adj2" fmla="val 0"/>
+                </a:avLst>
+              </a:prstGeom>
+              <a:ln w="38100"/>
+            </p:spPr>
+            <p:style>
+              <a:lnRef idx="2">
+                <a:schemeClr val="accent1">
+                  <a:shade val="15000"/>
+                </a:schemeClr>
+              </a:lnRef>
+              <a:fillRef idx="1">
+                <a:schemeClr val="accent1"/>
+              </a:fillRef>
+              <a:effectRef idx="0">
+                <a:schemeClr val="accent1"/>
+              </a:effectRef>
+              <a:fontRef idx="minor">
+                <a:schemeClr val="lt1"/>
+              </a:fontRef>
+            </p:style>
+            <p:txBody>
+              <a:bodyPr rtlCol="0" anchor="ctr"/>
+              <a:lstStyle/>
+              <a:p>
+                <a:pPr algn="ctr"/>
+                <a:r>
+                  <a:rPr lang="en-US" sz="1000" b="1" noProof="0" dirty="0"/>
+                  <a:t>Business Layer</a:t>
+                </a:r>
+              </a:p>
+            </p:txBody>
+          </p:sp>
+          <p:sp>
+            <p:nvSpPr>
+              <p:cNvPr id="247" name="Round Same-side Corner of Rectangle 246">
+                <a:extLst>
+                  <a:ext uri="{FF2B5EF4-FFF2-40B4-BE49-F238E27FC236}">
+                    <a16:creationId xmlns:a16="http://schemas.microsoft.com/office/drawing/2014/main" id="{A5692BCA-D079-3640-B717-7AB9E8627CD4}"/>
+                  </a:ext>
+                </a:extLst>
+              </p:cNvPr>
+              <p:cNvSpPr/>
+              <p:nvPr/>
+            </p:nvSpPr>
+            <p:spPr>
+              <a:xfrm rot="5400000">
+                <a:off x="8963214" y="3453507"/>
+                <a:ext cx="2585554" cy="314554"/>
+              </a:xfrm>
+              <a:prstGeom prst="round2SameRect">
+                <a:avLst>
+                  <a:gd name="adj1" fmla="val 50000"/>
+                  <a:gd name="adj2" fmla="val 0"/>
+                </a:avLst>
+              </a:prstGeom>
+              <a:ln w="38100"/>
+            </p:spPr>
+            <p:style>
+              <a:lnRef idx="2">
+                <a:schemeClr val="accent1">
+                  <a:shade val="15000"/>
+                </a:schemeClr>
+              </a:lnRef>
+              <a:fillRef idx="1">
+                <a:schemeClr val="accent1"/>
+              </a:fillRef>
+              <a:effectRef idx="0">
+                <a:schemeClr val="accent1"/>
+              </a:effectRef>
+              <a:fontRef idx="minor">
+                <a:schemeClr val="lt1"/>
+              </a:fontRef>
+            </p:style>
+            <p:txBody>
+              <a:bodyPr rtlCol="0" anchor="ctr"/>
+              <a:lstStyle/>
+              <a:p>
+                <a:pPr algn="ctr"/>
+                <a:r>
+                  <a:rPr lang="en-US" sz="1000" b="1" noProof="0" dirty="0"/>
+                  <a:t>Data Layer</a:t>
+                </a:r>
+              </a:p>
+            </p:txBody>
+          </p:sp>
+          <p:pic>
+            <p:nvPicPr>
+              <p:cNvPr id="248" name="Graphic 247" descr="Continuous Improvement with solid fill">
+                <a:extLst>
+                  <a:ext uri="{FF2B5EF4-FFF2-40B4-BE49-F238E27FC236}">
+                    <a16:creationId xmlns:a16="http://schemas.microsoft.com/office/drawing/2014/main" id="{A0058662-3A41-2A5A-F1BD-6E6E6A1E52A0}"/>
+                  </a:ext>
+                </a:extLst>
+              </p:cNvPr>
+              <p:cNvPicPr>
+                <a:picLocks noChangeAspect="1"/>
+              </p:cNvPicPr>
+              <p:nvPr/>
+            </p:nvPicPr>
+            <p:blipFill>
+              <a:blip>
+                <a:extLst>
+                  <a:ext uri="{96DAC541-7B7A-43D3-8B79-37D633B846F1}">
+                    <asvg:svgBlip xmlns:asvg="http://schemas.microsoft.com/office/drawing/2016/SVG/main" r:embed="rId3"/>
+                  </a:ext>
+                </a:extLst>
+              </a:blip>
+              <a:stretch>
+                <a:fillRect/>
+              </a:stretch>
+            </p:blipFill>
+            <p:spPr>
+              <a:xfrm>
+                <a:off x="8484760" y="3427173"/>
+                <a:ext cx="398413" cy="398413"/>
+              </a:xfrm>
+              <a:prstGeom prst="rect">
+                <a:avLst/>
+              </a:prstGeom>
+            </p:spPr>
+          </p:pic>
+          <p:pic>
+            <p:nvPicPr>
+              <p:cNvPr id="249" name="Graphic 248" descr="Handshake with solid fill">
+                <a:extLst>
+                  <a:ext uri="{FF2B5EF4-FFF2-40B4-BE49-F238E27FC236}">
+                    <a16:creationId xmlns:a16="http://schemas.microsoft.com/office/drawing/2014/main" id="{C9DEC7B5-0331-19E1-D659-6C33951EB87B}"/>
+                  </a:ext>
+                </a:extLst>
+              </p:cNvPr>
+              <p:cNvPicPr>
+                <a:picLocks noChangeAspect="1"/>
+              </p:cNvPicPr>
+              <p:nvPr/>
+            </p:nvPicPr>
+            <p:blipFill>
+              <a:blip>
+                <a:extLst>
+                  <a:ext uri="{96DAC541-7B7A-43D3-8B79-37D633B846F1}">
+                    <asvg:svgBlip xmlns:asvg="http://schemas.microsoft.com/office/drawing/2016/SVG/main" r:embed="rId4"/>
+                  </a:ext>
+                </a:extLst>
+              </a:blip>
+              <a:stretch>
+                <a:fillRect/>
+              </a:stretch>
+            </p:blipFill>
+            <p:spPr>
+              <a:xfrm>
+                <a:off x="9465740" y="4119087"/>
+                <a:ext cx="398413" cy="398413"/>
+              </a:xfrm>
+              <a:prstGeom prst="rect">
+                <a:avLst/>
+              </a:prstGeom>
+            </p:spPr>
+          </p:pic>
+          <p:pic>
+            <p:nvPicPr>
+              <p:cNvPr id="250" name="Graphic 249" descr="Atom with solid fill">
+                <a:extLst>
+                  <a:ext uri="{FF2B5EF4-FFF2-40B4-BE49-F238E27FC236}">
+                    <a16:creationId xmlns:a16="http://schemas.microsoft.com/office/drawing/2014/main" id="{3ECF5171-B468-BED8-527D-3E3D177C409F}"/>
+                  </a:ext>
+                </a:extLst>
+              </p:cNvPr>
+              <p:cNvPicPr>
+                <a:picLocks noChangeAspect="1"/>
+              </p:cNvPicPr>
+              <p:nvPr/>
+            </p:nvPicPr>
+            <p:blipFill>
+              <a:blip>
+                <a:extLst>
+                  <a:ext uri="{96DAC541-7B7A-43D3-8B79-37D633B846F1}">
+                    <asvg:svgBlip xmlns:asvg="http://schemas.microsoft.com/office/drawing/2016/SVG/main" r:embed="rId5"/>
+                  </a:ext>
+                </a:extLst>
+              </a:blip>
+              <a:stretch>
+                <a:fillRect/>
+              </a:stretch>
+            </p:blipFill>
+            <p:spPr>
+              <a:xfrm>
+                <a:off x="7823575" y="5267767"/>
+                <a:ext cx="403582" cy="403582"/>
+              </a:xfrm>
+              <a:prstGeom prst="rect">
+                <a:avLst/>
+              </a:prstGeom>
+            </p:spPr>
+          </p:pic>
+          <p:pic>
+            <p:nvPicPr>
+              <p:cNvPr id="251" name="Graphic 250" descr="Binoculars with solid fill">
+                <a:extLst>
+                  <a:ext uri="{FF2B5EF4-FFF2-40B4-BE49-F238E27FC236}">
+                    <a16:creationId xmlns:a16="http://schemas.microsoft.com/office/drawing/2014/main" id="{0EB8B1F0-542B-279F-AC99-8ACA00B2787C}"/>
+                  </a:ext>
+                </a:extLst>
+              </p:cNvPr>
+              <p:cNvPicPr>
+                <a:picLocks noChangeAspect="1"/>
+              </p:cNvPicPr>
+              <p:nvPr/>
+            </p:nvPicPr>
+            <p:blipFill>
+              <a:blip>
+                <a:extLst>
+                  <a:ext uri="{96DAC541-7B7A-43D3-8B79-37D633B846F1}">
+                    <asvg:svgBlip xmlns:asvg="http://schemas.microsoft.com/office/drawing/2016/SVG/main" r:embed="rId6"/>
+                  </a:ext>
+                </a:extLst>
+              </a:blip>
+              <a:stretch>
+                <a:fillRect/>
+              </a:stretch>
+            </p:blipFill>
+            <p:spPr>
+              <a:xfrm>
+                <a:off x="8928300" y="5267767"/>
+                <a:ext cx="403581" cy="403581"/>
+              </a:xfrm>
+              <a:prstGeom prst="rect">
+                <a:avLst/>
+              </a:prstGeom>
+            </p:spPr>
+          </p:pic>
+          <p:pic>
+            <p:nvPicPr>
+              <p:cNvPr id="252" name="Graphic 251" descr="Blockchain with solid fill">
+                <a:extLst>
+                  <a:ext uri="{FF2B5EF4-FFF2-40B4-BE49-F238E27FC236}">
+                    <a16:creationId xmlns:a16="http://schemas.microsoft.com/office/drawing/2014/main" id="{08D72250-9553-F45F-2C0C-6EB9BE688E79}"/>
+                  </a:ext>
+                </a:extLst>
+              </p:cNvPr>
+              <p:cNvPicPr>
+                <a:picLocks noChangeAspect="1"/>
+              </p:cNvPicPr>
+              <p:nvPr/>
+            </p:nvPicPr>
+            <p:blipFill>
+              <a:blip>
+                <a:extLst>
+                  <a:ext uri="{96DAC541-7B7A-43D3-8B79-37D633B846F1}">
+                    <asvg:svgBlip xmlns:asvg="http://schemas.microsoft.com/office/drawing/2016/SVG/main" r:embed="rId7"/>
+                  </a:ext>
+                </a:extLst>
+              </a:blip>
+              <a:stretch>
+                <a:fillRect/>
+              </a:stretch>
+            </p:blipFill>
+            <p:spPr>
+              <a:xfrm>
+                <a:off x="6280817" y="4288997"/>
+                <a:ext cx="398978" cy="398978"/>
+              </a:xfrm>
+              <a:prstGeom prst="rect">
+                <a:avLst/>
+              </a:prstGeom>
+            </p:spPr>
+          </p:pic>
+          <p:pic>
+            <p:nvPicPr>
+              <p:cNvPr id="253" name="Graphic 252" descr="Building Brick Wall with solid fill">
+                <a:extLst>
+                  <a:ext uri="{FF2B5EF4-FFF2-40B4-BE49-F238E27FC236}">
+                    <a16:creationId xmlns:a16="http://schemas.microsoft.com/office/drawing/2014/main" id="{98CFB5AE-77C4-E649-EFA2-79EBB057CAE0}"/>
+                  </a:ext>
+                </a:extLst>
+              </p:cNvPr>
+              <p:cNvPicPr>
+                <a:picLocks noChangeAspect="1"/>
+              </p:cNvPicPr>
+              <p:nvPr/>
+            </p:nvPicPr>
+            <p:blipFill>
+              <a:blip>
+                <a:extLst>
+                  <a:ext uri="{96DAC541-7B7A-43D3-8B79-37D633B846F1}">
+                    <asvg:svgBlip xmlns:asvg="http://schemas.microsoft.com/office/drawing/2016/SVG/main" r:embed="rId8"/>
+                  </a:ext>
+                </a:extLst>
+              </a:blip>
+              <a:stretch>
+                <a:fillRect/>
+              </a:stretch>
+            </p:blipFill>
+            <p:spPr>
+              <a:xfrm>
+                <a:off x="9775470" y="5272643"/>
+                <a:ext cx="398413" cy="398413"/>
+              </a:xfrm>
+              <a:prstGeom prst="rect">
+                <a:avLst/>
+              </a:prstGeom>
+            </p:spPr>
+          </p:pic>
+          <p:pic>
+            <p:nvPicPr>
+              <p:cNvPr id="254" name="Graphic 253" descr="Bullseye with solid fill">
+                <a:extLst>
+                  <a:ext uri="{FF2B5EF4-FFF2-40B4-BE49-F238E27FC236}">
+                    <a16:creationId xmlns:a16="http://schemas.microsoft.com/office/drawing/2014/main" id="{C8E4D1B7-6BB6-D7F4-DBB0-1F54D82998CE}"/>
+                  </a:ext>
+                </a:extLst>
+              </p:cNvPr>
+              <p:cNvPicPr>
+                <a:picLocks noChangeAspect="1"/>
+              </p:cNvPicPr>
+              <p:nvPr/>
+            </p:nvPicPr>
+            <p:blipFill>
+              <a:blip>
+                <a:extLst>
+                  <a:ext uri="{96DAC541-7B7A-43D3-8B79-37D633B846F1}">
+                    <asvg:svgBlip xmlns:asvg="http://schemas.microsoft.com/office/drawing/2016/SVG/main" r:embed="rId9"/>
+                  </a:ext>
+                </a:extLst>
+              </a:blip>
+              <a:stretch>
+                <a:fillRect/>
+              </a:stretch>
+            </p:blipFill>
+            <p:spPr>
+              <a:xfrm>
+                <a:off x="5863170" y="1303074"/>
+                <a:ext cx="398413" cy="398413"/>
+              </a:xfrm>
+              <a:prstGeom prst="rect">
+                <a:avLst/>
+              </a:prstGeom>
+            </p:spPr>
+          </p:pic>
+          <p:pic>
+            <p:nvPicPr>
+              <p:cNvPr id="255" name="Graphic 254" descr="City with solid fill">
+                <a:extLst>
+                  <a:ext uri="{FF2B5EF4-FFF2-40B4-BE49-F238E27FC236}">
+                    <a16:creationId xmlns:a16="http://schemas.microsoft.com/office/drawing/2014/main" id="{C5D037C4-DB95-40A4-EFD3-17F0059B26DA}"/>
+                  </a:ext>
+                </a:extLst>
+              </p:cNvPr>
+              <p:cNvPicPr>
+                <a:picLocks noChangeAspect="1"/>
+              </p:cNvPicPr>
+              <p:nvPr/>
+            </p:nvPicPr>
+            <p:blipFill>
+              <a:blip>
+                <a:extLst>
+                  <a:ext uri="{96DAC541-7B7A-43D3-8B79-37D633B846F1}">
+                    <asvg:svgBlip xmlns:asvg="http://schemas.microsoft.com/office/drawing/2016/SVG/main" r:embed="rId10"/>
+                  </a:ext>
+                </a:extLst>
+              </a:blip>
+              <a:stretch>
+                <a:fillRect/>
+              </a:stretch>
+            </p:blipFill>
+            <p:spPr>
+              <a:xfrm>
+                <a:off x="10917859" y="2489977"/>
+                <a:ext cx="625009" cy="625009"/>
+              </a:xfrm>
+              <a:prstGeom prst="rect">
+                <a:avLst/>
+              </a:prstGeom>
+            </p:spPr>
+          </p:pic>
+          <p:pic>
+            <p:nvPicPr>
+              <p:cNvPr id="256" name="Graphic 255" descr="Clipboard Badge with solid fill">
+                <a:extLst>
+                  <a:ext uri="{FF2B5EF4-FFF2-40B4-BE49-F238E27FC236}">
+                    <a16:creationId xmlns:a16="http://schemas.microsoft.com/office/drawing/2014/main" id="{B2E0AEB5-BBCA-5106-92E9-BBD07B7BD2F8}"/>
+                  </a:ext>
+                </a:extLst>
+              </p:cNvPr>
+              <p:cNvPicPr>
+                <a:picLocks noChangeAspect="1"/>
+              </p:cNvPicPr>
+              <p:nvPr/>
+            </p:nvPicPr>
+            <p:blipFill>
+              <a:blip>
+                <a:extLst>
+                  <a:ext uri="{96DAC541-7B7A-43D3-8B79-37D633B846F1}">
+                    <asvg:svgBlip xmlns:asvg="http://schemas.microsoft.com/office/drawing/2016/SVG/main" r:embed="rId11"/>
+                  </a:ext>
+                </a:extLst>
+              </a:blip>
+              <a:stretch>
+                <a:fillRect/>
+              </a:stretch>
+            </p:blipFill>
+            <p:spPr>
+              <a:xfrm>
+                <a:off x="9631675" y="1303074"/>
+                <a:ext cx="398413" cy="398413"/>
+              </a:xfrm>
+              <a:prstGeom prst="rect">
+                <a:avLst/>
+              </a:prstGeom>
+            </p:spPr>
+          </p:pic>
+          <p:pic>
+            <p:nvPicPr>
+              <p:cNvPr id="257" name="Graphic 256" descr="Clipboard All Crosses with solid fill">
+                <a:extLst>
+                  <a:ext uri="{FF2B5EF4-FFF2-40B4-BE49-F238E27FC236}">
+                    <a16:creationId xmlns:a16="http://schemas.microsoft.com/office/drawing/2014/main" id="{C48AA22C-BDB5-6A94-50F3-DA17E8BB315E}"/>
+                  </a:ext>
+                </a:extLst>
+              </p:cNvPr>
+              <p:cNvPicPr>
+                <a:picLocks noChangeAspect="1"/>
+              </p:cNvPicPr>
+              <p:nvPr/>
+            </p:nvPicPr>
+            <p:blipFill>
+              <a:blip>
+                <a:extLst>
+                  <a:ext uri="{96DAC541-7B7A-43D3-8B79-37D633B846F1}">
+                    <asvg:svgBlip xmlns:asvg="http://schemas.microsoft.com/office/drawing/2016/SVG/main" r:embed="rId12"/>
+                  </a:ext>
+                </a:extLst>
+              </a:blip>
+              <a:stretch>
+                <a:fillRect/>
+              </a:stretch>
+            </p:blipFill>
+            <p:spPr>
+              <a:xfrm>
+                <a:off x="8409502" y="1303074"/>
+                <a:ext cx="398413" cy="398413"/>
+              </a:xfrm>
+              <a:prstGeom prst="rect">
+                <a:avLst/>
+              </a:prstGeom>
+            </p:spPr>
+          </p:pic>
+          <p:pic>
+            <p:nvPicPr>
+              <p:cNvPr id="258" name="Graphic 257" descr="Cloud Computing with solid fill">
+                <a:extLst>
+                  <a:ext uri="{FF2B5EF4-FFF2-40B4-BE49-F238E27FC236}">
+                    <a16:creationId xmlns:a16="http://schemas.microsoft.com/office/drawing/2014/main" id="{81D486B6-2D8F-9F47-49AD-C80D8F0AF3A1}"/>
+                  </a:ext>
+                </a:extLst>
+              </p:cNvPr>
+              <p:cNvPicPr>
+                <a:picLocks noChangeAspect="1"/>
+              </p:cNvPicPr>
+              <p:nvPr/>
+            </p:nvPicPr>
+            <p:blipFill>
+              <a:blip>
+                <a:extLst>
+                  <a:ext uri="{96DAC541-7B7A-43D3-8B79-37D633B846F1}">
+                    <asvg:svgBlip xmlns:asvg="http://schemas.microsoft.com/office/drawing/2016/SVG/main" r:embed="rId13"/>
+                  </a:ext>
+                </a:extLst>
+              </a:blip>
+              <a:stretch>
+                <a:fillRect/>
+              </a:stretch>
+            </p:blipFill>
+            <p:spPr>
+              <a:xfrm>
+                <a:off x="5773687" y="5268401"/>
+                <a:ext cx="398413" cy="398413"/>
+              </a:xfrm>
+              <a:prstGeom prst="rect">
+                <a:avLst/>
+              </a:prstGeom>
+            </p:spPr>
+          </p:pic>
+          <p:pic>
+            <p:nvPicPr>
+              <p:cNvPr id="259" name="Graphic 258" descr="Connections with solid fill">
+                <a:extLst>
+                  <a:ext uri="{FF2B5EF4-FFF2-40B4-BE49-F238E27FC236}">
+                    <a16:creationId xmlns:a16="http://schemas.microsoft.com/office/drawing/2014/main" id="{83A0A79F-4FB0-F48A-6DB9-430AA55F2469}"/>
+                  </a:ext>
+                </a:extLst>
+              </p:cNvPr>
+              <p:cNvPicPr>
+                <a:picLocks noChangeAspect="1"/>
+              </p:cNvPicPr>
+              <p:nvPr/>
+            </p:nvPicPr>
+            <p:blipFill>
+              <a:blip>
+                <a:extLst>
+                  <a:ext uri="{96DAC541-7B7A-43D3-8B79-37D633B846F1}">
+                    <asvg:svgBlip xmlns:asvg="http://schemas.microsoft.com/office/drawing/2016/SVG/main" r:embed="rId14"/>
+                  </a:ext>
+                </a:extLst>
+              </a:blip>
+              <a:stretch>
+                <a:fillRect/>
+              </a:stretch>
+            </p:blipFill>
+            <p:spPr>
+              <a:xfrm>
+                <a:off x="7074299" y="1306029"/>
+                <a:ext cx="398413" cy="398413"/>
+              </a:xfrm>
+              <a:prstGeom prst="rect">
+                <a:avLst/>
+              </a:prstGeom>
+            </p:spPr>
+          </p:pic>
+          <p:pic>
+            <p:nvPicPr>
+              <p:cNvPr id="260" name="Graphic 259" descr="Cube with solid fill">
+                <a:extLst>
+                  <a:ext uri="{FF2B5EF4-FFF2-40B4-BE49-F238E27FC236}">
+                    <a16:creationId xmlns:a16="http://schemas.microsoft.com/office/drawing/2014/main" id="{D78B821C-09BC-4B78-B99D-281916ED14AC}"/>
+                  </a:ext>
+                </a:extLst>
+              </p:cNvPr>
+              <p:cNvPicPr>
+                <a:picLocks noChangeAspect="1"/>
+              </p:cNvPicPr>
+              <p:nvPr/>
+            </p:nvPicPr>
+            <p:blipFill>
+              <a:blip>
+                <a:extLst>
+                  <a:ext uri="{96DAC541-7B7A-43D3-8B79-37D633B846F1}">
+                    <asvg:svgBlip xmlns:asvg="http://schemas.microsoft.com/office/drawing/2016/SVG/main" r:embed="rId15"/>
+                  </a:ext>
+                </a:extLst>
+              </a:blip>
+              <a:stretch>
+                <a:fillRect/>
+              </a:stretch>
+            </p:blipFill>
+            <p:spPr>
+              <a:xfrm>
+                <a:off x="7625630" y="3425139"/>
+                <a:ext cx="398412" cy="398412"/>
+              </a:xfrm>
+              <a:prstGeom prst="rect">
+                <a:avLst/>
+              </a:prstGeom>
+            </p:spPr>
+          </p:pic>
+          <p:pic>
+            <p:nvPicPr>
+              <p:cNvPr id="261" name="Graphic 260" descr="Database with solid fill">
+                <a:extLst>
+                  <a:ext uri="{FF2B5EF4-FFF2-40B4-BE49-F238E27FC236}">
+                    <a16:creationId xmlns:a16="http://schemas.microsoft.com/office/drawing/2014/main" id="{527F25A7-10F5-1AA2-2634-857AFEBAFC10}"/>
+                  </a:ext>
+                </a:extLst>
+              </p:cNvPr>
+              <p:cNvPicPr>
+                <a:picLocks noChangeAspect="1"/>
+              </p:cNvPicPr>
+              <p:nvPr/>
+            </p:nvPicPr>
+            <p:blipFill>
+              <a:blip>
+                <a:extLst>
+                  <a:ext uri="{96DAC541-7B7A-43D3-8B79-37D633B846F1}">
+                    <asvg:svgBlip xmlns:asvg="http://schemas.microsoft.com/office/drawing/2016/SVG/main" r:embed="rId16"/>
+                  </a:ext>
+                </a:extLst>
+              </a:blip>
+              <a:stretch>
+                <a:fillRect/>
+              </a:stretch>
+            </p:blipFill>
+            <p:spPr>
+              <a:xfrm>
+                <a:off x="6724020" y="5268400"/>
+                <a:ext cx="398413" cy="398413"/>
+              </a:xfrm>
+              <a:prstGeom prst="rect">
+                <a:avLst/>
+              </a:prstGeom>
+            </p:spPr>
+          </p:pic>
+          <p:sp>
+            <p:nvSpPr>
+              <p:cNvPr id="262" name="TextBox 261">
+                <a:extLst>
+                  <a:ext uri="{FF2B5EF4-FFF2-40B4-BE49-F238E27FC236}">
+                    <a16:creationId xmlns:a16="http://schemas.microsoft.com/office/drawing/2014/main" id="{42EC3669-9047-8730-3FE7-FDE320CAEBDE}"/>
+                  </a:ext>
+                </a:extLst>
+              </p:cNvPr>
+              <p:cNvSpPr txBox="1"/>
+              <p:nvPr/>
+            </p:nvSpPr>
+            <p:spPr>
+              <a:xfrm>
+                <a:off x="7521326" y="3738865"/>
+                <a:ext cx="603050" cy="215444"/>
+              </a:xfrm>
+              <a:prstGeom prst="rect">
+                <a:avLst/>
+              </a:prstGeom>
+              <a:noFill/>
+            </p:spPr>
+            <p:txBody>
+              <a:bodyPr wrap="none" rtlCol="0">
+                <a:spAutoFit/>
+              </a:bodyPr>
+              <a:lstStyle/>
+              <a:p>
+                <a:r>
+                  <a:rPr lang="en-US" sz="800" b="1" noProof="0" dirty="0"/>
+                  <a:t>Domains</a:t>
+                </a:r>
+              </a:p>
+            </p:txBody>
+          </p:sp>
+          <p:sp>
+            <p:nvSpPr>
+              <p:cNvPr id="263" name="TextBox 262">
+                <a:extLst>
+                  <a:ext uri="{FF2B5EF4-FFF2-40B4-BE49-F238E27FC236}">
+                    <a16:creationId xmlns:a16="http://schemas.microsoft.com/office/drawing/2014/main" id="{925105F1-F97B-847F-B510-179F37702ECC}"/>
+                  </a:ext>
+                </a:extLst>
+              </p:cNvPr>
+              <p:cNvSpPr txBox="1"/>
+              <p:nvPr/>
+            </p:nvSpPr>
+            <p:spPr>
+              <a:xfrm>
+                <a:off x="8266029" y="3738865"/>
+                <a:ext cx="830677" cy="215444"/>
+              </a:xfrm>
+              <a:prstGeom prst="rect">
+                <a:avLst/>
+              </a:prstGeom>
+              <a:noFill/>
+            </p:spPr>
+            <p:txBody>
+              <a:bodyPr wrap="none" rtlCol="0">
+                <a:spAutoFit/>
+              </a:bodyPr>
+              <a:lstStyle/>
+              <a:p>
+                <a:r>
+                  <a:rPr lang="en-US" sz="800" b="1" noProof="0" dirty="0"/>
+                  <a:t>Dataproducts</a:t>
+                </a:r>
+              </a:p>
+            </p:txBody>
+          </p:sp>
+          <p:sp>
+            <p:nvSpPr>
+              <p:cNvPr id="264" name="TextBox 263">
+                <a:extLst>
+                  <a:ext uri="{FF2B5EF4-FFF2-40B4-BE49-F238E27FC236}">
+                    <a16:creationId xmlns:a16="http://schemas.microsoft.com/office/drawing/2014/main" id="{20593C8C-36E1-5C19-2316-E1290B92914F}"/>
+                  </a:ext>
+                </a:extLst>
+              </p:cNvPr>
+              <p:cNvSpPr txBox="1"/>
+              <p:nvPr/>
+            </p:nvSpPr>
+            <p:spPr>
+              <a:xfrm>
+                <a:off x="9326496" y="3027907"/>
+                <a:ext cx="630301" cy="215444"/>
+              </a:xfrm>
+              <a:prstGeom prst="rect">
+                <a:avLst/>
+              </a:prstGeom>
+              <a:noFill/>
+            </p:spPr>
+            <p:txBody>
+              <a:bodyPr wrap="none" rtlCol="0">
+                <a:spAutoFit/>
+              </a:bodyPr>
+              <a:lstStyle/>
+              <a:p>
+                <a:pPr algn="ctr"/>
+                <a:r>
+                  <a:rPr lang="en-US" sz="800" b="1" noProof="0" dirty="0"/>
+                  <a:t>Semantic</a:t>
+                </a:r>
+              </a:p>
+            </p:txBody>
+          </p:sp>
+          <p:sp>
+            <p:nvSpPr>
+              <p:cNvPr id="265" name="TextBox 264">
+                <a:extLst>
+                  <a:ext uri="{FF2B5EF4-FFF2-40B4-BE49-F238E27FC236}">
+                    <a16:creationId xmlns:a16="http://schemas.microsoft.com/office/drawing/2014/main" id="{B5250814-C7C9-407D-E100-144E9EA4DA99}"/>
+                  </a:ext>
+                </a:extLst>
+              </p:cNvPr>
+              <p:cNvSpPr txBox="1"/>
+              <p:nvPr/>
+            </p:nvSpPr>
+            <p:spPr>
+              <a:xfrm>
+                <a:off x="5579428" y="1767301"/>
+                <a:ext cx="965897" cy="215444"/>
+              </a:xfrm>
+              <a:prstGeom prst="rect">
+                <a:avLst/>
+              </a:prstGeom>
+              <a:noFill/>
+            </p:spPr>
+            <p:txBody>
+              <a:bodyPr wrap="square" rtlCol="0">
+                <a:spAutoFit/>
+              </a:bodyPr>
+              <a:lstStyle/>
+              <a:p>
+                <a:pPr algn="ctr"/>
+                <a:r>
+                  <a:rPr lang="en-US" sz="800" b="1" dirty="0"/>
+                  <a:t>Vision &amp; Strategy</a:t>
+                </a:r>
+                <a:endParaRPr lang="en-US" sz="800" b="1" noProof="0" dirty="0"/>
+              </a:p>
+            </p:txBody>
+          </p:sp>
+          <p:sp>
+            <p:nvSpPr>
+              <p:cNvPr id="266" name="TextBox 265">
+                <a:extLst>
+                  <a:ext uri="{FF2B5EF4-FFF2-40B4-BE49-F238E27FC236}">
+                    <a16:creationId xmlns:a16="http://schemas.microsoft.com/office/drawing/2014/main" id="{5C4B771B-DC47-8EC1-2468-FD37D92395EA}"/>
+                  </a:ext>
+                </a:extLst>
+              </p:cNvPr>
+              <p:cNvSpPr txBox="1"/>
+              <p:nvPr/>
+            </p:nvSpPr>
+            <p:spPr>
+              <a:xfrm>
+                <a:off x="6790289" y="1763164"/>
+                <a:ext cx="965897" cy="338554"/>
+              </a:xfrm>
+              <a:prstGeom prst="rect">
+                <a:avLst/>
+              </a:prstGeom>
+              <a:noFill/>
+            </p:spPr>
+            <p:txBody>
+              <a:bodyPr wrap="square" rtlCol="0">
+                <a:spAutoFit/>
+              </a:bodyPr>
+              <a:lstStyle/>
+              <a:p>
+                <a:pPr algn="ctr"/>
+                <a:r>
+                  <a:rPr lang="en-US" sz="800" b="1" noProof="0" dirty="0"/>
+                  <a:t>People, Culture &amp; Organization</a:t>
+                </a:r>
+              </a:p>
+            </p:txBody>
+          </p:sp>
+          <p:sp>
+            <p:nvSpPr>
+              <p:cNvPr id="267" name="TextBox 266">
+                <a:extLst>
+                  <a:ext uri="{FF2B5EF4-FFF2-40B4-BE49-F238E27FC236}">
+                    <a16:creationId xmlns:a16="http://schemas.microsoft.com/office/drawing/2014/main" id="{D6F6FDA0-F0F1-4337-4CC1-B42A2E51FF28}"/>
+                  </a:ext>
+                </a:extLst>
+              </p:cNvPr>
+              <p:cNvSpPr txBox="1"/>
+              <p:nvPr/>
+            </p:nvSpPr>
+            <p:spPr>
+              <a:xfrm>
+                <a:off x="8046740" y="1769398"/>
+                <a:ext cx="1121843" cy="338554"/>
+              </a:xfrm>
+              <a:prstGeom prst="rect">
+                <a:avLst/>
+              </a:prstGeom>
+              <a:noFill/>
+            </p:spPr>
+            <p:txBody>
+              <a:bodyPr wrap="square" rtlCol="0">
+                <a:spAutoFit/>
+              </a:bodyPr>
+              <a:lstStyle/>
+              <a:p>
+                <a:pPr algn="ctr"/>
+                <a:r>
+                  <a:rPr lang="en-US" sz="800" b="1" noProof="0" dirty="0"/>
+                  <a:t>Policies, Guardrails &amp; Blueprints</a:t>
+                </a:r>
+              </a:p>
+            </p:txBody>
+          </p:sp>
+          <p:sp>
+            <p:nvSpPr>
+              <p:cNvPr id="268" name="TextBox 267">
+                <a:extLst>
+                  <a:ext uri="{FF2B5EF4-FFF2-40B4-BE49-F238E27FC236}">
+                    <a16:creationId xmlns:a16="http://schemas.microsoft.com/office/drawing/2014/main" id="{42F04A98-60A9-0354-8453-7ADB7504B558}"/>
+                  </a:ext>
+                </a:extLst>
+              </p:cNvPr>
+              <p:cNvSpPr txBox="1"/>
+              <p:nvPr/>
+            </p:nvSpPr>
+            <p:spPr>
+              <a:xfrm>
+                <a:off x="9347934" y="1764189"/>
+                <a:ext cx="965897" cy="338554"/>
+              </a:xfrm>
+              <a:prstGeom prst="rect">
+                <a:avLst/>
+              </a:prstGeom>
+              <a:noFill/>
+            </p:spPr>
+            <p:txBody>
+              <a:bodyPr wrap="square" rtlCol="0">
+                <a:spAutoFit/>
+              </a:bodyPr>
+              <a:lstStyle/>
+              <a:p>
+                <a:pPr algn="ctr"/>
+                <a:r>
+                  <a:rPr lang="en-US" sz="800" b="1" noProof="0" dirty="0"/>
+                  <a:t>Trust, Risk &amp; Compliance</a:t>
+                </a:r>
+              </a:p>
+            </p:txBody>
+          </p:sp>
+          <p:sp>
+            <p:nvSpPr>
+              <p:cNvPr id="269" name="TextBox 268">
+                <a:extLst>
+                  <a:ext uri="{FF2B5EF4-FFF2-40B4-BE49-F238E27FC236}">
+                    <a16:creationId xmlns:a16="http://schemas.microsoft.com/office/drawing/2014/main" id="{123FEE82-310C-6A9F-A466-B8481B86CA5B}"/>
+                  </a:ext>
+                </a:extLst>
+              </p:cNvPr>
+              <p:cNvSpPr txBox="1"/>
+              <p:nvPr/>
+            </p:nvSpPr>
+            <p:spPr>
+              <a:xfrm>
+                <a:off x="5574376" y="5765431"/>
+                <a:ext cx="838691" cy="338554"/>
+              </a:xfrm>
+              <a:prstGeom prst="rect">
+                <a:avLst/>
+              </a:prstGeom>
+              <a:noFill/>
+            </p:spPr>
+            <p:txBody>
+              <a:bodyPr wrap="none" rtlCol="0">
+                <a:spAutoFit/>
+              </a:bodyPr>
+              <a:lstStyle/>
+              <a:p>
+                <a:pPr algn="ctr"/>
+                <a:r>
+                  <a:rPr lang="en-US" sz="800" b="1" noProof="0" dirty="0"/>
+                  <a:t>Platform &amp;</a:t>
+                </a:r>
+                <a:br>
+                  <a:rPr lang="en-US" sz="800" b="1" noProof="0" dirty="0"/>
+                </a:br>
+                <a:r>
+                  <a:rPr lang="en-US" sz="800" b="1" noProof="0" dirty="0"/>
+                  <a:t>Infrastructure</a:t>
+                </a:r>
+              </a:p>
+            </p:txBody>
+          </p:sp>
+          <p:sp>
+            <p:nvSpPr>
+              <p:cNvPr id="270" name="TextBox 269">
+                <a:extLst>
+                  <a:ext uri="{FF2B5EF4-FFF2-40B4-BE49-F238E27FC236}">
+                    <a16:creationId xmlns:a16="http://schemas.microsoft.com/office/drawing/2014/main" id="{3A49ACDD-BAD0-92B3-E4E6-2E4EC3ECD1F8}"/>
+                  </a:ext>
+                </a:extLst>
+              </p:cNvPr>
+              <p:cNvSpPr txBox="1"/>
+              <p:nvPr/>
+            </p:nvSpPr>
+            <p:spPr>
+              <a:xfrm>
+                <a:off x="6483844" y="5758131"/>
+                <a:ext cx="878767" cy="338554"/>
+              </a:xfrm>
+              <a:prstGeom prst="rect">
+                <a:avLst/>
+              </a:prstGeom>
+              <a:noFill/>
+            </p:spPr>
+            <p:txBody>
+              <a:bodyPr wrap="none" rtlCol="0">
+                <a:spAutoFit/>
+              </a:bodyPr>
+              <a:lstStyle/>
+              <a:p>
+                <a:pPr algn="ctr"/>
+                <a:r>
+                  <a:rPr lang="en-US" sz="800" b="1" noProof="0" dirty="0"/>
+                  <a:t>Data Storage &amp;</a:t>
+                </a:r>
+                <a:br>
+                  <a:rPr lang="en-US" sz="800" b="1" noProof="0" dirty="0"/>
+                </a:br>
+                <a:r>
+                  <a:rPr lang="en-US" sz="800" b="1" noProof="0" dirty="0"/>
+                  <a:t> Management</a:t>
+                </a:r>
+              </a:p>
+            </p:txBody>
+          </p:sp>
+          <p:sp>
+            <p:nvSpPr>
+              <p:cNvPr id="271" name="TextBox 270">
+                <a:extLst>
+                  <a:ext uri="{FF2B5EF4-FFF2-40B4-BE49-F238E27FC236}">
+                    <a16:creationId xmlns:a16="http://schemas.microsoft.com/office/drawing/2014/main" id="{A8F301C3-598E-E378-49CC-EEC2D51766D9}"/>
+                  </a:ext>
+                </a:extLst>
+              </p:cNvPr>
+              <p:cNvSpPr txBox="1"/>
+              <p:nvPr/>
+            </p:nvSpPr>
+            <p:spPr>
+              <a:xfrm>
+                <a:off x="7433388" y="5758131"/>
+                <a:ext cx="1175322" cy="338554"/>
+              </a:xfrm>
+              <a:prstGeom prst="rect">
+                <a:avLst/>
+              </a:prstGeom>
+              <a:noFill/>
+            </p:spPr>
+            <p:txBody>
+              <a:bodyPr wrap="none" rtlCol="0">
+                <a:spAutoFit/>
+              </a:bodyPr>
+              <a:lstStyle/>
+              <a:p>
+                <a:pPr algn="ctr"/>
+                <a:r>
+                  <a:rPr lang="en-US" sz="800" b="1" noProof="0" dirty="0"/>
+                  <a:t>Analytics Platform &amp;</a:t>
+                </a:r>
+                <a:br>
+                  <a:rPr lang="en-US" sz="800" b="1" noProof="0" dirty="0"/>
+                </a:br>
+                <a:r>
+                  <a:rPr lang="en-US" sz="800" b="1" noProof="0" dirty="0"/>
+                  <a:t>Tooling</a:t>
+                </a:r>
+              </a:p>
+            </p:txBody>
+          </p:sp>
+          <p:sp>
+            <p:nvSpPr>
+              <p:cNvPr id="272" name="TextBox 271">
+                <a:extLst>
+                  <a:ext uri="{FF2B5EF4-FFF2-40B4-BE49-F238E27FC236}">
+                    <a16:creationId xmlns:a16="http://schemas.microsoft.com/office/drawing/2014/main" id="{E0FEB8A2-7A12-C639-8C48-BD5FD1F8E997}"/>
+                  </a:ext>
+                </a:extLst>
+              </p:cNvPr>
+              <p:cNvSpPr txBox="1"/>
+              <p:nvPr/>
+            </p:nvSpPr>
+            <p:spPr>
+              <a:xfrm>
+                <a:off x="8679487" y="5758131"/>
+                <a:ext cx="901208" cy="338554"/>
+              </a:xfrm>
+              <a:prstGeom prst="rect">
+                <a:avLst/>
+              </a:prstGeom>
+              <a:noFill/>
+            </p:spPr>
+            <p:txBody>
+              <a:bodyPr wrap="none" rtlCol="0">
+                <a:spAutoFit/>
+              </a:bodyPr>
+              <a:lstStyle/>
+              <a:p>
+                <a:pPr algn="ctr"/>
+                <a:r>
+                  <a:rPr lang="en-US" sz="800" b="1" noProof="0" dirty="0"/>
+                  <a:t>Observability &amp;</a:t>
+                </a:r>
+                <a:br>
+                  <a:rPr lang="en-US" sz="800" b="1" noProof="0" dirty="0"/>
+                </a:br>
+                <a:r>
+                  <a:rPr lang="en-US" sz="800" b="1" noProof="0" dirty="0" err="1"/>
+                  <a:t>Resilienz</a:t>
+                </a:r>
+                <a:endParaRPr lang="en-US" sz="800" b="1" noProof="0" dirty="0"/>
+              </a:p>
+            </p:txBody>
+          </p:sp>
+          <p:sp>
+            <p:nvSpPr>
+              <p:cNvPr id="273" name="TextBox 272">
+                <a:extLst>
+                  <a:ext uri="{FF2B5EF4-FFF2-40B4-BE49-F238E27FC236}">
+                    <a16:creationId xmlns:a16="http://schemas.microsoft.com/office/drawing/2014/main" id="{B1823D73-AC60-7E80-BB78-FA48A073F48B}"/>
+                  </a:ext>
+                </a:extLst>
+              </p:cNvPr>
+              <p:cNvSpPr txBox="1"/>
+              <p:nvPr/>
+            </p:nvSpPr>
+            <p:spPr>
+              <a:xfrm>
+                <a:off x="9651470" y="5765431"/>
+                <a:ext cx="662361" cy="338554"/>
+              </a:xfrm>
+              <a:prstGeom prst="rect">
+                <a:avLst/>
+              </a:prstGeom>
+              <a:noFill/>
+            </p:spPr>
+            <p:txBody>
+              <a:bodyPr wrap="none" rtlCol="0">
+                <a:spAutoFit/>
+              </a:bodyPr>
+              <a:lstStyle/>
+              <a:p>
+                <a:pPr algn="ctr"/>
+                <a:r>
+                  <a:rPr lang="en-US" sz="800" b="1" noProof="0" dirty="0"/>
+                  <a:t>Security &amp;</a:t>
+                </a:r>
+                <a:br>
+                  <a:rPr lang="en-US" sz="800" b="1" noProof="0" dirty="0"/>
+                </a:br>
+                <a:r>
+                  <a:rPr lang="en-US" sz="800" b="1" noProof="0" dirty="0"/>
+                  <a:t>Identity</a:t>
+                </a:r>
+              </a:p>
+            </p:txBody>
+          </p:sp>
+          <p:sp>
+            <p:nvSpPr>
+              <p:cNvPr id="274" name="TextBox 273">
+                <a:extLst>
+                  <a:ext uri="{FF2B5EF4-FFF2-40B4-BE49-F238E27FC236}">
+                    <a16:creationId xmlns:a16="http://schemas.microsoft.com/office/drawing/2014/main" id="{08E9EAEE-9E81-E306-1241-FCEAD98237DB}"/>
+                  </a:ext>
+                </a:extLst>
+              </p:cNvPr>
+              <p:cNvSpPr txBox="1"/>
+              <p:nvPr/>
+            </p:nvSpPr>
+            <p:spPr>
+              <a:xfrm>
+                <a:off x="8148802" y="2430229"/>
+                <a:ext cx="710451" cy="215444"/>
+              </a:xfrm>
+              <a:prstGeom prst="rect">
+                <a:avLst/>
+              </a:prstGeom>
+              <a:noFill/>
+            </p:spPr>
+            <p:txBody>
+              <a:bodyPr wrap="none" rtlCol="0">
+                <a:spAutoFit/>
+              </a:bodyPr>
+              <a:lstStyle/>
+              <a:p>
+                <a:r>
+                  <a:rPr lang="en-US" sz="800" b="1" noProof="0" dirty="0"/>
+                  <a:t>Experience</a:t>
+                </a:r>
+              </a:p>
+            </p:txBody>
+          </p:sp>
+          <p:sp>
+            <p:nvSpPr>
+              <p:cNvPr id="275" name="TextBox 274">
+                <a:extLst>
+                  <a:ext uri="{FF2B5EF4-FFF2-40B4-BE49-F238E27FC236}">
+                    <a16:creationId xmlns:a16="http://schemas.microsoft.com/office/drawing/2014/main" id="{9909FDD0-3A69-C41B-6CEA-938DEE8E17EE}"/>
+                  </a:ext>
+                </a:extLst>
+              </p:cNvPr>
+              <p:cNvSpPr txBox="1"/>
+              <p:nvPr/>
+            </p:nvSpPr>
+            <p:spPr>
+              <a:xfrm>
+                <a:off x="6188459" y="3502668"/>
+                <a:ext cx="708848" cy="215444"/>
+              </a:xfrm>
+              <a:prstGeom prst="rect">
+                <a:avLst/>
+              </a:prstGeom>
+              <a:noFill/>
+            </p:spPr>
+            <p:txBody>
+              <a:bodyPr wrap="none" rtlCol="0">
+                <a:spAutoFit/>
+              </a:bodyPr>
+              <a:lstStyle/>
+              <a:p>
+                <a:r>
+                  <a:rPr lang="en-US" sz="800" b="1" noProof="0" dirty="0"/>
+                  <a:t>Realization</a:t>
+                </a:r>
+              </a:p>
+            </p:txBody>
+          </p:sp>
+          <p:sp>
+            <p:nvSpPr>
+              <p:cNvPr id="276" name="TextBox 275">
+                <a:extLst>
+                  <a:ext uri="{FF2B5EF4-FFF2-40B4-BE49-F238E27FC236}">
+                    <a16:creationId xmlns:a16="http://schemas.microsoft.com/office/drawing/2014/main" id="{45D26BDA-022A-B092-A63C-C5B271DEADD7}"/>
+                  </a:ext>
+                </a:extLst>
+              </p:cNvPr>
+              <p:cNvSpPr txBox="1"/>
+              <p:nvPr/>
+            </p:nvSpPr>
+            <p:spPr>
+              <a:xfrm>
+                <a:off x="5854008" y="4715691"/>
+                <a:ext cx="1289135" cy="215444"/>
+              </a:xfrm>
+              <a:prstGeom prst="rect">
+                <a:avLst/>
+              </a:prstGeom>
+              <a:noFill/>
+            </p:spPr>
+            <p:txBody>
+              <a:bodyPr wrap="none" rtlCol="0">
+                <a:spAutoFit/>
+              </a:bodyPr>
+              <a:lstStyle/>
+              <a:p>
+                <a:r>
+                  <a:rPr lang="en-US" sz="800" b="1" noProof="0" dirty="0"/>
+                  <a:t>Services &amp; Applications</a:t>
+                </a:r>
+              </a:p>
+            </p:txBody>
+          </p:sp>
+          <p:sp>
+            <p:nvSpPr>
+              <p:cNvPr id="277" name="TextBox 276">
+                <a:extLst>
+                  <a:ext uri="{FF2B5EF4-FFF2-40B4-BE49-F238E27FC236}">
+                    <a16:creationId xmlns:a16="http://schemas.microsoft.com/office/drawing/2014/main" id="{7B97E630-9D66-A8E3-75CB-379EBA91DD3E}"/>
+                  </a:ext>
+                </a:extLst>
+              </p:cNvPr>
+              <p:cNvSpPr txBox="1"/>
+              <p:nvPr/>
+            </p:nvSpPr>
+            <p:spPr>
+              <a:xfrm>
+                <a:off x="5768766" y="3741893"/>
+                <a:ext cx="1452642" cy="215444"/>
+              </a:xfrm>
+              <a:prstGeom prst="rect">
+                <a:avLst/>
+              </a:prstGeom>
+              <a:noFill/>
+            </p:spPr>
+            <p:txBody>
+              <a:bodyPr wrap="none" rtlCol="0">
+                <a:spAutoFit/>
+              </a:bodyPr>
+              <a:lstStyle/>
+              <a:p>
+                <a:r>
+                  <a:rPr lang="en-US" sz="800" b="1" noProof="0" dirty="0"/>
+                  <a:t>Workflows &amp; Orchestration</a:t>
+                </a:r>
+              </a:p>
+            </p:txBody>
+          </p:sp>
+          <p:sp>
+            <p:nvSpPr>
+              <p:cNvPr id="278" name="Pentagon 277">
+                <a:extLst>
+                  <a:ext uri="{FF2B5EF4-FFF2-40B4-BE49-F238E27FC236}">
+                    <a16:creationId xmlns:a16="http://schemas.microsoft.com/office/drawing/2014/main" id="{77F1F4E5-DBAB-308C-AF21-8AE0EB5CBEDE}"/>
+                  </a:ext>
+                </a:extLst>
+              </p:cNvPr>
+              <p:cNvSpPr/>
+              <p:nvPr/>
+            </p:nvSpPr>
+            <p:spPr>
+              <a:xfrm>
+                <a:off x="5781807" y="2430978"/>
+                <a:ext cx="285243" cy="263192"/>
+              </a:xfrm>
+              <a:prstGeom prst="homePlate">
+                <a:avLst/>
+              </a:prstGeom>
+              <a:ln>
+                <a:noFill/>
+              </a:ln>
+            </p:spPr>
+            <p:style>
+              <a:lnRef idx="2">
+                <a:schemeClr val="accent1">
+                  <a:shade val="15000"/>
+                </a:schemeClr>
+              </a:lnRef>
+              <a:fillRef idx="1">
+                <a:schemeClr val="accent1"/>
+              </a:fillRef>
+              <a:effectRef idx="0">
+                <a:schemeClr val="accent1"/>
+              </a:effectRef>
+              <a:fontRef idx="minor">
+                <a:schemeClr val="lt1"/>
+              </a:fontRef>
+            </p:style>
+            <p:txBody>
+              <a:bodyPr rtlCol="0" anchor="ctr"/>
+              <a:lstStyle/>
+              <a:p>
+                <a:pPr algn="ctr"/>
+                <a:endParaRPr lang="de-DE"/>
+              </a:p>
+            </p:txBody>
+          </p:sp>
+          <p:sp>
+            <p:nvSpPr>
+              <p:cNvPr id="279" name="Chevron 278">
+                <a:extLst>
+                  <a:ext uri="{FF2B5EF4-FFF2-40B4-BE49-F238E27FC236}">
+                    <a16:creationId xmlns:a16="http://schemas.microsoft.com/office/drawing/2014/main" id="{9C940CED-432B-4912-B80D-3BA9AC52095A}"/>
+                  </a:ext>
+                </a:extLst>
+              </p:cNvPr>
+              <p:cNvSpPr/>
+              <p:nvPr/>
+            </p:nvSpPr>
+            <p:spPr>
+              <a:xfrm>
+                <a:off x="5980022" y="2426944"/>
+                <a:ext cx="387353" cy="267010"/>
+              </a:xfrm>
+              <a:prstGeom prst="chevron">
+                <a:avLst/>
+              </a:prstGeom>
+              <a:ln>
+                <a:noFill/>
+              </a:ln>
+            </p:spPr>
+            <p:style>
+              <a:lnRef idx="2">
+                <a:schemeClr val="accent1">
+                  <a:shade val="15000"/>
+                </a:schemeClr>
+              </a:lnRef>
+              <a:fillRef idx="1">
+                <a:schemeClr val="accent1"/>
+              </a:fillRef>
+              <a:effectRef idx="0">
+                <a:schemeClr val="accent1"/>
+              </a:effectRef>
+              <a:fontRef idx="minor">
+                <a:schemeClr val="lt1"/>
+              </a:fontRef>
+            </p:style>
+            <p:txBody>
+              <a:bodyPr rtlCol="0" anchor="ctr"/>
+              <a:lstStyle/>
+              <a:p>
+                <a:pPr algn="ctr"/>
+                <a:endParaRPr lang="de-DE">
+                  <a:solidFill>
+                    <a:schemeClr val="tx1"/>
+                  </a:solidFill>
+                </a:endParaRPr>
+              </a:p>
+            </p:txBody>
+          </p:sp>
+          <p:sp>
+            <p:nvSpPr>
+              <p:cNvPr id="280" name="Chevron 279">
+                <a:extLst>
+                  <a:ext uri="{FF2B5EF4-FFF2-40B4-BE49-F238E27FC236}">
+                    <a16:creationId xmlns:a16="http://schemas.microsoft.com/office/drawing/2014/main" id="{8C6FEF02-20AB-AE09-431C-E2690B5EF460}"/>
+                  </a:ext>
+                </a:extLst>
+              </p:cNvPr>
+              <p:cNvSpPr/>
+              <p:nvPr/>
+            </p:nvSpPr>
+            <p:spPr>
+              <a:xfrm>
+                <a:off x="6881674" y="2426881"/>
+                <a:ext cx="392859" cy="267010"/>
+              </a:xfrm>
+              <a:prstGeom prst="chevron">
+                <a:avLst/>
+              </a:prstGeom>
+              <a:ln>
+                <a:noFill/>
+              </a:ln>
+            </p:spPr>
+            <p:style>
+              <a:lnRef idx="2">
+                <a:schemeClr val="accent1">
+                  <a:shade val="15000"/>
+                </a:schemeClr>
+              </a:lnRef>
+              <a:fillRef idx="1">
+                <a:schemeClr val="accent1"/>
+              </a:fillRef>
+              <a:effectRef idx="0">
+                <a:schemeClr val="accent1"/>
+              </a:effectRef>
+              <a:fontRef idx="minor">
+                <a:schemeClr val="lt1"/>
+              </a:fontRef>
+            </p:style>
+            <p:txBody>
+              <a:bodyPr rtlCol="0" anchor="ctr"/>
+              <a:lstStyle/>
+              <a:p>
+                <a:pPr algn="ctr"/>
+                <a:endParaRPr lang="de-DE">
+                  <a:solidFill>
+                    <a:schemeClr val="tx1"/>
+                  </a:solidFill>
+                </a:endParaRPr>
+              </a:p>
+            </p:txBody>
+          </p:sp>
+          <p:sp>
+            <p:nvSpPr>
+              <p:cNvPr id="281" name="Chevron 280">
+                <a:extLst>
+                  <a:ext uri="{FF2B5EF4-FFF2-40B4-BE49-F238E27FC236}">
+                    <a16:creationId xmlns:a16="http://schemas.microsoft.com/office/drawing/2014/main" id="{6F53E4B6-3D21-CE6F-075F-34B1E051CD22}"/>
+                  </a:ext>
+                </a:extLst>
+              </p:cNvPr>
+              <p:cNvSpPr/>
+              <p:nvPr/>
+            </p:nvSpPr>
+            <p:spPr>
+              <a:xfrm>
+                <a:off x="6280180" y="2426880"/>
+                <a:ext cx="392859" cy="267010"/>
+              </a:xfrm>
+              <a:prstGeom prst="chevron">
+                <a:avLst/>
+              </a:prstGeom>
+              <a:ln>
+                <a:noFill/>
+              </a:ln>
+            </p:spPr>
+            <p:style>
+              <a:lnRef idx="2">
+                <a:schemeClr val="accent1">
+                  <a:shade val="15000"/>
+                </a:schemeClr>
+              </a:lnRef>
+              <a:fillRef idx="1">
+                <a:schemeClr val="accent1"/>
+              </a:fillRef>
+              <a:effectRef idx="0">
+                <a:schemeClr val="accent1"/>
+              </a:effectRef>
+              <a:fontRef idx="minor">
+                <a:schemeClr val="lt1"/>
+              </a:fontRef>
+            </p:style>
+            <p:txBody>
+              <a:bodyPr rtlCol="0" anchor="ctr"/>
+              <a:lstStyle/>
+              <a:p>
+                <a:pPr algn="ctr"/>
+                <a:endParaRPr lang="de-DE">
+                  <a:solidFill>
+                    <a:schemeClr val="tx1"/>
+                  </a:solidFill>
+                </a:endParaRPr>
+              </a:p>
+            </p:txBody>
+          </p:sp>
+          <p:sp>
+            <p:nvSpPr>
+              <p:cNvPr id="282" name="Rectangle 281">
+                <a:extLst>
+                  <a:ext uri="{FF2B5EF4-FFF2-40B4-BE49-F238E27FC236}">
+                    <a16:creationId xmlns:a16="http://schemas.microsoft.com/office/drawing/2014/main" id="{CD38B01A-F29F-4B2C-C967-5C40BA738FE3}"/>
+                  </a:ext>
+                </a:extLst>
+              </p:cNvPr>
+              <p:cNvSpPr/>
+              <p:nvPr/>
+            </p:nvSpPr>
+            <p:spPr>
+              <a:xfrm>
+                <a:off x="5781004" y="2722603"/>
+                <a:ext cx="265792" cy="477877"/>
+              </a:xfrm>
+              <a:prstGeom prst="rect">
+                <a:avLst/>
+              </a:prstGeom>
+              <a:ln>
+                <a:noFill/>
+              </a:ln>
+            </p:spPr>
+            <p:style>
+              <a:lnRef idx="2">
+                <a:schemeClr val="accent1">
+                  <a:shade val="15000"/>
+                </a:schemeClr>
+              </a:lnRef>
+              <a:fillRef idx="1">
+                <a:schemeClr val="accent1"/>
+              </a:fillRef>
+              <a:effectRef idx="0">
+                <a:schemeClr val="accent1"/>
+              </a:effectRef>
+              <a:fontRef idx="minor">
+                <a:schemeClr val="lt1"/>
+              </a:fontRef>
+            </p:style>
+            <p:txBody>
+              <a:bodyPr rtlCol="0" anchor="ctr"/>
+              <a:lstStyle/>
+              <a:p>
+                <a:pPr algn="ctr"/>
+                <a:endParaRPr lang="de-DE"/>
+              </a:p>
+            </p:txBody>
+          </p:sp>
+          <p:sp>
+            <p:nvSpPr>
+              <p:cNvPr id="283" name="Rectangle 282">
+                <a:extLst>
+                  <a:ext uri="{FF2B5EF4-FFF2-40B4-BE49-F238E27FC236}">
+                    <a16:creationId xmlns:a16="http://schemas.microsoft.com/office/drawing/2014/main" id="{D8B5172F-D778-51D1-5B17-563B60051A65}"/>
+                  </a:ext>
+                </a:extLst>
+              </p:cNvPr>
+              <p:cNvSpPr/>
+              <p:nvPr/>
+            </p:nvSpPr>
+            <p:spPr>
+              <a:xfrm>
+                <a:off x="6084668" y="2727531"/>
+                <a:ext cx="839098" cy="150029"/>
+              </a:xfrm>
+              <a:prstGeom prst="rect">
+                <a:avLst/>
+              </a:prstGeom>
+              <a:ln>
+                <a:noFill/>
+              </a:ln>
+            </p:spPr>
+            <p:style>
+              <a:lnRef idx="2">
+                <a:schemeClr val="accent1">
+                  <a:shade val="15000"/>
+                </a:schemeClr>
+              </a:lnRef>
+              <a:fillRef idx="1">
+                <a:schemeClr val="accent1"/>
+              </a:fillRef>
+              <a:effectRef idx="0">
+                <a:schemeClr val="accent1"/>
+              </a:effectRef>
+              <a:fontRef idx="minor">
+                <a:schemeClr val="lt1"/>
+              </a:fontRef>
+            </p:style>
+            <p:txBody>
+              <a:bodyPr rtlCol="0" anchor="ctr"/>
+              <a:lstStyle/>
+              <a:p>
+                <a:pPr algn="ctr"/>
+                <a:endParaRPr lang="de-DE"/>
+              </a:p>
+            </p:txBody>
+          </p:sp>
+          <p:sp>
+            <p:nvSpPr>
+              <p:cNvPr id="284" name="Chevron 283">
+                <a:extLst>
+                  <a:ext uri="{FF2B5EF4-FFF2-40B4-BE49-F238E27FC236}">
+                    <a16:creationId xmlns:a16="http://schemas.microsoft.com/office/drawing/2014/main" id="{9CBB9E3D-328F-DADD-7FB5-055370618BFA}"/>
+                  </a:ext>
+                </a:extLst>
+              </p:cNvPr>
+              <p:cNvSpPr/>
+              <p:nvPr/>
+            </p:nvSpPr>
+            <p:spPr>
+              <a:xfrm>
+                <a:off x="6580927" y="2426881"/>
+                <a:ext cx="392859" cy="267010"/>
+              </a:xfrm>
+              <a:prstGeom prst="chevron">
+                <a:avLst/>
+              </a:prstGeom>
+              <a:ln>
+                <a:noFill/>
+              </a:ln>
+            </p:spPr>
+            <p:style>
+              <a:lnRef idx="2">
+                <a:schemeClr val="accent1">
+                  <a:shade val="15000"/>
+                </a:schemeClr>
+              </a:lnRef>
+              <a:fillRef idx="1">
+                <a:schemeClr val="accent1"/>
+              </a:fillRef>
+              <a:effectRef idx="0">
+                <a:schemeClr val="accent1"/>
+              </a:effectRef>
+              <a:fontRef idx="minor">
+                <a:schemeClr val="lt1"/>
+              </a:fontRef>
+            </p:style>
+            <p:txBody>
+              <a:bodyPr rtlCol="0" anchor="ctr"/>
+              <a:lstStyle/>
+              <a:p>
+                <a:pPr algn="ctr"/>
+                <a:endParaRPr lang="de-DE">
+                  <a:solidFill>
+                    <a:schemeClr val="tx1"/>
+                  </a:solidFill>
+                </a:endParaRPr>
+              </a:p>
+            </p:txBody>
+          </p:sp>
+          <p:sp>
+            <p:nvSpPr>
+              <p:cNvPr id="285" name="Rectangle 284">
+                <a:extLst>
+                  <a:ext uri="{FF2B5EF4-FFF2-40B4-BE49-F238E27FC236}">
+                    <a16:creationId xmlns:a16="http://schemas.microsoft.com/office/drawing/2014/main" id="{30425142-C6B8-5E10-28FC-730506A51A2D}"/>
+                  </a:ext>
+                </a:extLst>
+              </p:cNvPr>
+              <p:cNvSpPr/>
+              <p:nvPr/>
+            </p:nvSpPr>
+            <p:spPr>
+              <a:xfrm>
+                <a:off x="6964625" y="2726355"/>
+                <a:ext cx="258535" cy="720446"/>
+              </a:xfrm>
+              <a:prstGeom prst="rect">
+                <a:avLst/>
+              </a:prstGeom>
+              <a:ln>
+                <a:noFill/>
+              </a:ln>
+            </p:spPr>
+            <p:style>
+              <a:lnRef idx="2">
+                <a:schemeClr val="accent1">
+                  <a:shade val="15000"/>
+                </a:schemeClr>
+              </a:lnRef>
+              <a:fillRef idx="1">
+                <a:schemeClr val="accent1"/>
+              </a:fillRef>
+              <a:effectRef idx="0">
+                <a:schemeClr val="accent1"/>
+              </a:effectRef>
+              <a:fontRef idx="minor">
+                <a:schemeClr val="lt1"/>
+              </a:fontRef>
+            </p:style>
+            <p:txBody>
+              <a:bodyPr rtlCol="0" anchor="ctr"/>
+              <a:lstStyle/>
+              <a:p>
+                <a:pPr algn="ctr"/>
+                <a:endParaRPr lang="de-DE"/>
+              </a:p>
+            </p:txBody>
+          </p:sp>
+          <p:sp>
+            <p:nvSpPr>
+              <p:cNvPr id="286" name="Rectangle 285">
+                <a:extLst>
+                  <a:ext uri="{FF2B5EF4-FFF2-40B4-BE49-F238E27FC236}">
+                    <a16:creationId xmlns:a16="http://schemas.microsoft.com/office/drawing/2014/main" id="{E05B52BD-6540-6040-7991-1066D367D4A0}"/>
+                  </a:ext>
+                </a:extLst>
+              </p:cNvPr>
+              <p:cNvSpPr/>
+              <p:nvPr/>
+            </p:nvSpPr>
+            <p:spPr>
+              <a:xfrm>
+                <a:off x="6083664" y="2901571"/>
+                <a:ext cx="254453" cy="300531"/>
+              </a:xfrm>
+              <a:prstGeom prst="rect">
+                <a:avLst/>
+              </a:prstGeom>
+              <a:ln>
+                <a:noFill/>
+              </a:ln>
+            </p:spPr>
+            <p:style>
+              <a:lnRef idx="2">
+                <a:schemeClr val="accent1">
+                  <a:shade val="15000"/>
+                </a:schemeClr>
+              </a:lnRef>
+              <a:fillRef idx="1">
+                <a:schemeClr val="accent1"/>
+              </a:fillRef>
+              <a:effectRef idx="0">
+                <a:schemeClr val="accent1"/>
+              </a:effectRef>
+              <a:fontRef idx="minor">
+                <a:schemeClr val="lt1"/>
+              </a:fontRef>
+            </p:style>
+            <p:txBody>
+              <a:bodyPr rtlCol="0" anchor="ctr"/>
+              <a:lstStyle/>
+              <a:p>
+                <a:pPr algn="ctr"/>
+                <a:endParaRPr lang="de-DE"/>
+              </a:p>
+            </p:txBody>
+          </p:sp>
+          <p:sp>
+            <p:nvSpPr>
+              <p:cNvPr id="287" name="Rectangle 286">
+                <a:extLst>
+                  <a:ext uri="{FF2B5EF4-FFF2-40B4-BE49-F238E27FC236}">
+                    <a16:creationId xmlns:a16="http://schemas.microsoft.com/office/drawing/2014/main" id="{03D875CF-B30B-CFD0-A33D-8BA69BDF9062}"/>
+                  </a:ext>
+                </a:extLst>
+              </p:cNvPr>
+              <p:cNvSpPr/>
+              <p:nvPr/>
+            </p:nvSpPr>
+            <p:spPr>
+              <a:xfrm>
+                <a:off x="6374987" y="2901572"/>
+                <a:ext cx="271506" cy="300531"/>
+              </a:xfrm>
+              <a:prstGeom prst="rect">
+                <a:avLst/>
+              </a:prstGeom>
+              <a:ln>
+                <a:noFill/>
+              </a:ln>
+            </p:spPr>
+            <p:style>
+              <a:lnRef idx="2">
+                <a:schemeClr val="accent1">
+                  <a:shade val="15000"/>
+                </a:schemeClr>
+              </a:lnRef>
+              <a:fillRef idx="1">
+                <a:schemeClr val="accent1"/>
+              </a:fillRef>
+              <a:effectRef idx="0">
+                <a:schemeClr val="accent1"/>
+              </a:effectRef>
+              <a:fontRef idx="minor">
+                <a:schemeClr val="lt1"/>
+              </a:fontRef>
+            </p:style>
+            <p:txBody>
+              <a:bodyPr rtlCol="0" anchor="ctr"/>
+              <a:lstStyle/>
+              <a:p>
+                <a:pPr algn="ctr"/>
+                <a:endParaRPr lang="de-DE"/>
+              </a:p>
+            </p:txBody>
+          </p:sp>
+          <p:sp>
+            <p:nvSpPr>
+              <p:cNvPr id="288" name="Rectangle 287">
+                <a:extLst>
+                  <a:ext uri="{FF2B5EF4-FFF2-40B4-BE49-F238E27FC236}">
+                    <a16:creationId xmlns:a16="http://schemas.microsoft.com/office/drawing/2014/main" id="{C28A8A0E-48B7-FC7B-C857-800DF581D36B}"/>
+                  </a:ext>
+                </a:extLst>
+              </p:cNvPr>
+              <p:cNvSpPr/>
+              <p:nvPr/>
+            </p:nvSpPr>
+            <p:spPr>
+              <a:xfrm>
+                <a:off x="6689804" y="2901573"/>
+                <a:ext cx="231510" cy="300531"/>
+              </a:xfrm>
+              <a:prstGeom prst="rect">
+                <a:avLst/>
+              </a:prstGeom>
+              <a:ln>
+                <a:noFill/>
+              </a:ln>
+            </p:spPr>
+            <p:style>
+              <a:lnRef idx="2">
+                <a:schemeClr val="accent1">
+                  <a:shade val="15000"/>
+                </a:schemeClr>
+              </a:lnRef>
+              <a:fillRef idx="1">
+                <a:schemeClr val="accent1"/>
+              </a:fillRef>
+              <a:effectRef idx="0">
+                <a:schemeClr val="accent1"/>
+              </a:effectRef>
+              <a:fontRef idx="minor">
+                <a:schemeClr val="lt1"/>
+              </a:fontRef>
+            </p:style>
+            <p:txBody>
+              <a:bodyPr rtlCol="0" anchor="ctr"/>
+              <a:lstStyle/>
+              <a:p>
+                <a:pPr algn="ctr"/>
+                <a:endParaRPr lang="de-DE"/>
+              </a:p>
+            </p:txBody>
+          </p:sp>
+          <p:sp>
+            <p:nvSpPr>
+              <p:cNvPr id="289" name="Rectangle 288">
+                <a:extLst>
+                  <a:ext uri="{FF2B5EF4-FFF2-40B4-BE49-F238E27FC236}">
+                    <a16:creationId xmlns:a16="http://schemas.microsoft.com/office/drawing/2014/main" id="{725C001B-4C7A-846C-3461-F3C4B3DB051A}"/>
+                  </a:ext>
+                </a:extLst>
+              </p:cNvPr>
+              <p:cNvSpPr/>
+              <p:nvPr/>
+            </p:nvSpPr>
+            <p:spPr>
+              <a:xfrm>
+                <a:off x="5781807" y="3235980"/>
+                <a:ext cx="1140956" cy="213165"/>
+              </a:xfrm>
+              <a:prstGeom prst="rect">
+                <a:avLst/>
+              </a:prstGeom>
+              <a:ln>
+                <a:noFill/>
+              </a:ln>
+            </p:spPr>
+            <p:style>
+              <a:lnRef idx="2">
+                <a:schemeClr val="accent1">
+                  <a:shade val="15000"/>
+                </a:schemeClr>
+              </a:lnRef>
+              <a:fillRef idx="1">
+                <a:schemeClr val="accent1"/>
+              </a:fillRef>
+              <a:effectRef idx="0">
+                <a:schemeClr val="accent1"/>
+              </a:effectRef>
+              <a:fontRef idx="minor">
+                <a:schemeClr val="lt1"/>
+              </a:fontRef>
+            </p:style>
+            <p:txBody>
+              <a:bodyPr rtlCol="0" anchor="ctr"/>
+              <a:lstStyle/>
+              <a:p>
+                <a:pPr algn="ctr"/>
+                <a:endParaRPr lang="de-DE"/>
+              </a:p>
+            </p:txBody>
+          </p:sp>
+          <p:sp>
+            <p:nvSpPr>
+              <p:cNvPr id="290" name="TextBox 289">
+                <a:extLst>
+                  <a:ext uri="{FF2B5EF4-FFF2-40B4-BE49-F238E27FC236}">
+                    <a16:creationId xmlns:a16="http://schemas.microsoft.com/office/drawing/2014/main" id="{58523014-C7A4-D858-6DA0-2495D7DC9043}"/>
+                  </a:ext>
+                </a:extLst>
+              </p:cNvPr>
+              <p:cNvSpPr txBox="1"/>
+              <p:nvPr/>
+            </p:nvSpPr>
+            <p:spPr>
+              <a:xfrm>
+                <a:off x="5948346" y="2842169"/>
+                <a:ext cx="1085801" cy="195814"/>
+              </a:xfrm>
+              <a:prstGeom prst="rect">
+                <a:avLst/>
+              </a:prstGeom>
+              <a:solidFill>
+                <a:schemeClr val="bg1">
+                  <a:alpha val="75000"/>
+                </a:schemeClr>
+              </a:solidFill>
+            </p:spPr>
+            <p:txBody>
+              <a:bodyPr wrap="none" lIns="36000" tIns="36000" rIns="36000" bIns="36000" rtlCol="0">
+                <a:spAutoFit/>
+              </a:bodyPr>
+              <a:lstStyle>
+                <a:defPPr>
+                  <a:defRPr lang="en-DE"/>
+                </a:defPPr>
+                <a:lvl1pPr>
+                  <a:defRPr sz="800" b="1"/>
+                </a:lvl1pPr>
+              </a:lstStyle>
+              <a:p>
+                <a:pPr algn="ctr"/>
+                <a:r>
+                  <a:rPr lang="en-US" dirty="0"/>
+                  <a:t>Business Capabilities</a:t>
+                </a:r>
+              </a:p>
+            </p:txBody>
+          </p:sp>
+          <p:sp>
+            <p:nvSpPr>
+              <p:cNvPr id="291" name="TextBox 290">
+                <a:extLst>
+                  <a:ext uri="{FF2B5EF4-FFF2-40B4-BE49-F238E27FC236}">
+                    <a16:creationId xmlns:a16="http://schemas.microsoft.com/office/drawing/2014/main" id="{BDA7C3CB-DF8E-9849-39D8-BEDCF46E15A9}"/>
+                  </a:ext>
+                </a:extLst>
+              </p:cNvPr>
+              <p:cNvSpPr txBox="1"/>
+              <p:nvPr/>
+            </p:nvSpPr>
+            <p:spPr>
+              <a:xfrm>
+                <a:off x="5883892" y="3134341"/>
+                <a:ext cx="1201145" cy="195814"/>
+              </a:xfrm>
+              <a:prstGeom prst="rect">
+                <a:avLst/>
+              </a:prstGeom>
+              <a:solidFill>
+                <a:schemeClr val="bg1">
+                  <a:alpha val="75000"/>
+                </a:schemeClr>
+              </a:solidFill>
+            </p:spPr>
+            <p:txBody>
+              <a:bodyPr wrap="square" lIns="36000" tIns="36000" rIns="36000" bIns="36000" rtlCol="0">
+                <a:spAutoFit/>
+              </a:bodyPr>
+              <a:lstStyle>
+                <a:defPPr>
+                  <a:defRPr lang="en-DE"/>
+                </a:defPPr>
+                <a:lvl1pPr>
+                  <a:defRPr sz="800" b="1"/>
+                </a:lvl1pPr>
+              </a:lstStyle>
+              <a:p>
+                <a:pPr algn="ctr"/>
+                <a:r>
+                  <a:rPr lang="en-US" dirty="0"/>
+                  <a:t>Processes</a:t>
+                </a:r>
+              </a:p>
+            </p:txBody>
+          </p:sp>
+          <p:sp>
+            <p:nvSpPr>
+              <p:cNvPr id="292" name="TextBox 291">
+                <a:extLst>
+                  <a:ext uri="{FF2B5EF4-FFF2-40B4-BE49-F238E27FC236}">
+                    <a16:creationId xmlns:a16="http://schemas.microsoft.com/office/drawing/2014/main" id="{8937B7A2-B4C7-3C4D-F4F4-6964D4E41236}"/>
+                  </a:ext>
+                </a:extLst>
+              </p:cNvPr>
+              <p:cNvSpPr txBox="1"/>
+              <p:nvPr/>
+            </p:nvSpPr>
+            <p:spPr>
+              <a:xfrm>
+                <a:off x="6131180" y="2465963"/>
+                <a:ext cx="701080" cy="195814"/>
+              </a:xfrm>
+              <a:prstGeom prst="rect">
+                <a:avLst/>
+              </a:prstGeom>
+              <a:solidFill>
+                <a:schemeClr val="bg1">
+                  <a:alpha val="75000"/>
+                </a:schemeClr>
+              </a:solidFill>
+            </p:spPr>
+            <p:txBody>
+              <a:bodyPr wrap="none" lIns="36000" tIns="36000" rIns="36000" bIns="36000" rtlCol="0">
+                <a:spAutoFit/>
+              </a:bodyPr>
+              <a:lstStyle/>
+              <a:p>
+                <a:pPr algn="ctr"/>
+                <a:r>
+                  <a:rPr lang="en-US" sz="800" b="1" noProof="0" dirty="0"/>
+                  <a:t>Value Stream</a:t>
+                </a:r>
+              </a:p>
+            </p:txBody>
+          </p:sp>
+          <p:cxnSp>
+            <p:nvCxnSpPr>
+              <p:cNvPr id="293" name="Straight Connector 292">
+                <a:extLst>
+                  <a:ext uri="{FF2B5EF4-FFF2-40B4-BE49-F238E27FC236}">
+                    <a16:creationId xmlns:a16="http://schemas.microsoft.com/office/drawing/2014/main" id="{838D1535-8690-72C0-D299-A510A1B0CC77}"/>
+                  </a:ext>
+                </a:extLst>
+              </p:cNvPr>
+              <p:cNvCxnSpPr>
+                <a:cxnSpLocks/>
+              </p:cNvCxnSpPr>
+              <p:nvPr/>
+            </p:nvCxnSpPr>
+            <p:spPr>
+              <a:xfrm>
+                <a:off x="5961337" y="3172832"/>
+                <a:ext cx="166009" cy="92052"/>
+              </a:xfrm>
+              <a:prstGeom prst="line">
+                <a:avLst/>
+              </a:prstGeom>
+              <a:ln w="12700">
+                <a:headEnd type="oval" w="sm" len="sm"/>
+                <a:tailEnd type="oval" w="sm" len="sm"/>
+              </a:ln>
+            </p:spPr>
+            <p:style>
+              <a:lnRef idx="2">
+                <a:schemeClr val="accent1"/>
+              </a:lnRef>
+              <a:fillRef idx="0">
+                <a:schemeClr val="accent1"/>
+              </a:fillRef>
+              <a:effectRef idx="1">
+                <a:schemeClr val="accent1"/>
+              </a:effectRef>
+              <a:fontRef idx="minor">
+                <a:schemeClr val="tx1"/>
+              </a:fontRef>
+            </p:style>
+          </p:cxnSp>
+          <p:cxnSp>
+            <p:nvCxnSpPr>
+              <p:cNvPr id="294" name="Straight Connector 293">
+                <a:extLst>
+                  <a:ext uri="{FF2B5EF4-FFF2-40B4-BE49-F238E27FC236}">
+                    <a16:creationId xmlns:a16="http://schemas.microsoft.com/office/drawing/2014/main" id="{FEE6DFB4-BD64-7B24-40BA-D80E048A0F0C}"/>
+                  </a:ext>
+                </a:extLst>
+              </p:cNvPr>
+              <p:cNvCxnSpPr>
+                <a:cxnSpLocks/>
+              </p:cNvCxnSpPr>
+              <p:nvPr/>
+            </p:nvCxnSpPr>
+            <p:spPr>
+              <a:xfrm>
+                <a:off x="6780111" y="3167693"/>
+                <a:ext cx="231909" cy="120858"/>
+              </a:xfrm>
+              <a:prstGeom prst="line">
+                <a:avLst/>
+              </a:prstGeom>
+              <a:ln w="12700">
+                <a:headEnd type="oval" w="sm" len="sm"/>
+                <a:tailEnd type="oval" w="sm" len="sm"/>
+              </a:ln>
+            </p:spPr>
+            <p:style>
+              <a:lnRef idx="2">
+                <a:schemeClr val="accent1"/>
+              </a:lnRef>
+              <a:fillRef idx="0">
+                <a:schemeClr val="accent1"/>
+              </a:fillRef>
+              <a:effectRef idx="1">
+                <a:schemeClr val="accent1"/>
+              </a:effectRef>
+              <a:fontRef idx="minor">
+                <a:schemeClr val="tx1"/>
+              </a:fontRef>
+            </p:style>
+          </p:cxnSp>
+          <p:cxnSp>
+            <p:nvCxnSpPr>
+              <p:cNvPr id="295" name="Straight Connector 294">
+                <a:extLst>
+                  <a:ext uri="{FF2B5EF4-FFF2-40B4-BE49-F238E27FC236}">
+                    <a16:creationId xmlns:a16="http://schemas.microsoft.com/office/drawing/2014/main" id="{EA35D2D5-6FD3-1540-0CAE-64C60DC489E8}"/>
+                  </a:ext>
+                </a:extLst>
+              </p:cNvPr>
+              <p:cNvCxnSpPr>
+                <a:cxnSpLocks/>
+              </p:cNvCxnSpPr>
+              <p:nvPr/>
+            </p:nvCxnSpPr>
+            <p:spPr>
+              <a:xfrm flipV="1">
+                <a:off x="6050393" y="3166009"/>
+                <a:ext cx="129511" cy="50057"/>
+              </a:xfrm>
+              <a:prstGeom prst="line">
+                <a:avLst/>
+              </a:prstGeom>
+              <a:ln w="12700">
+                <a:headEnd type="none" w="sm" len="sm"/>
+                <a:tailEnd type="oval" w="sm" len="sm"/>
+              </a:ln>
+            </p:spPr>
+            <p:style>
+              <a:lnRef idx="2">
+                <a:schemeClr val="accent1"/>
+              </a:lnRef>
+              <a:fillRef idx="0">
+                <a:schemeClr val="accent1"/>
+              </a:fillRef>
+              <a:effectRef idx="1">
+                <a:schemeClr val="accent1"/>
+              </a:effectRef>
+              <a:fontRef idx="minor">
+                <a:schemeClr val="tx1"/>
+              </a:fontRef>
+            </p:style>
+          </p:cxnSp>
+          <p:cxnSp>
+            <p:nvCxnSpPr>
+              <p:cNvPr id="296" name="Straight Connector 295">
+                <a:extLst>
+                  <a:ext uri="{FF2B5EF4-FFF2-40B4-BE49-F238E27FC236}">
+                    <a16:creationId xmlns:a16="http://schemas.microsoft.com/office/drawing/2014/main" id="{4F1895E3-7010-D8BF-3EEA-E2F2F8598E3E}"/>
+                  </a:ext>
+                </a:extLst>
+              </p:cNvPr>
+              <p:cNvCxnSpPr>
+                <a:cxnSpLocks/>
+              </p:cNvCxnSpPr>
+              <p:nvPr/>
+            </p:nvCxnSpPr>
+            <p:spPr>
+              <a:xfrm flipH="1">
+                <a:off x="6788720" y="3241291"/>
+                <a:ext cx="121917" cy="47187"/>
+              </a:xfrm>
+              <a:prstGeom prst="line">
+                <a:avLst/>
+              </a:prstGeom>
+              <a:ln w="12700">
+                <a:headEnd type="none" w="sm" len="sm"/>
+                <a:tailEnd type="oval" w="sm" len="sm"/>
+              </a:ln>
+            </p:spPr>
+            <p:style>
+              <a:lnRef idx="2">
+                <a:schemeClr val="accent1"/>
+              </a:lnRef>
+              <a:fillRef idx="0">
+                <a:schemeClr val="accent1"/>
+              </a:fillRef>
+              <a:effectRef idx="1">
+                <a:schemeClr val="accent1"/>
+              </a:effectRef>
+              <a:fontRef idx="minor">
+                <a:schemeClr val="tx1"/>
+              </a:fontRef>
+            </p:style>
+          </p:cxnSp>
+          <p:pic>
+            <p:nvPicPr>
+              <p:cNvPr id="297" name="Graphic 296" descr="Internet Of Things with solid fill">
+                <a:extLst>
+                  <a:ext uri="{FF2B5EF4-FFF2-40B4-BE49-F238E27FC236}">
+                    <a16:creationId xmlns:a16="http://schemas.microsoft.com/office/drawing/2014/main" id="{864BC790-15F0-6362-66DF-84A3C05AE5AA}"/>
+                  </a:ext>
+                </a:extLst>
+              </p:cNvPr>
+              <p:cNvPicPr>
+                <a:picLocks noChangeAspect="1"/>
+              </p:cNvPicPr>
+              <p:nvPr/>
+            </p:nvPicPr>
+            <p:blipFill>
+              <a:blip>
+                <a:extLst>
+                  <a:ext uri="{96DAC541-7B7A-43D3-8B79-37D633B846F1}">
+                    <asvg:svgBlip xmlns:asvg="http://schemas.microsoft.com/office/drawing/2016/SVG/main" r:embed="rId17"/>
+                  </a:ext>
+                </a:extLst>
+              </a:blip>
+              <a:stretch>
+                <a:fillRect/>
+              </a:stretch>
+            </p:blipFill>
+            <p:spPr>
+              <a:xfrm>
+                <a:off x="10917859" y="4283577"/>
+                <a:ext cx="625008" cy="625008"/>
+              </a:xfrm>
+              <a:prstGeom prst="rect">
+                <a:avLst/>
+              </a:prstGeom>
+            </p:spPr>
+          </p:pic>
+          <p:pic>
+            <p:nvPicPr>
+              <p:cNvPr id="298" name="Graphic 297" descr="Branching diagram with solid fill">
+                <a:extLst>
+                  <a:ext uri="{FF2B5EF4-FFF2-40B4-BE49-F238E27FC236}">
+                    <a16:creationId xmlns:a16="http://schemas.microsoft.com/office/drawing/2014/main" id="{B43AA1DD-2B80-B825-CA72-AD977D6BD093}"/>
+                  </a:ext>
+                </a:extLst>
+              </p:cNvPr>
+              <p:cNvPicPr>
+                <a:picLocks noChangeAspect="1"/>
+              </p:cNvPicPr>
+              <p:nvPr/>
+            </p:nvPicPr>
+            <p:blipFill>
+              <a:blip>
+                <a:extLst>
+                  <a:ext uri="{96DAC541-7B7A-43D3-8B79-37D633B846F1}">
+                    <asvg:svgBlip xmlns:asvg="http://schemas.microsoft.com/office/drawing/2016/SVG/main" r:embed="rId18"/>
+                  </a:ext>
+                </a:extLst>
+              </a:blip>
+              <a:stretch>
+                <a:fillRect/>
+              </a:stretch>
+            </p:blipFill>
+            <p:spPr>
+              <a:xfrm>
+                <a:off x="6283278" y="3954719"/>
+                <a:ext cx="396518" cy="396518"/>
+              </a:xfrm>
+              <a:prstGeom prst="rect">
+                <a:avLst/>
+              </a:prstGeom>
+            </p:spPr>
+          </p:pic>
+          <p:sp>
+            <p:nvSpPr>
+              <p:cNvPr id="299" name="TextBox 298">
+                <a:extLst>
+                  <a:ext uri="{FF2B5EF4-FFF2-40B4-BE49-F238E27FC236}">
+                    <a16:creationId xmlns:a16="http://schemas.microsoft.com/office/drawing/2014/main" id="{35884D2D-9FF9-825C-49F9-0B34E51A03F1}"/>
+                  </a:ext>
+                </a:extLst>
+              </p:cNvPr>
+              <p:cNvSpPr txBox="1"/>
+              <p:nvPr/>
+            </p:nvSpPr>
+            <p:spPr>
+              <a:xfrm>
+                <a:off x="10933647" y="5262047"/>
+                <a:ext cx="593432" cy="461665"/>
+              </a:xfrm>
+              <a:prstGeom prst="rect">
+                <a:avLst/>
+              </a:prstGeom>
+              <a:noFill/>
+            </p:spPr>
+            <p:txBody>
+              <a:bodyPr wrap="none" rtlCol="0">
+                <a:spAutoFit/>
+              </a:bodyPr>
+              <a:lstStyle/>
+              <a:p>
+                <a:pPr algn="ctr"/>
+                <a:r>
+                  <a:rPr lang="en-US" sz="800" b="1" noProof="0" dirty="0"/>
+                  <a:t>Platform</a:t>
+                </a:r>
+                <a:br>
+                  <a:rPr lang="en-US" sz="800" b="1" noProof="0" dirty="0"/>
+                </a:br>
+                <a:r>
+                  <a:rPr lang="en-US" sz="800" b="1" noProof="0" dirty="0"/>
+                  <a:t>&amp;</a:t>
+                </a:r>
+                <a:br>
+                  <a:rPr lang="en-US" sz="800" b="1" noProof="0" dirty="0"/>
+                </a:br>
+                <a:r>
+                  <a:rPr lang="en-US" sz="800" b="1" noProof="0" dirty="0"/>
+                  <a:t>Security</a:t>
+                </a:r>
+              </a:p>
+            </p:txBody>
+          </p:sp>
+          <p:sp>
+            <p:nvSpPr>
+              <p:cNvPr id="300" name="TextBox 299">
+                <a:extLst>
+                  <a:ext uri="{FF2B5EF4-FFF2-40B4-BE49-F238E27FC236}">
+                    <a16:creationId xmlns:a16="http://schemas.microsoft.com/office/drawing/2014/main" id="{5E3B4569-58CC-3106-7AD5-C471A3603BD0}"/>
+                  </a:ext>
+                </a:extLst>
+              </p:cNvPr>
+              <p:cNvSpPr txBox="1"/>
+              <p:nvPr/>
+            </p:nvSpPr>
+            <p:spPr>
+              <a:xfrm>
+                <a:off x="10868725" y="3468449"/>
+                <a:ext cx="723275" cy="461665"/>
+              </a:xfrm>
+              <a:prstGeom prst="rect">
+                <a:avLst/>
+              </a:prstGeom>
+              <a:noFill/>
+            </p:spPr>
+            <p:txBody>
+              <a:bodyPr wrap="none" rtlCol="0">
+                <a:spAutoFit/>
+              </a:bodyPr>
+              <a:lstStyle/>
+              <a:p>
+                <a:pPr algn="ctr"/>
+                <a:r>
+                  <a:rPr lang="en-US" sz="800" b="1" noProof="0" dirty="0"/>
+                  <a:t>Application</a:t>
+                </a:r>
+                <a:br>
+                  <a:rPr lang="en-US" sz="800" b="1" noProof="0" dirty="0"/>
+                </a:br>
+                <a:r>
+                  <a:rPr lang="en-US" sz="800" b="1" noProof="0" dirty="0"/>
+                  <a:t>&amp;</a:t>
+                </a:r>
+                <a:br>
+                  <a:rPr lang="en-US" sz="800" b="1" noProof="0" dirty="0"/>
+                </a:br>
+                <a:r>
+                  <a:rPr lang="en-US" sz="800" b="1" noProof="0" dirty="0"/>
+                  <a:t>Data</a:t>
+                </a:r>
+              </a:p>
+            </p:txBody>
+          </p:sp>
+          <p:sp>
+            <p:nvSpPr>
+              <p:cNvPr id="301" name="TextBox 300">
+                <a:extLst>
+                  <a:ext uri="{FF2B5EF4-FFF2-40B4-BE49-F238E27FC236}">
+                    <a16:creationId xmlns:a16="http://schemas.microsoft.com/office/drawing/2014/main" id="{D55623A3-CF8B-B76B-2D8D-0BD69D04BDD7}"/>
+                  </a:ext>
+                </a:extLst>
+              </p:cNvPr>
+              <p:cNvSpPr txBox="1"/>
+              <p:nvPr/>
+            </p:nvSpPr>
+            <p:spPr>
+              <a:xfrm>
+                <a:off x="10839870" y="1674849"/>
+                <a:ext cx="780983" cy="461665"/>
+              </a:xfrm>
+              <a:prstGeom prst="rect">
+                <a:avLst/>
+              </a:prstGeom>
+              <a:noFill/>
+            </p:spPr>
+            <p:txBody>
+              <a:bodyPr wrap="none" rtlCol="0">
+                <a:spAutoFit/>
+              </a:bodyPr>
+              <a:lstStyle/>
+              <a:p>
+                <a:pPr algn="ctr"/>
+                <a:r>
+                  <a:rPr lang="en-US" sz="800" b="1" noProof="0" dirty="0"/>
+                  <a:t>Business</a:t>
+                </a:r>
+                <a:br>
+                  <a:rPr lang="en-US" sz="800" b="1" noProof="0" dirty="0"/>
+                </a:br>
+                <a:r>
+                  <a:rPr lang="en-US" sz="800" b="1" noProof="0" dirty="0"/>
+                  <a:t>&amp;</a:t>
+                </a:r>
+                <a:br>
+                  <a:rPr lang="en-US" sz="800" b="1" noProof="0" dirty="0"/>
+                </a:br>
+                <a:r>
+                  <a:rPr lang="en-US" sz="800" b="1" noProof="0" dirty="0"/>
+                  <a:t>Organization</a:t>
+                </a:r>
+              </a:p>
+            </p:txBody>
+          </p:sp>
+          <p:pic>
+            <p:nvPicPr>
+              <p:cNvPr id="302" name="Graphic 301" descr="Care with solid fill">
+                <a:extLst>
+                  <a:ext uri="{FF2B5EF4-FFF2-40B4-BE49-F238E27FC236}">
+                    <a16:creationId xmlns:a16="http://schemas.microsoft.com/office/drawing/2014/main" id="{3D1BB9E5-E45F-01E6-5FF0-7713F3BCE423}"/>
+                  </a:ext>
+                </a:extLst>
+              </p:cNvPr>
+              <p:cNvPicPr>
+                <a:picLocks noChangeAspect="1"/>
+              </p:cNvPicPr>
+              <p:nvPr/>
+            </p:nvPicPr>
+            <p:blipFill>
+              <a:blip>
+                <a:extLst>
+                  <a:ext uri="{96DAC541-7B7A-43D3-8B79-37D633B846F1}">
+                    <asvg:svgBlip xmlns:asvg="http://schemas.microsoft.com/office/drawing/2016/SVG/main" r:embed="rId19"/>
+                  </a:ext>
+                </a:extLst>
+              </a:blip>
+              <a:stretch>
+                <a:fillRect/>
+              </a:stretch>
+            </p:blipFill>
+            <p:spPr>
+              <a:xfrm>
+                <a:off x="8665170" y="2614825"/>
+                <a:ext cx="403691" cy="403691"/>
+              </a:xfrm>
+              <a:prstGeom prst="rect">
+                <a:avLst/>
+              </a:prstGeom>
+            </p:spPr>
+          </p:pic>
+          <p:pic>
+            <p:nvPicPr>
+              <p:cNvPr id="303" name="Graphic 302" descr="Circles with arrows with solid fill">
+                <a:extLst>
+                  <a:ext uri="{FF2B5EF4-FFF2-40B4-BE49-F238E27FC236}">
+                    <a16:creationId xmlns:a16="http://schemas.microsoft.com/office/drawing/2014/main" id="{80E5AF1D-A15C-585A-F015-F4F1EF9EC0C8}"/>
+                  </a:ext>
+                </a:extLst>
+              </p:cNvPr>
+              <p:cNvPicPr>
+                <a:picLocks noChangeAspect="1"/>
+              </p:cNvPicPr>
+              <p:nvPr/>
+            </p:nvPicPr>
+            <p:blipFill>
+              <a:blip>
+                <a:extLst>
+                  <a:ext uri="{96DAC541-7B7A-43D3-8B79-37D633B846F1}">
+                    <asvg:svgBlip xmlns:asvg="http://schemas.microsoft.com/office/drawing/2016/SVG/main" r:embed="rId20"/>
+                  </a:ext>
+                </a:extLst>
+              </a:blip>
+              <a:stretch>
+                <a:fillRect/>
+              </a:stretch>
+            </p:blipFill>
+            <p:spPr>
+              <a:xfrm>
+                <a:off x="8668108" y="4244489"/>
+                <a:ext cx="398413" cy="398413"/>
+              </a:xfrm>
+              <a:prstGeom prst="rect">
+                <a:avLst/>
+              </a:prstGeom>
+            </p:spPr>
+          </p:pic>
+          <p:pic>
+            <p:nvPicPr>
+              <p:cNvPr id="304" name="Graphic 303" descr="Scientific Thought with solid fill">
+                <a:extLst>
+                  <a:ext uri="{FF2B5EF4-FFF2-40B4-BE49-F238E27FC236}">
+                    <a16:creationId xmlns:a16="http://schemas.microsoft.com/office/drawing/2014/main" id="{2A3FD9D8-F850-CE88-CC15-9F648F43D6B0}"/>
+                  </a:ext>
+                </a:extLst>
+              </p:cNvPr>
+              <p:cNvPicPr>
+                <a:picLocks noChangeAspect="1"/>
+              </p:cNvPicPr>
+              <p:nvPr/>
+            </p:nvPicPr>
+            <p:blipFill>
+              <a:blip>
+                <a:extLst>
+                  <a:ext uri="{96DAC541-7B7A-43D3-8B79-37D633B846F1}">
+                    <asvg:svgBlip xmlns:asvg="http://schemas.microsoft.com/office/drawing/2016/SVG/main" r:embed="rId21"/>
+                  </a:ext>
+                </a:extLst>
+              </a:blip>
+              <a:stretch>
+                <a:fillRect/>
+              </a:stretch>
+            </p:blipFill>
+            <p:spPr>
+              <a:xfrm>
+                <a:off x="9471603" y="2683144"/>
+                <a:ext cx="398413" cy="398413"/>
+              </a:xfrm>
+              <a:prstGeom prst="rect">
+                <a:avLst/>
+              </a:prstGeom>
+            </p:spPr>
+          </p:pic>
+          <p:sp>
+            <p:nvSpPr>
+              <p:cNvPr id="305" name="TextBox 304">
+                <a:extLst>
+                  <a:ext uri="{FF2B5EF4-FFF2-40B4-BE49-F238E27FC236}">
+                    <a16:creationId xmlns:a16="http://schemas.microsoft.com/office/drawing/2014/main" id="{D346AA3E-8C60-0245-067E-40B82AC7DAE1}"/>
+                  </a:ext>
+                </a:extLst>
+              </p:cNvPr>
+              <p:cNvSpPr txBox="1"/>
+              <p:nvPr/>
+            </p:nvSpPr>
+            <p:spPr>
+              <a:xfrm>
+                <a:off x="9375012" y="3964178"/>
+                <a:ext cx="652743" cy="215444"/>
+              </a:xfrm>
+              <a:prstGeom prst="rect">
+                <a:avLst/>
+              </a:prstGeom>
+              <a:noFill/>
+            </p:spPr>
+            <p:txBody>
+              <a:bodyPr wrap="none" rtlCol="0">
+                <a:spAutoFit/>
+              </a:bodyPr>
+              <a:lstStyle/>
+              <a:p>
+                <a:pPr algn="ctr"/>
+                <a:r>
+                  <a:rPr lang="en-US" sz="800" b="1" noProof="0" dirty="0"/>
+                  <a:t>Contracts</a:t>
+                </a:r>
+              </a:p>
+            </p:txBody>
+          </p:sp>
+          <p:sp>
+            <p:nvSpPr>
+              <p:cNvPr id="306" name="TextBox 305">
+                <a:extLst>
+                  <a:ext uri="{FF2B5EF4-FFF2-40B4-BE49-F238E27FC236}">
+                    <a16:creationId xmlns:a16="http://schemas.microsoft.com/office/drawing/2014/main" id="{9E231DC9-7AF5-3D28-C827-6E9339BB536C}"/>
+                  </a:ext>
+                </a:extLst>
+              </p:cNvPr>
+              <p:cNvSpPr txBox="1"/>
+              <p:nvPr/>
+            </p:nvSpPr>
+            <p:spPr>
+              <a:xfrm>
+                <a:off x="8145151" y="4607969"/>
+                <a:ext cx="699230" cy="215444"/>
+              </a:xfrm>
+              <a:prstGeom prst="rect">
+                <a:avLst/>
+              </a:prstGeom>
+              <a:noFill/>
+            </p:spPr>
+            <p:txBody>
+              <a:bodyPr wrap="none" rtlCol="0">
+                <a:spAutoFit/>
+              </a:bodyPr>
+              <a:lstStyle/>
+              <a:p>
+                <a:r>
+                  <a:rPr lang="en-US" sz="800" b="1" noProof="0" dirty="0"/>
+                  <a:t>Integration</a:t>
+                </a:r>
+              </a:p>
+            </p:txBody>
+          </p:sp>
+          <p:cxnSp>
+            <p:nvCxnSpPr>
+              <p:cNvPr id="307" name="Straight Connector 306">
+                <a:extLst>
+                  <a:ext uri="{FF2B5EF4-FFF2-40B4-BE49-F238E27FC236}">
+                    <a16:creationId xmlns:a16="http://schemas.microsoft.com/office/drawing/2014/main" id="{737EF8E9-5C06-2A7E-729C-452A7E00515C}"/>
+                  </a:ext>
+                </a:extLst>
+              </p:cNvPr>
+              <p:cNvCxnSpPr>
+                <a:cxnSpLocks noChangeAspect="1"/>
+              </p:cNvCxnSpPr>
+              <p:nvPr/>
+            </p:nvCxnSpPr>
+            <p:spPr>
+              <a:xfrm flipV="1">
+                <a:off x="8103663" y="3004682"/>
+                <a:ext cx="503999" cy="362973"/>
+              </a:xfrm>
+              <a:prstGeom prst="line">
+                <a:avLst/>
+              </a:prstGeom>
+              <a:ln w="38100"/>
+            </p:spPr>
+            <p:style>
+              <a:lnRef idx="2">
+                <a:schemeClr val="accent1"/>
+              </a:lnRef>
+              <a:fillRef idx="0">
+                <a:schemeClr val="accent1"/>
+              </a:fillRef>
+              <a:effectRef idx="1">
+                <a:schemeClr val="accent1"/>
+              </a:effectRef>
+              <a:fontRef idx="minor">
+                <a:schemeClr val="tx1"/>
+              </a:fontRef>
+            </p:style>
+          </p:cxnSp>
+          <p:cxnSp>
+            <p:nvCxnSpPr>
+              <p:cNvPr id="308" name="Straight Connector 307">
+                <a:extLst>
+                  <a:ext uri="{FF2B5EF4-FFF2-40B4-BE49-F238E27FC236}">
+                    <a16:creationId xmlns:a16="http://schemas.microsoft.com/office/drawing/2014/main" id="{662D39E7-FAAC-D5B8-3D46-E3EF77CFED76}"/>
+                  </a:ext>
+                </a:extLst>
+              </p:cNvPr>
+              <p:cNvCxnSpPr>
+                <a:cxnSpLocks noChangeAspect="1"/>
+              </p:cNvCxnSpPr>
+              <p:nvPr/>
+            </p:nvCxnSpPr>
+            <p:spPr>
+              <a:xfrm flipV="1">
+                <a:off x="9113104" y="2277189"/>
+                <a:ext cx="503999" cy="362973"/>
+              </a:xfrm>
+              <a:prstGeom prst="line">
+                <a:avLst/>
+              </a:prstGeom>
+              <a:ln w="38100"/>
+            </p:spPr>
+            <p:style>
+              <a:lnRef idx="2">
+                <a:schemeClr val="accent1"/>
+              </a:lnRef>
+              <a:fillRef idx="0">
+                <a:schemeClr val="accent1"/>
+              </a:fillRef>
+              <a:effectRef idx="1">
+                <a:schemeClr val="accent1"/>
+              </a:effectRef>
+              <a:fontRef idx="minor">
+                <a:schemeClr val="tx1"/>
+              </a:fontRef>
+            </p:style>
+          </p:cxnSp>
+          <p:grpSp>
+            <p:nvGrpSpPr>
+              <p:cNvPr id="309" name="Group 308">
+                <a:extLst>
+                  <a:ext uri="{FF2B5EF4-FFF2-40B4-BE49-F238E27FC236}">
+                    <a16:creationId xmlns:a16="http://schemas.microsoft.com/office/drawing/2014/main" id="{143DD14D-78B1-C73F-E679-43F8BA051FFA}"/>
+                  </a:ext>
+                </a:extLst>
+              </p:cNvPr>
+              <p:cNvGrpSpPr/>
+              <p:nvPr/>
+            </p:nvGrpSpPr>
+            <p:grpSpPr>
+              <a:xfrm flipV="1">
+                <a:off x="8104566" y="3890538"/>
+                <a:ext cx="1513440" cy="1090466"/>
+                <a:chOff x="8256063" y="2429589"/>
+                <a:chExt cx="1513440" cy="1090466"/>
+              </a:xfrm>
+            </p:grpSpPr>
+            <p:cxnSp>
+              <p:nvCxnSpPr>
+                <p:cNvPr id="310" name="Straight Connector 309">
+                  <a:extLst>
+                    <a:ext uri="{FF2B5EF4-FFF2-40B4-BE49-F238E27FC236}">
+                      <a16:creationId xmlns:a16="http://schemas.microsoft.com/office/drawing/2014/main" id="{67C21B69-DBBF-573D-08E1-AD977071B57A}"/>
+                    </a:ext>
+                  </a:extLst>
+                </p:cNvPr>
+                <p:cNvCxnSpPr>
+                  <a:cxnSpLocks noChangeAspect="1"/>
+                </p:cNvCxnSpPr>
+                <p:nvPr/>
+              </p:nvCxnSpPr>
+              <p:spPr>
+                <a:xfrm flipV="1">
+                  <a:off x="8256063" y="3157082"/>
+                  <a:ext cx="503999" cy="362973"/>
+                </a:xfrm>
+                <a:prstGeom prst="line">
+                  <a:avLst/>
+                </a:prstGeom>
+                <a:ln w="38100"/>
+              </p:spPr>
+              <p:style>
+                <a:lnRef idx="2">
+                  <a:schemeClr val="accent1"/>
+                </a:lnRef>
+                <a:fillRef idx="0">
+                  <a:schemeClr val="accent1"/>
+                </a:fillRef>
+                <a:effectRef idx="1">
+                  <a:schemeClr val="accent1"/>
+                </a:effectRef>
+                <a:fontRef idx="minor">
+                  <a:schemeClr val="tx1"/>
+                </a:fontRef>
+              </p:style>
+            </p:cxnSp>
+            <p:cxnSp>
+              <p:nvCxnSpPr>
+                <p:cNvPr id="311" name="Straight Connector 310">
+                  <a:extLst>
+                    <a:ext uri="{FF2B5EF4-FFF2-40B4-BE49-F238E27FC236}">
+                      <a16:creationId xmlns:a16="http://schemas.microsoft.com/office/drawing/2014/main" id="{4F77F59F-52B6-87BE-4C9A-CC864E1714E7}"/>
+                    </a:ext>
+                  </a:extLst>
+                </p:cNvPr>
+                <p:cNvCxnSpPr>
+                  <a:cxnSpLocks noChangeAspect="1"/>
+                </p:cNvCxnSpPr>
+                <p:nvPr/>
+              </p:nvCxnSpPr>
+              <p:spPr>
+                <a:xfrm flipV="1">
+                  <a:off x="9265504" y="2429589"/>
+                  <a:ext cx="503999" cy="362973"/>
+                </a:xfrm>
+                <a:prstGeom prst="line">
+                  <a:avLst/>
+                </a:prstGeom>
+                <a:ln w="38100"/>
+              </p:spPr>
+              <p:style>
+                <a:lnRef idx="2">
+                  <a:schemeClr val="accent1"/>
+                </a:lnRef>
+                <a:fillRef idx="0">
+                  <a:schemeClr val="accent1"/>
+                </a:fillRef>
+                <a:effectRef idx="1">
+                  <a:schemeClr val="accent1"/>
+                </a:effectRef>
+                <a:fontRef idx="minor">
+                  <a:schemeClr val="tx1"/>
+                </a:fontRef>
+              </p:style>
+            </p:cxnSp>
+          </p:grpSp>
+        </p:grpSp>
+        <p:cxnSp>
+          <p:nvCxnSpPr>
+            <p:cNvPr id="240" name="Straight Connector 239">
               <a:extLst>
                 <a:ext uri="{FF2B5EF4-FFF2-40B4-BE49-F238E27FC236}">
-                  <a16:creationId xmlns:a16="http://schemas.microsoft.com/office/drawing/2014/main" id="{2E97A3B0-40CB-0C7F-21DC-2BAC095675E5}"/>
+                  <a16:creationId xmlns:a16="http://schemas.microsoft.com/office/drawing/2014/main" id="{44554209-5329-AAF4-8967-1FB067C97394}"/>
                 </a:ext>
               </a:extLst>
             </p:cNvPr>
-            <p:cNvSpPr/>
+            <p:cNvCxnSpPr>
+              <a:cxnSpLocks/>
+            </p:cNvCxnSpPr>
             <p:nvPr/>
-          </p:nvSpPr>
+          </p:nvCxnSpPr>
           <p:spPr>
-            <a:xfrm rot="16200000">
-              <a:off x="5623970" y="1622885"/>
-              <a:ext cx="972766" cy="314554"/>
+            <a:xfrm>
+              <a:off x="5556000" y="3606535"/>
+              <a:ext cx="576000" cy="0"/>
             </a:xfrm>
-            <a:prstGeom prst="round2SameRect">
-              <a:avLst>
-                <a:gd name="adj1" fmla="val 50000"/>
-                <a:gd name="adj2" fmla="val 0"/>
-              </a:avLst>
+            <a:prstGeom prst="line">
+              <a:avLst/>
             </a:prstGeom>
             <a:ln w="38100"/>
           </p:spPr>
           <p:style>
             <a:lnRef idx="2">
-              <a:schemeClr val="accent1">
-                <a:shade val="15000"/>
-              </a:schemeClr>
+              <a:schemeClr val="accent1"/>
             </a:lnRef>
-            <a:fillRef idx="1">
+            <a:fillRef idx="0">
               <a:schemeClr val="accent1"/>
             </a:fillRef>
-            <a:effectRef idx="0">
+            <a:effectRef idx="1">
               <a:schemeClr val="accent1"/>
             </a:effectRef>
             <a:fontRef idx="minor">
-              <a:schemeClr val="lt1"/>
+              <a:schemeClr val="tx1"/>
             </a:fontRef>
           </p:style>
-          <p:txBody>
-            <a:bodyPr rtlCol="0" anchor="ctr"/>
-            <a:lstStyle/>
-            <a:p>
-              <a:pPr algn="ctr"/>
-              <a:r>
-                <a:rPr lang="en-US" sz="1000" b="1" noProof="0" dirty="0"/>
-                <a:t>Governance</a:t>
-              </a:r>
-            </a:p>
-          </p:txBody>
-        </p:sp>
-      </p:grpSp>
-      <p:grpSp>
-        <p:nvGrpSpPr>
-          <p:cNvPr id="171" name="Group 170">
-            <a:extLst>
-              <a:ext uri="{FF2B5EF4-FFF2-40B4-BE49-F238E27FC236}">
-                <a16:creationId xmlns:a16="http://schemas.microsoft.com/office/drawing/2014/main" id="{CAF7913D-6CEA-5159-1A6F-FEC47FDFD4B4}"/>
-              </a:ext>
-            </a:extLst>
-          </p:cNvPr>
-          <p:cNvGrpSpPr/>
-          <p:nvPr/>
-        </p:nvGrpSpPr>
-        <p:grpSpPr>
-          <a:xfrm>
-            <a:off x="5063203" y="5433289"/>
-            <a:ext cx="5248649" cy="1128787"/>
-            <a:chOff x="5953074" y="1293779"/>
-            <a:chExt cx="5248649" cy="972767"/>
-          </a:xfrm>
-        </p:grpSpPr>
-        <p:sp>
-          <p:nvSpPr>
-            <p:cNvPr id="172" name="Rounded Rectangle 171">
+        </p:cxnSp>
+        <p:cxnSp>
+          <p:nvCxnSpPr>
+            <p:cNvPr id="241" name="Straight Connector 240">
               <a:extLst>
                 <a:ext uri="{FF2B5EF4-FFF2-40B4-BE49-F238E27FC236}">
-                  <a16:creationId xmlns:a16="http://schemas.microsoft.com/office/drawing/2014/main" id="{DF59B96B-1F76-734E-6211-0EB7E77841DC}"/>
+                  <a16:creationId xmlns:a16="http://schemas.microsoft.com/office/drawing/2014/main" id="{2D0131FA-6303-86CD-5B10-FE35571C551E}"/>
                 </a:ext>
               </a:extLst>
             </p:cNvPr>
-            <p:cNvSpPr/>
+            <p:cNvCxnSpPr>
+              <a:cxnSpLocks/>
+            </p:cNvCxnSpPr>
             <p:nvPr/>
-          </p:nvSpPr>
+          </p:nvCxnSpPr>
           <p:spPr>
             <a:xfrm>
-              <a:off x="5953074" y="1293780"/>
-              <a:ext cx="5248649" cy="972766"/>
+              <a:off x="6950801" y="3605939"/>
+              <a:ext cx="576000" cy="0"/>
             </a:xfrm>
-            <a:prstGeom prst="roundRect">
+            <a:prstGeom prst="line">
               <a:avLst/>
-            </a:prstGeom>
-            <a:noFill/>
-            <a:ln w="38100"/>
-          </p:spPr>
-          <p:style>
-            <a:lnRef idx="2">
-              <a:schemeClr val="accent1">
-                <a:shade val="15000"/>
-              </a:schemeClr>
-            </a:lnRef>
-            <a:fillRef idx="1">
-              <a:schemeClr val="accent1"/>
-            </a:fillRef>
-            <a:effectRef idx="0">
-              <a:schemeClr val="accent1"/>
-            </a:effectRef>
-            <a:fontRef idx="minor">
-              <a:schemeClr val="lt1"/>
-            </a:fontRef>
-          </p:style>
-          <p:txBody>
-            <a:bodyPr rtlCol="0" anchor="ctr"/>
-            <a:lstStyle/>
-            <a:p>
-              <a:pPr algn="ctr"/>
-              <a:endParaRPr lang="en-US" noProof="0" dirty="0"/>
-            </a:p>
-          </p:txBody>
-        </p:sp>
-        <p:sp>
-          <p:nvSpPr>
-            <p:cNvPr id="173" name="Round Same-side Corner of Rectangle 172">
-              <a:extLst>
-                <a:ext uri="{FF2B5EF4-FFF2-40B4-BE49-F238E27FC236}">
-                  <a16:creationId xmlns:a16="http://schemas.microsoft.com/office/drawing/2014/main" id="{2E73CA22-B60D-CE4D-65C1-8F51884B5105}"/>
-                </a:ext>
-              </a:extLst>
-            </p:cNvPr>
-            <p:cNvSpPr/>
-            <p:nvPr/>
-          </p:nvSpPr>
-          <p:spPr>
-            <a:xfrm rot="16200000">
-              <a:off x="5623970" y="1622885"/>
-              <a:ext cx="972766" cy="314554"/>
-            </a:xfrm>
-            <a:prstGeom prst="round2SameRect">
-              <a:avLst>
-                <a:gd name="adj1" fmla="val 50000"/>
-                <a:gd name="adj2" fmla="val 0"/>
-              </a:avLst>
             </a:prstGeom>
             <a:ln w="38100"/>
           </p:spPr>
           <p:style>
             <a:lnRef idx="2">
-              <a:schemeClr val="accent1">
-                <a:shade val="15000"/>
-              </a:schemeClr>
+              <a:schemeClr val="accent1"/>
             </a:lnRef>
-            <a:fillRef idx="1">
+            <a:fillRef idx="0">
               <a:schemeClr val="accent1"/>
             </a:fillRef>
-            <a:effectRef idx="0">
+            <a:effectRef idx="1">
               <a:schemeClr val="accent1"/>
             </a:effectRef>
             <a:fontRef idx="minor">
-              <a:schemeClr val="lt1"/>
+              <a:schemeClr val="tx1"/>
             </a:fontRef>
           </p:style>
-          <p:txBody>
-            <a:bodyPr rtlCol="0" anchor="ctr"/>
-            <a:lstStyle/>
-            <a:p>
-              <a:pPr algn="ctr"/>
-              <a:r>
-                <a:rPr lang="en-US" sz="1000" b="1" noProof="0" dirty="0"/>
-                <a:t>Foundation</a:t>
-              </a:r>
-            </a:p>
-          </p:txBody>
-        </p:sp>
+        </p:cxnSp>
       </p:grpSp>
-      <p:grpSp>
-        <p:nvGrpSpPr>
-          <p:cNvPr id="174" name="Group 173">
-            <a:extLst>
-              <a:ext uri="{FF2B5EF4-FFF2-40B4-BE49-F238E27FC236}">
-                <a16:creationId xmlns:a16="http://schemas.microsoft.com/office/drawing/2014/main" id="{AB2170B8-3273-8A0A-99A8-6ED50371A571}"/>
-              </a:ext>
-            </a:extLst>
-          </p:cNvPr>
-          <p:cNvGrpSpPr/>
-          <p:nvPr/>
-        </p:nvGrpSpPr>
-        <p:grpSpPr>
-          <a:xfrm>
-            <a:off x="10446179" y="1418132"/>
-            <a:ext cx="1365538" cy="5133352"/>
-            <a:chOff x="8916768" y="2942618"/>
-            <a:chExt cx="1365538" cy="5133352"/>
-          </a:xfrm>
-        </p:grpSpPr>
-        <p:sp>
-          <p:nvSpPr>
-            <p:cNvPr id="175" name="Rounded Rectangle 174">
-              <a:extLst>
-                <a:ext uri="{FF2B5EF4-FFF2-40B4-BE49-F238E27FC236}">
-                  <a16:creationId xmlns:a16="http://schemas.microsoft.com/office/drawing/2014/main" id="{367D7BA3-A943-5A25-DE5B-BC46E2F11D3B}"/>
-                </a:ext>
-              </a:extLst>
-            </p:cNvPr>
-            <p:cNvSpPr/>
-            <p:nvPr/>
-          </p:nvSpPr>
-          <p:spPr>
-            <a:xfrm>
-              <a:off x="8916768" y="2942618"/>
-              <a:ext cx="1365538" cy="5133352"/>
-            </a:xfrm>
-            <a:prstGeom prst="roundRect">
-              <a:avLst/>
-            </a:prstGeom>
-            <a:noFill/>
-            <a:ln w="38100"/>
-          </p:spPr>
-          <p:style>
-            <a:lnRef idx="2">
-              <a:schemeClr val="accent1">
-                <a:shade val="15000"/>
-              </a:schemeClr>
-            </a:lnRef>
-            <a:fillRef idx="1">
-              <a:schemeClr val="accent1"/>
-            </a:fillRef>
-            <a:effectRef idx="0">
-              <a:schemeClr val="accent1"/>
-            </a:effectRef>
-            <a:fontRef idx="minor">
-              <a:schemeClr val="lt1"/>
-            </a:fontRef>
-          </p:style>
-          <p:txBody>
-            <a:bodyPr rtlCol="0" anchor="ctr"/>
-            <a:lstStyle/>
-            <a:p>
-              <a:pPr algn="ctr"/>
-              <a:endParaRPr lang="en-US" noProof="0" dirty="0"/>
-            </a:p>
-          </p:txBody>
-        </p:sp>
-        <p:sp>
-          <p:nvSpPr>
-            <p:cNvPr id="176" name="Round Same-side Corner of Rectangle 175">
-              <a:extLst>
-                <a:ext uri="{FF2B5EF4-FFF2-40B4-BE49-F238E27FC236}">
-                  <a16:creationId xmlns:a16="http://schemas.microsoft.com/office/drawing/2014/main" id="{9894382F-242A-5425-E952-3CC98F8CB9A5}"/>
-                </a:ext>
-              </a:extLst>
-            </p:cNvPr>
-            <p:cNvSpPr/>
-            <p:nvPr/>
-          </p:nvSpPr>
-          <p:spPr>
-            <a:xfrm>
-              <a:off x="8916768" y="2942618"/>
-              <a:ext cx="1365538" cy="314554"/>
-            </a:xfrm>
-            <a:prstGeom prst="round2SameRect">
-              <a:avLst>
-                <a:gd name="adj1" fmla="val 50000"/>
-                <a:gd name="adj2" fmla="val 0"/>
-              </a:avLst>
-            </a:prstGeom>
-            <a:ln w="38100"/>
-          </p:spPr>
-          <p:style>
-            <a:lnRef idx="2">
-              <a:schemeClr val="accent1">
-                <a:shade val="15000"/>
-              </a:schemeClr>
-            </a:lnRef>
-            <a:fillRef idx="1">
-              <a:schemeClr val="accent1"/>
-            </a:fillRef>
-            <a:effectRef idx="0">
-              <a:schemeClr val="accent1"/>
-            </a:effectRef>
-            <a:fontRef idx="minor">
-              <a:schemeClr val="lt1"/>
-            </a:fontRef>
-          </p:style>
-          <p:txBody>
-            <a:bodyPr rtlCol="0" anchor="ctr"/>
-            <a:lstStyle/>
-            <a:p>
-              <a:pPr algn="ctr"/>
-              <a:r>
-                <a:rPr lang="en-US" sz="1000" b="1" noProof="0" dirty="0"/>
-                <a:t>Guiding Principles</a:t>
-              </a:r>
-            </a:p>
-          </p:txBody>
-        </p:sp>
-      </p:grpSp>
-      <p:sp>
-        <p:nvSpPr>
-          <p:cNvPr id="177" name="Round Same-side Corner of Rectangle 176">
-            <a:extLst>
-              <a:ext uri="{FF2B5EF4-FFF2-40B4-BE49-F238E27FC236}">
-                <a16:creationId xmlns:a16="http://schemas.microsoft.com/office/drawing/2014/main" id="{A54BAD15-208E-C8F4-42BB-E1F53608A925}"/>
-              </a:ext>
-            </a:extLst>
-          </p:cNvPr>
-          <p:cNvSpPr/>
-          <p:nvPr/>
-        </p:nvSpPr>
-        <p:spPr>
-          <a:xfrm rot="16200000">
-            <a:off x="4596019" y="4520790"/>
-            <a:ext cx="1220220" cy="314554"/>
-          </a:xfrm>
-          <a:prstGeom prst="round2SameRect">
-            <a:avLst>
-              <a:gd name="adj1" fmla="val 50000"/>
-              <a:gd name="adj2" fmla="val 0"/>
-            </a:avLst>
-          </a:prstGeom>
-          <a:ln w="38100"/>
-        </p:spPr>
-        <p:style>
-          <a:lnRef idx="2">
-            <a:schemeClr val="accent1">
-              <a:shade val="15000"/>
-            </a:schemeClr>
-          </a:lnRef>
-          <a:fillRef idx="1">
-            <a:schemeClr val="accent1"/>
-          </a:fillRef>
-          <a:effectRef idx="0">
-            <a:schemeClr val="accent1"/>
-          </a:effectRef>
-          <a:fontRef idx="minor">
-            <a:schemeClr val="lt1"/>
-          </a:fontRef>
-        </p:style>
-        <p:txBody>
-          <a:bodyPr rtlCol="0" anchor="ctr"/>
-          <a:lstStyle/>
-          <a:p>
-            <a:pPr algn="ctr"/>
-            <a:r>
-              <a:rPr lang="en-US" sz="1000" b="1" noProof="0" dirty="0"/>
-              <a:t>System Layer</a:t>
-            </a:r>
-          </a:p>
-        </p:txBody>
-      </p:sp>
-      <p:sp>
-        <p:nvSpPr>
-          <p:cNvPr id="178" name="Round Same-side Corner of Rectangle 177">
-            <a:extLst>
-              <a:ext uri="{FF2B5EF4-FFF2-40B4-BE49-F238E27FC236}">
-                <a16:creationId xmlns:a16="http://schemas.microsoft.com/office/drawing/2014/main" id="{8244B2C5-7E5E-A807-D45A-C7DBA6BE3180}"/>
-              </a:ext>
-            </a:extLst>
-          </p:cNvPr>
-          <p:cNvSpPr/>
-          <p:nvPr/>
-        </p:nvSpPr>
-        <p:spPr>
-          <a:xfrm rot="16200000">
-            <a:off x="4596019" y="3155457"/>
-            <a:ext cx="1220220" cy="314554"/>
-          </a:xfrm>
-          <a:prstGeom prst="round2SameRect">
-            <a:avLst>
-              <a:gd name="adj1" fmla="val 50000"/>
-              <a:gd name="adj2" fmla="val 0"/>
-            </a:avLst>
-          </a:prstGeom>
-          <a:ln w="38100"/>
-        </p:spPr>
-        <p:style>
-          <a:lnRef idx="2">
-            <a:schemeClr val="accent1">
-              <a:shade val="15000"/>
-            </a:schemeClr>
-          </a:lnRef>
-          <a:fillRef idx="1">
-            <a:schemeClr val="accent1"/>
-          </a:fillRef>
-          <a:effectRef idx="0">
-            <a:schemeClr val="accent1"/>
-          </a:effectRef>
-          <a:fontRef idx="minor">
-            <a:schemeClr val="lt1"/>
-          </a:fontRef>
-        </p:style>
-        <p:txBody>
-          <a:bodyPr rtlCol="0" anchor="ctr"/>
-          <a:lstStyle/>
-          <a:p>
-            <a:pPr algn="ctr"/>
-            <a:r>
-              <a:rPr lang="en-US" sz="1000" b="1" noProof="0" dirty="0"/>
-              <a:t>Business Layer</a:t>
-            </a:r>
-          </a:p>
-        </p:txBody>
-      </p:sp>
-      <p:sp>
-        <p:nvSpPr>
-          <p:cNvPr id="179" name="Round Same-side Corner of Rectangle 178">
-            <a:extLst>
-              <a:ext uri="{FF2B5EF4-FFF2-40B4-BE49-F238E27FC236}">
-                <a16:creationId xmlns:a16="http://schemas.microsoft.com/office/drawing/2014/main" id="{5D0D4F31-66F3-FE59-80C1-BE8902178606}"/>
-              </a:ext>
-            </a:extLst>
-          </p:cNvPr>
-          <p:cNvSpPr/>
-          <p:nvPr/>
-        </p:nvSpPr>
-        <p:spPr>
-          <a:xfrm rot="5400000">
-            <a:off x="8861800" y="3835153"/>
-            <a:ext cx="2585554" cy="314554"/>
-          </a:xfrm>
-          <a:prstGeom prst="round2SameRect">
-            <a:avLst>
-              <a:gd name="adj1" fmla="val 50000"/>
-              <a:gd name="adj2" fmla="val 0"/>
-            </a:avLst>
-          </a:prstGeom>
-          <a:ln w="38100"/>
-        </p:spPr>
-        <p:style>
-          <a:lnRef idx="2">
-            <a:schemeClr val="accent1">
-              <a:shade val="15000"/>
-            </a:schemeClr>
-          </a:lnRef>
-          <a:fillRef idx="1">
-            <a:schemeClr val="accent1"/>
-          </a:fillRef>
-          <a:effectRef idx="0">
-            <a:schemeClr val="accent1"/>
-          </a:effectRef>
-          <a:fontRef idx="minor">
-            <a:schemeClr val="lt1"/>
-          </a:fontRef>
-        </p:style>
-        <p:txBody>
-          <a:bodyPr rtlCol="0" anchor="ctr"/>
-          <a:lstStyle/>
-          <a:p>
-            <a:pPr algn="ctr"/>
-            <a:r>
-              <a:rPr lang="en-US" sz="1000" b="1" noProof="0" dirty="0"/>
-              <a:t>Data Layer</a:t>
-            </a:r>
-          </a:p>
-        </p:txBody>
-      </p:sp>
-      <p:cxnSp>
-        <p:nvCxnSpPr>
-          <p:cNvPr id="180" name="Straight Connector 179">
-            <a:extLst>
-              <a:ext uri="{FF2B5EF4-FFF2-40B4-BE49-F238E27FC236}">
-                <a16:creationId xmlns:a16="http://schemas.microsoft.com/office/drawing/2014/main" id="{06B7264D-B206-B00D-6495-497431108BE6}"/>
-              </a:ext>
-            </a:extLst>
-          </p:cNvPr>
-          <p:cNvCxnSpPr>
-            <a:cxnSpLocks/>
-          </p:cNvCxnSpPr>
-          <p:nvPr/>
-        </p:nvCxnSpPr>
-        <p:spPr>
-          <a:xfrm>
-            <a:off x="5452934" y="3984808"/>
-            <a:ext cx="2551814" cy="0"/>
-          </a:xfrm>
-          <a:prstGeom prst="line">
-            <a:avLst/>
-          </a:prstGeom>
-          <a:ln w="38100"/>
-        </p:spPr>
-        <p:style>
-          <a:lnRef idx="2">
-            <a:schemeClr val="accent1"/>
-          </a:lnRef>
-          <a:fillRef idx="0">
-            <a:schemeClr val="accent1"/>
-          </a:fillRef>
-          <a:effectRef idx="1">
-            <a:schemeClr val="accent1"/>
-          </a:effectRef>
-          <a:fontRef idx="minor">
-            <a:schemeClr val="tx1"/>
-          </a:fontRef>
-        </p:style>
-      </p:cxnSp>
-      <p:cxnSp>
-        <p:nvCxnSpPr>
-          <p:cNvPr id="181" name="Straight Connector 180">
-            <a:extLst>
-              <a:ext uri="{FF2B5EF4-FFF2-40B4-BE49-F238E27FC236}">
-                <a16:creationId xmlns:a16="http://schemas.microsoft.com/office/drawing/2014/main" id="{3CDDA031-CAEE-192F-3276-491C2223313E}"/>
-              </a:ext>
-            </a:extLst>
-          </p:cNvPr>
-          <p:cNvCxnSpPr>
-            <a:cxnSpLocks/>
-          </p:cNvCxnSpPr>
-          <p:nvPr/>
-        </p:nvCxnSpPr>
-        <p:spPr>
-          <a:xfrm flipV="1">
-            <a:off x="8004748" y="2646540"/>
-            <a:ext cx="1858227" cy="1338268"/>
-          </a:xfrm>
-          <a:prstGeom prst="line">
-            <a:avLst/>
-          </a:prstGeom>
-          <a:ln w="38100"/>
-        </p:spPr>
-        <p:style>
-          <a:lnRef idx="2">
-            <a:schemeClr val="accent1"/>
-          </a:lnRef>
-          <a:fillRef idx="0">
-            <a:schemeClr val="accent1"/>
-          </a:fillRef>
-          <a:effectRef idx="1">
-            <a:schemeClr val="accent1"/>
-          </a:effectRef>
-          <a:fontRef idx="minor">
-            <a:schemeClr val="tx1"/>
-          </a:fontRef>
-        </p:style>
-      </p:cxnSp>
-      <p:cxnSp>
-        <p:nvCxnSpPr>
-          <p:cNvPr id="182" name="Straight Connector 181">
-            <a:extLst>
-              <a:ext uri="{FF2B5EF4-FFF2-40B4-BE49-F238E27FC236}">
-                <a16:creationId xmlns:a16="http://schemas.microsoft.com/office/drawing/2014/main" id="{B85AAF94-E787-0474-327F-5F0EB2169FAF}"/>
-              </a:ext>
-            </a:extLst>
-          </p:cNvPr>
-          <p:cNvCxnSpPr>
-            <a:cxnSpLocks/>
-          </p:cNvCxnSpPr>
-          <p:nvPr/>
-        </p:nvCxnSpPr>
-        <p:spPr>
-          <a:xfrm>
-            <a:off x="8004747" y="3984808"/>
-            <a:ext cx="1857600" cy="1338268"/>
-          </a:xfrm>
-          <a:prstGeom prst="line">
-            <a:avLst/>
-          </a:prstGeom>
-          <a:ln w="38100"/>
-        </p:spPr>
-        <p:style>
-          <a:lnRef idx="2">
-            <a:schemeClr val="accent1"/>
-          </a:lnRef>
-          <a:fillRef idx="0">
-            <a:schemeClr val="accent1"/>
-          </a:fillRef>
-          <a:effectRef idx="1">
-            <a:schemeClr val="accent1"/>
-          </a:effectRef>
-          <a:fontRef idx="minor">
-            <a:schemeClr val="tx1"/>
-          </a:fontRef>
-        </p:style>
-      </p:cxnSp>
-      <p:pic>
-        <p:nvPicPr>
-          <p:cNvPr id="183" name="Graphic 182" descr="Continuous Improvement with solid fill">
-            <a:extLst>
-              <a:ext uri="{FF2B5EF4-FFF2-40B4-BE49-F238E27FC236}">
-                <a16:creationId xmlns:a16="http://schemas.microsoft.com/office/drawing/2014/main" id="{CF6A3FA5-4A8A-E7CA-1815-72E75FE0A5D6}"/>
-              </a:ext>
-            </a:extLst>
-          </p:cNvPr>
-          <p:cNvPicPr>
-            <a:picLocks noChangeAspect="1"/>
-          </p:cNvPicPr>
-          <p:nvPr/>
-        </p:nvPicPr>
-        <p:blipFill>
-          <a:blip>
-            <a:extLst>
-              <a:ext uri="{96DAC541-7B7A-43D3-8B79-37D633B846F1}">
-                <asvg:svgBlip xmlns:asvg="http://schemas.microsoft.com/office/drawing/2016/SVG/main" r:embed="rId3"/>
-              </a:ext>
-            </a:extLst>
-          </a:blip>
-          <a:stretch>
-            <a:fillRect/>
-          </a:stretch>
-        </p:blipFill>
-        <p:spPr>
-          <a:xfrm>
-            <a:off x="9431401" y="4565258"/>
-            <a:ext cx="398413" cy="398413"/>
-          </a:xfrm>
-          <a:prstGeom prst="rect">
-            <a:avLst/>
-          </a:prstGeom>
-        </p:spPr>
-      </p:pic>
-      <p:pic>
-        <p:nvPicPr>
-          <p:cNvPr id="184" name="Graphic 183" descr="Handshake with solid fill">
-            <a:extLst>
-              <a:ext uri="{FF2B5EF4-FFF2-40B4-BE49-F238E27FC236}">
-                <a16:creationId xmlns:a16="http://schemas.microsoft.com/office/drawing/2014/main" id="{C762C23B-9993-E2B8-8156-1B44CBB44DBD}"/>
-              </a:ext>
-            </a:extLst>
-          </p:cNvPr>
-          <p:cNvPicPr>
-            <a:picLocks noChangeAspect="1"/>
-          </p:cNvPicPr>
-          <p:nvPr/>
-        </p:nvPicPr>
-        <p:blipFill>
-          <a:blip>
-            <a:extLst>
-              <a:ext uri="{96DAC541-7B7A-43D3-8B79-37D633B846F1}">
-                <asvg:svgBlip xmlns:asvg="http://schemas.microsoft.com/office/drawing/2016/SVG/main" r:embed="rId4"/>
-              </a:ext>
-            </a:extLst>
-          </a:blip>
-          <a:stretch>
-            <a:fillRect/>
-          </a:stretch>
-        </p:blipFill>
-        <p:spPr>
-          <a:xfrm>
-            <a:off x="8289915" y="3792792"/>
-            <a:ext cx="398413" cy="398413"/>
-          </a:xfrm>
-          <a:prstGeom prst="rect">
-            <a:avLst/>
-          </a:prstGeom>
-        </p:spPr>
-      </p:pic>
-      <p:pic>
-        <p:nvPicPr>
-          <p:cNvPr id="185" name="Graphic 184" descr="Atom with solid fill">
-            <a:extLst>
-              <a:ext uri="{FF2B5EF4-FFF2-40B4-BE49-F238E27FC236}">
-                <a16:creationId xmlns:a16="http://schemas.microsoft.com/office/drawing/2014/main" id="{ECD77B54-0595-3866-A8AC-D16AE78A5809}"/>
-              </a:ext>
-            </a:extLst>
-          </p:cNvPr>
-          <p:cNvPicPr>
-            <a:picLocks noChangeAspect="1"/>
-          </p:cNvPicPr>
-          <p:nvPr/>
-        </p:nvPicPr>
-        <p:blipFill>
-          <a:blip>
-            <a:extLst>
-              <a:ext uri="{96DAC541-7B7A-43D3-8B79-37D633B846F1}">
-                <asvg:svgBlip xmlns:asvg="http://schemas.microsoft.com/office/drawing/2016/SVG/main" r:embed="rId5"/>
-              </a:ext>
-            </a:extLst>
-          </a:blip>
-          <a:stretch>
-            <a:fillRect/>
-          </a:stretch>
-        </p:blipFill>
-        <p:spPr>
-          <a:xfrm>
-            <a:off x="7722161" y="5649413"/>
-            <a:ext cx="403582" cy="403582"/>
-          </a:xfrm>
-          <a:prstGeom prst="rect">
-            <a:avLst/>
-          </a:prstGeom>
-        </p:spPr>
-      </p:pic>
-      <p:pic>
-        <p:nvPicPr>
-          <p:cNvPr id="186" name="Graphic 185" descr="Binoculars with solid fill">
-            <a:extLst>
-              <a:ext uri="{FF2B5EF4-FFF2-40B4-BE49-F238E27FC236}">
-                <a16:creationId xmlns:a16="http://schemas.microsoft.com/office/drawing/2014/main" id="{72D9DB17-882D-2E90-1056-C55F30F27495}"/>
-              </a:ext>
-            </a:extLst>
-          </p:cNvPr>
-          <p:cNvPicPr>
-            <a:picLocks noChangeAspect="1"/>
-          </p:cNvPicPr>
-          <p:nvPr/>
-        </p:nvPicPr>
-        <p:blipFill>
-          <a:blip>
-            <a:extLst>
-              <a:ext uri="{96DAC541-7B7A-43D3-8B79-37D633B846F1}">
-                <asvg:svgBlip xmlns:asvg="http://schemas.microsoft.com/office/drawing/2016/SVG/main" r:embed="rId6"/>
-              </a:ext>
-            </a:extLst>
-          </a:blip>
-          <a:stretch>
-            <a:fillRect/>
-          </a:stretch>
-        </p:blipFill>
-        <p:spPr>
-          <a:xfrm>
-            <a:off x="8826886" y="5649413"/>
-            <a:ext cx="403581" cy="403581"/>
-          </a:xfrm>
-          <a:prstGeom prst="rect">
-            <a:avLst/>
-          </a:prstGeom>
-        </p:spPr>
-      </p:pic>
-      <p:pic>
-        <p:nvPicPr>
-          <p:cNvPr id="187" name="Graphic 186" descr="Blockchain with solid fill">
-            <a:extLst>
-              <a:ext uri="{FF2B5EF4-FFF2-40B4-BE49-F238E27FC236}">
-                <a16:creationId xmlns:a16="http://schemas.microsoft.com/office/drawing/2014/main" id="{E36A6081-22E3-D06E-FEDC-F5DC112C2F3F}"/>
-              </a:ext>
-            </a:extLst>
-          </p:cNvPr>
-          <p:cNvPicPr>
-            <a:picLocks noChangeAspect="1"/>
-          </p:cNvPicPr>
-          <p:nvPr/>
-        </p:nvPicPr>
-        <p:blipFill>
-          <a:blip>
-            <a:extLst>
-              <a:ext uri="{96DAC541-7B7A-43D3-8B79-37D633B846F1}">
-                <asvg:svgBlip xmlns:asvg="http://schemas.microsoft.com/office/drawing/2016/SVG/main" r:embed="rId7"/>
-              </a:ext>
-            </a:extLst>
-          </a:blip>
-          <a:stretch>
-            <a:fillRect/>
-          </a:stretch>
-        </p:blipFill>
-        <p:spPr>
-          <a:xfrm>
-            <a:off x="6528086" y="4730319"/>
-            <a:ext cx="398978" cy="398978"/>
-          </a:xfrm>
-          <a:prstGeom prst="rect">
-            <a:avLst/>
-          </a:prstGeom>
-        </p:spPr>
-      </p:pic>
-      <p:pic>
-        <p:nvPicPr>
-          <p:cNvPr id="188" name="Graphic 187" descr="Building Brick Wall with solid fill">
-            <a:extLst>
-              <a:ext uri="{FF2B5EF4-FFF2-40B4-BE49-F238E27FC236}">
-                <a16:creationId xmlns:a16="http://schemas.microsoft.com/office/drawing/2014/main" id="{E59A72FE-2D61-10AD-7A35-933063398425}"/>
-              </a:ext>
-            </a:extLst>
-          </p:cNvPr>
-          <p:cNvPicPr>
-            <a:picLocks noChangeAspect="1"/>
-          </p:cNvPicPr>
-          <p:nvPr/>
-        </p:nvPicPr>
-        <p:blipFill>
-          <a:blip>
-            <a:extLst>
-              <a:ext uri="{96DAC541-7B7A-43D3-8B79-37D633B846F1}">
-                <asvg:svgBlip xmlns:asvg="http://schemas.microsoft.com/office/drawing/2016/SVG/main" r:embed="rId8"/>
-              </a:ext>
-            </a:extLst>
-          </a:blip>
-          <a:stretch>
-            <a:fillRect/>
-          </a:stretch>
-        </p:blipFill>
-        <p:spPr>
-          <a:xfrm>
-            <a:off x="9674056" y="5654289"/>
-            <a:ext cx="398413" cy="398413"/>
-          </a:xfrm>
-          <a:prstGeom prst="rect">
-            <a:avLst/>
-          </a:prstGeom>
-        </p:spPr>
-      </p:pic>
-      <p:pic>
-        <p:nvPicPr>
-          <p:cNvPr id="189" name="Graphic 188" descr="Bullseye with solid fill">
-            <a:extLst>
-              <a:ext uri="{FF2B5EF4-FFF2-40B4-BE49-F238E27FC236}">
-                <a16:creationId xmlns:a16="http://schemas.microsoft.com/office/drawing/2014/main" id="{BE561216-B331-AC93-C219-420347575889}"/>
-              </a:ext>
-            </a:extLst>
-          </p:cNvPr>
-          <p:cNvPicPr>
-            <a:picLocks noChangeAspect="1"/>
-          </p:cNvPicPr>
-          <p:nvPr/>
-        </p:nvPicPr>
-        <p:blipFill>
-          <a:blip>
-            <a:extLst>
-              <a:ext uri="{96DAC541-7B7A-43D3-8B79-37D633B846F1}">
-                <asvg:svgBlip xmlns:asvg="http://schemas.microsoft.com/office/drawing/2016/SVG/main" r:embed="rId9"/>
-              </a:ext>
-            </a:extLst>
-          </a:blip>
-          <a:stretch>
-            <a:fillRect/>
-          </a:stretch>
-        </p:blipFill>
-        <p:spPr>
-          <a:xfrm>
-            <a:off x="5761756" y="1684720"/>
-            <a:ext cx="398413" cy="398413"/>
-          </a:xfrm>
-          <a:prstGeom prst="rect">
-            <a:avLst/>
-          </a:prstGeom>
-        </p:spPr>
-      </p:pic>
-      <p:pic>
-        <p:nvPicPr>
-          <p:cNvPr id="190" name="Graphic 189" descr="Care with solid fill">
-            <a:extLst>
-              <a:ext uri="{FF2B5EF4-FFF2-40B4-BE49-F238E27FC236}">
-                <a16:creationId xmlns:a16="http://schemas.microsoft.com/office/drawing/2014/main" id="{A5276C4E-8B74-DE3D-D567-DF9B8988BBCC}"/>
-              </a:ext>
-            </a:extLst>
-          </p:cNvPr>
-          <p:cNvPicPr>
-            <a:picLocks noChangeAspect="1"/>
-          </p:cNvPicPr>
-          <p:nvPr/>
-        </p:nvPicPr>
-        <p:blipFill>
-          <a:blip>
-            <a:extLst>
-              <a:ext uri="{96DAC541-7B7A-43D3-8B79-37D633B846F1}">
-                <asvg:svgBlip xmlns:asvg="http://schemas.microsoft.com/office/drawing/2016/SVG/main" r:embed="rId10"/>
-              </a:ext>
-            </a:extLst>
-          </a:blip>
-          <a:stretch>
-            <a:fillRect/>
-          </a:stretch>
-        </p:blipFill>
-        <p:spPr>
-          <a:xfrm>
-            <a:off x="8189624" y="3106180"/>
-            <a:ext cx="403691" cy="403691"/>
-          </a:xfrm>
-          <a:prstGeom prst="rect">
-            <a:avLst/>
-          </a:prstGeom>
-        </p:spPr>
-      </p:pic>
-      <p:pic>
-        <p:nvPicPr>
-          <p:cNvPr id="191" name="Graphic 190" descr="Circles with arrows with solid fill">
-            <a:extLst>
-              <a:ext uri="{FF2B5EF4-FFF2-40B4-BE49-F238E27FC236}">
-                <a16:creationId xmlns:a16="http://schemas.microsoft.com/office/drawing/2014/main" id="{3840B090-E544-61EA-2747-9B8F727B0356}"/>
-              </a:ext>
-            </a:extLst>
-          </p:cNvPr>
-          <p:cNvPicPr>
-            <a:picLocks noChangeAspect="1"/>
-          </p:cNvPicPr>
-          <p:nvPr/>
-        </p:nvPicPr>
-        <p:blipFill>
-          <a:blip>
-            <a:extLst>
-              <a:ext uri="{96DAC541-7B7A-43D3-8B79-37D633B846F1}">
-                <asvg:svgBlip xmlns:asvg="http://schemas.microsoft.com/office/drawing/2016/SVG/main" r:embed="rId11"/>
-              </a:ext>
-            </a:extLst>
-          </a:blip>
-          <a:stretch>
-            <a:fillRect/>
-          </a:stretch>
-        </p:blipFill>
-        <p:spPr>
-          <a:xfrm>
-            <a:off x="8194902" y="4468809"/>
-            <a:ext cx="398413" cy="398413"/>
-          </a:xfrm>
-          <a:prstGeom prst="rect">
-            <a:avLst/>
-          </a:prstGeom>
-        </p:spPr>
-      </p:pic>
-      <p:pic>
-        <p:nvPicPr>
-          <p:cNvPr id="192" name="Graphic 191" descr="City with solid fill">
-            <a:extLst>
-              <a:ext uri="{FF2B5EF4-FFF2-40B4-BE49-F238E27FC236}">
-                <a16:creationId xmlns:a16="http://schemas.microsoft.com/office/drawing/2014/main" id="{4E7A7EAE-B9B7-D73D-492E-7002CBFE0333}"/>
-              </a:ext>
-            </a:extLst>
-          </p:cNvPr>
-          <p:cNvPicPr>
-            <a:picLocks noChangeAspect="1"/>
-          </p:cNvPicPr>
-          <p:nvPr/>
-        </p:nvPicPr>
-        <p:blipFill>
-          <a:blip>
-            <a:extLst>
-              <a:ext uri="{96DAC541-7B7A-43D3-8B79-37D633B846F1}">
-                <asvg:svgBlip xmlns:asvg="http://schemas.microsoft.com/office/drawing/2016/SVG/main" r:embed="rId12"/>
-              </a:ext>
-            </a:extLst>
-          </a:blip>
-          <a:stretch>
-            <a:fillRect/>
-          </a:stretch>
-        </p:blipFill>
-        <p:spPr>
-          <a:xfrm>
-            <a:off x="10816445" y="2871623"/>
-            <a:ext cx="625009" cy="625009"/>
-          </a:xfrm>
-          <a:prstGeom prst="rect">
-            <a:avLst/>
-          </a:prstGeom>
-        </p:spPr>
-      </p:pic>
-      <p:pic>
-        <p:nvPicPr>
-          <p:cNvPr id="193" name="Graphic 192" descr="Clipboard Badge with solid fill">
-            <a:extLst>
-              <a:ext uri="{FF2B5EF4-FFF2-40B4-BE49-F238E27FC236}">
-                <a16:creationId xmlns:a16="http://schemas.microsoft.com/office/drawing/2014/main" id="{44A27DA3-A10B-326A-C40A-E4CF2AA6045C}"/>
-              </a:ext>
-            </a:extLst>
-          </p:cNvPr>
-          <p:cNvPicPr>
-            <a:picLocks noChangeAspect="1"/>
-          </p:cNvPicPr>
-          <p:nvPr/>
-        </p:nvPicPr>
-        <p:blipFill>
-          <a:blip>
-            <a:extLst>
-              <a:ext uri="{96DAC541-7B7A-43D3-8B79-37D633B846F1}">
-                <asvg:svgBlip xmlns:asvg="http://schemas.microsoft.com/office/drawing/2016/SVG/main" r:embed="rId13"/>
-              </a:ext>
-            </a:extLst>
-          </a:blip>
-          <a:stretch>
-            <a:fillRect/>
-          </a:stretch>
-        </p:blipFill>
-        <p:spPr>
-          <a:xfrm>
-            <a:off x="9530261" y="1684720"/>
-            <a:ext cx="398413" cy="398413"/>
-          </a:xfrm>
-          <a:prstGeom prst="rect">
-            <a:avLst/>
-          </a:prstGeom>
-        </p:spPr>
-      </p:pic>
-      <p:pic>
-        <p:nvPicPr>
-          <p:cNvPr id="194" name="Graphic 193" descr="Clipboard All Crosses with solid fill">
-            <a:extLst>
-              <a:ext uri="{FF2B5EF4-FFF2-40B4-BE49-F238E27FC236}">
-                <a16:creationId xmlns:a16="http://schemas.microsoft.com/office/drawing/2014/main" id="{4011220E-67AD-62B1-0319-94A70F224865}"/>
-              </a:ext>
-            </a:extLst>
-          </p:cNvPr>
-          <p:cNvPicPr>
-            <a:picLocks noChangeAspect="1"/>
-          </p:cNvPicPr>
-          <p:nvPr/>
-        </p:nvPicPr>
-        <p:blipFill>
-          <a:blip>
-            <a:extLst>
-              <a:ext uri="{96DAC541-7B7A-43D3-8B79-37D633B846F1}">
-                <asvg:svgBlip xmlns:asvg="http://schemas.microsoft.com/office/drawing/2016/SVG/main" r:embed="rId14"/>
-              </a:ext>
-            </a:extLst>
-          </a:blip>
-          <a:stretch>
-            <a:fillRect/>
-          </a:stretch>
-        </p:blipFill>
-        <p:spPr>
-          <a:xfrm>
-            <a:off x="8308088" y="1684720"/>
-            <a:ext cx="398413" cy="398413"/>
-          </a:xfrm>
-          <a:prstGeom prst="rect">
-            <a:avLst/>
-          </a:prstGeom>
-        </p:spPr>
-      </p:pic>
-      <p:pic>
-        <p:nvPicPr>
-          <p:cNvPr id="195" name="Graphic 194" descr="Cloud Computing with solid fill">
-            <a:extLst>
-              <a:ext uri="{FF2B5EF4-FFF2-40B4-BE49-F238E27FC236}">
-                <a16:creationId xmlns:a16="http://schemas.microsoft.com/office/drawing/2014/main" id="{E0FD4980-2E3F-25DA-7754-477EA103A5E6}"/>
-              </a:ext>
-            </a:extLst>
-          </p:cNvPr>
-          <p:cNvPicPr>
-            <a:picLocks noChangeAspect="1"/>
-          </p:cNvPicPr>
-          <p:nvPr/>
-        </p:nvPicPr>
-        <p:blipFill>
-          <a:blip>
-            <a:extLst>
-              <a:ext uri="{96DAC541-7B7A-43D3-8B79-37D633B846F1}">
-                <asvg:svgBlip xmlns:asvg="http://schemas.microsoft.com/office/drawing/2016/SVG/main" r:embed="rId15"/>
-              </a:ext>
-            </a:extLst>
-          </a:blip>
-          <a:stretch>
-            <a:fillRect/>
-          </a:stretch>
-        </p:blipFill>
-        <p:spPr>
-          <a:xfrm>
-            <a:off x="5672273" y="5650047"/>
-            <a:ext cx="398413" cy="398413"/>
-          </a:xfrm>
-          <a:prstGeom prst="rect">
-            <a:avLst/>
-          </a:prstGeom>
-        </p:spPr>
-      </p:pic>
-      <p:pic>
-        <p:nvPicPr>
-          <p:cNvPr id="196" name="Graphic 195" descr="Connections with solid fill">
-            <a:extLst>
-              <a:ext uri="{FF2B5EF4-FFF2-40B4-BE49-F238E27FC236}">
-                <a16:creationId xmlns:a16="http://schemas.microsoft.com/office/drawing/2014/main" id="{B9D3FCAF-09EF-8B3E-876D-676D3FF968AB}"/>
-              </a:ext>
-            </a:extLst>
-          </p:cNvPr>
-          <p:cNvPicPr>
-            <a:picLocks noChangeAspect="1"/>
-          </p:cNvPicPr>
-          <p:nvPr/>
-        </p:nvPicPr>
-        <p:blipFill>
-          <a:blip>
-            <a:extLst>
-              <a:ext uri="{96DAC541-7B7A-43D3-8B79-37D633B846F1}">
-                <asvg:svgBlip xmlns:asvg="http://schemas.microsoft.com/office/drawing/2016/SVG/main" r:embed="rId16"/>
-              </a:ext>
-            </a:extLst>
-          </a:blip>
-          <a:stretch>
-            <a:fillRect/>
-          </a:stretch>
-        </p:blipFill>
-        <p:spPr>
-          <a:xfrm>
-            <a:off x="6972885" y="1687675"/>
-            <a:ext cx="398413" cy="398413"/>
-          </a:xfrm>
-          <a:prstGeom prst="rect">
-            <a:avLst/>
-          </a:prstGeom>
-        </p:spPr>
-      </p:pic>
-      <p:pic>
-        <p:nvPicPr>
-          <p:cNvPr id="197" name="Graphic 196" descr="Cube with solid fill">
-            <a:extLst>
-              <a:ext uri="{FF2B5EF4-FFF2-40B4-BE49-F238E27FC236}">
-                <a16:creationId xmlns:a16="http://schemas.microsoft.com/office/drawing/2014/main" id="{F427774A-8614-8A16-32A1-5C22F248AF2B}"/>
-              </a:ext>
-            </a:extLst>
-          </p:cNvPr>
-          <p:cNvPicPr>
-            <a:picLocks noChangeAspect="1"/>
-          </p:cNvPicPr>
-          <p:nvPr/>
-        </p:nvPicPr>
-        <p:blipFill>
-          <a:blip>
-            <a:extLst>
-              <a:ext uri="{96DAC541-7B7A-43D3-8B79-37D633B846F1}">
-                <asvg:svgBlip xmlns:asvg="http://schemas.microsoft.com/office/drawing/2016/SVG/main" r:embed="rId17"/>
-              </a:ext>
-            </a:extLst>
-          </a:blip>
-          <a:stretch>
-            <a:fillRect/>
-          </a:stretch>
-        </p:blipFill>
-        <p:spPr>
-          <a:xfrm>
-            <a:off x="9431402" y="3003214"/>
-            <a:ext cx="398412" cy="398412"/>
-          </a:xfrm>
-          <a:prstGeom prst="rect">
-            <a:avLst/>
-          </a:prstGeom>
-        </p:spPr>
-      </p:pic>
-      <p:pic>
-        <p:nvPicPr>
-          <p:cNvPr id="198" name="Graphic 197" descr="Database with solid fill">
-            <a:extLst>
-              <a:ext uri="{FF2B5EF4-FFF2-40B4-BE49-F238E27FC236}">
-                <a16:creationId xmlns:a16="http://schemas.microsoft.com/office/drawing/2014/main" id="{4ED15DAF-E3B4-1B33-2250-8676B05E4051}"/>
-              </a:ext>
-            </a:extLst>
-          </p:cNvPr>
-          <p:cNvPicPr>
-            <a:picLocks noChangeAspect="1"/>
-          </p:cNvPicPr>
-          <p:nvPr/>
-        </p:nvPicPr>
-        <p:blipFill>
-          <a:blip>
-            <a:extLst>
-              <a:ext uri="{96DAC541-7B7A-43D3-8B79-37D633B846F1}">
-                <asvg:svgBlip xmlns:asvg="http://schemas.microsoft.com/office/drawing/2016/SVG/main" r:embed="rId18"/>
-              </a:ext>
-            </a:extLst>
-          </a:blip>
-          <a:stretch>
-            <a:fillRect/>
-          </a:stretch>
-        </p:blipFill>
-        <p:spPr>
-          <a:xfrm>
-            <a:off x="6622606" y="5650046"/>
-            <a:ext cx="398413" cy="398413"/>
-          </a:xfrm>
-          <a:prstGeom prst="rect">
-            <a:avLst/>
-          </a:prstGeom>
-        </p:spPr>
-      </p:pic>
-      <p:sp>
-        <p:nvSpPr>
-          <p:cNvPr id="199" name="TextBox 198">
-            <a:extLst>
-              <a:ext uri="{FF2B5EF4-FFF2-40B4-BE49-F238E27FC236}">
-                <a16:creationId xmlns:a16="http://schemas.microsoft.com/office/drawing/2014/main" id="{E0A09934-2049-F7E0-106D-E207CC58A9D4}"/>
-              </a:ext>
-            </a:extLst>
-          </p:cNvPr>
-          <p:cNvSpPr txBox="1"/>
-          <p:nvPr/>
-        </p:nvSpPr>
-        <p:spPr>
-          <a:xfrm>
-            <a:off x="9357381" y="3459210"/>
-            <a:ext cx="603050" cy="215444"/>
-          </a:xfrm>
-          <a:prstGeom prst="rect">
-            <a:avLst/>
-          </a:prstGeom>
-          <a:noFill/>
-        </p:spPr>
-        <p:txBody>
-          <a:bodyPr wrap="none" rtlCol="0">
-            <a:spAutoFit/>
-          </a:bodyPr>
-          <a:lstStyle/>
-          <a:p>
-            <a:r>
-              <a:rPr lang="en-US" sz="800" b="1" noProof="0" dirty="0"/>
-              <a:t>Domains</a:t>
-            </a:r>
-          </a:p>
-        </p:txBody>
-      </p:sp>
-      <p:sp>
-        <p:nvSpPr>
-          <p:cNvPr id="200" name="TextBox 199">
-            <a:extLst>
-              <a:ext uri="{FF2B5EF4-FFF2-40B4-BE49-F238E27FC236}">
-                <a16:creationId xmlns:a16="http://schemas.microsoft.com/office/drawing/2014/main" id="{B2B2E47D-EA6A-70CB-1E95-7C94D3DAF242}"/>
-              </a:ext>
-            </a:extLst>
-          </p:cNvPr>
-          <p:cNvSpPr txBox="1"/>
-          <p:nvPr/>
-        </p:nvSpPr>
-        <p:spPr>
-          <a:xfrm>
-            <a:off x="9042586" y="4382589"/>
-            <a:ext cx="830677" cy="215444"/>
-          </a:xfrm>
-          <a:prstGeom prst="rect">
-            <a:avLst/>
-          </a:prstGeom>
-          <a:noFill/>
-        </p:spPr>
-        <p:txBody>
-          <a:bodyPr wrap="none" rtlCol="0">
-            <a:spAutoFit/>
-          </a:bodyPr>
-          <a:lstStyle/>
-          <a:p>
-            <a:r>
-              <a:rPr lang="en-US" sz="800" b="1" noProof="0" dirty="0"/>
-              <a:t>Dataproducts</a:t>
-            </a:r>
-          </a:p>
-        </p:txBody>
-      </p:sp>
-      <p:sp>
-        <p:nvSpPr>
-          <p:cNvPr id="201" name="TextBox 200">
-            <a:extLst>
-              <a:ext uri="{FF2B5EF4-FFF2-40B4-BE49-F238E27FC236}">
-                <a16:creationId xmlns:a16="http://schemas.microsoft.com/office/drawing/2014/main" id="{DDE400AD-BCAE-2436-3858-01F8F65ADA10}"/>
-              </a:ext>
-            </a:extLst>
-          </p:cNvPr>
-          <p:cNvSpPr txBox="1"/>
-          <p:nvPr/>
-        </p:nvSpPr>
-        <p:spPr>
-          <a:xfrm>
-            <a:off x="8687964" y="3915276"/>
-            <a:ext cx="630301" cy="215444"/>
-          </a:xfrm>
-          <a:prstGeom prst="rect">
-            <a:avLst/>
-          </a:prstGeom>
-          <a:noFill/>
-        </p:spPr>
-        <p:txBody>
-          <a:bodyPr wrap="none" rtlCol="0">
-            <a:spAutoFit/>
-          </a:bodyPr>
-          <a:lstStyle/>
-          <a:p>
-            <a:r>
-              <a:rPr lang="en-US" sz="800" b="1" noProof="0" dirty="0"/>
-              <a:t>Semantic</a:t>
-            </a:r>
-          </a:p>
-        </p:txBody>
-      </p:sp>
-      <p:sp>
-        <p:nvSpPr>
-          <p:cNvPr id="202" name="TextBox 201">
-            <a:extLst>
-              <a:ext uri="{FF2B5EF4-FFF2-40B4-BE49-F238E27FC236}">
-                <a16:creationId xmlns:a16="http://schemas.microsoft.com/office/drawing/2014/main" id="{F412E9B5-0423-24C7-7268-DAFF99C09097}"/>
-              </a:ext>
-            </a:extLst>
-          </p:cNvPr>
-          <p:cNvSpPr txBox="1"/>
-          <p:nvPr/>
-        </p:nvSpPr>
-        <p:spPr>
-          <a:xfrm>
-            <a:off x="5478014" y="2148947"/>
-            <a:ext cx="965897" cy="338554"/>
-          </a:xfrm>
-          <a:prstGeom prst="rect">
-            <a:avLst/>
-          </a:prstGeom>
-          <a:noFill/>
-        </p:spPr>
-        <p:txBody>
-          <a:bodyPr wrap="square" rtlCol="0">
-            <a:spAutoFit/>
-          </a:bodyPr>
-          <a:lstStyle/>
-          <a:p>
-            <a:pPr algn="ctr"/>
-            <a:r>
-              <a:rPr lang="en-US" sz="800" b="1" noProof="0" dirty="0"/>
-              <a:t>Strategy &amp; Roadmap</a:t>
-            </a:r>
-          </a:p>
-        </p:txBody>
-      </p:sp>
-      <p:sp>
-        <p:nvSpPr>
-          <p:cNvPr id="203" name="TextBox 202">
-            <a:extLst>
-              <a:ext uri="{FF2B5EF4-FFF2-40B4-BE49-F238E27FC236}">
-                <a16:creationId xmlns:a16="http://schemas.microsoft.com/office/drawing/2014/main" id="{A6656FDC-1F73-BB57-0D81-463A76E29AFE}"/>
-              </a:ext>
-            </a:extLst>
-          </p:cNvPr>
-          <p:cNvSpPr txBox="1"/>
-          <p:nvPr/>
-        </p:nvSpPr>
-        <p:spPr>
-          <a:xfrm>
-            <a:off x="6734183" y="2155260"/>
-            <a:ext cx="965897" cy="338554"/>
-          </a:xfrm>
-          <a:prstGeom prst="rect">
-            <a:avLst/>
-          </a:prstGeom>
-          <a:noFill/>
-        </p:spPr>
-        <p:txBody>
-          <a:bodyPr wrap="square" rtlCol="0">
-            <a:spAutoFit/>
-          </a:bodyPr>
-          <a:lstStyle/>
-          <a:p>
-            <a:pPr algn="ctr"/>
-            <a:r>
-              <a:rPr lang="en-US" sz="800" b="1" noProof="0" dirty="0"/>
-              <a:t>Roles &amp; Responsibilities</a:t>
-            </a:r>
-          </a:p>
-        </p:txBody>
-      </p:sp>
-      <p:sp>
-        <p:nvSpPr>
-          <p:cNvPr id="204" name="TextBox 203">
-            <a:extLst>
-              <a:ext uri="{FF2B5EF4-FFF2-40B4-BE49-F238E27FC236}">
-                <a16:creationId xmlns:a16="http://schemas.microsoft.com/office/drawing/2014/main" id="{65193A86-14A6-E4AB-3554-FDF1F51FA6E7}"/>
-              </a:ext>
-            </a:extLst>
-          </p:cNvPr>
-          <p:cNvSpPr txBox="1"/>
-          <p:nvPr/>
-        </p:nvSpPr>
-        <p:spPr>
-          <a:xfrm>
-            <a:off x="7990352" y="2150815"/>
-            <a:ext cx="965897" cy="338554"/>
-          </a:xfrm>
-          <a:prstGeom prst="rect">
-            <a:avLst/>
-          </a:prstGeom>
-          <a:noFill/>
-        </p:spPr>
-        <p:txBody>
-          <a:bodyPr wrap="square" rtlCol="0">
-            <a:spAutoFit/>
-          </a:bodyPr>
-          <a:lstStyle/>
-          <a:p>
-            <a:pPr algn="ctr"/>
-            <a:r>
-              <a:rPr lang="en-US" sz="800" b="1" noProof="0" dirty="0"/>
-              <a:t>Standards &amp; Guidelines</a:t>
-            </a:r>
-          </a:p>
-        </p:txBody>
-      </p:sp>
-      <p:sp>
-        <p:nvSpPr>
-          <p:cNvPr id="205" name="TextBox 204">
-            <a:extLst>
-              <a:ext uri="{FF2B5EF4-FFF2-40B4-BE49-F238E27FC236}">
-                <a16:creationId xmlns:a16="http://schemas.microsoft.com/office/drawing/2014/main" id="{D73A5D14-ECFD-98E5-4F1B-A2B40F895344}"/>
-              </a:ext>
-            </a:extLst>
-          </p:cNvPr>
-          <p:cNvSpPr txBox="1"/>
-          <p:nvPr/>
-        </p:nvSpPr>
-        <p:spPr>
-          <a:xfrm>
-            <a:off x="9246520" y="2145835"/>
-            <a:ext cx="965897" cy="338554"/>
-          </a:xfrm>
-          <a:prstGeom prst="rect">
-            <a:avLst/>
-          </a:prstGeom>
-          <a:noFill/>
-        </p:spPr>
-        <p:txBody>
-          <a:bodyPr wrap="square" rtlCol="0">
-            <a:spAutoFit/>
-          </a:bodyPr>
-          <a:lstStyle/>
-          <a:p>
-            <a:pPr algn="ctr"/>
-            <a:r>
-              <a:rPr lang="en-US" sz="800" b="1" noProof="0" dirty="0"/>
-              <a:t>Compliance &amp; </a:t>
-            </a:r>
-            <a:r>
-              <a:rPr lang="en-US" sz="800" b="1" noProof="0" dirty="0" err="1"/>
-              <a:t>Regulatorik</a:t>
-            </a:r>
-            <a:endParaRPr lang="en-US" sz="800" b="1" noProof="0" dirty="0"/>
-          </a:p>
-        </p:txBody>
-      </p:sp>
-      <p:sp>
-        <p:nvSpPr>
-          <p:cNvPr id="206" name="TextBox 205">
-            <a:extLst>
-              <a:ext uri="{FF2B5EF4-FFF2-40B4-BE49-F238E27FC236}">
-                <a16:creationId xmlns:a16="http://schemas.microsoft.com/office/drawing/2014/main" id="{390FFACA-52DB-701E-F04E-DD415FA2F0A1}"/>
-              </a:ext>
-            </a:extLst>
-          </p:cNvPr>
-          <p:cNvSpPr txBox="1"/>
-          <p:nvPr/>
-        </p:nvSpPr>
-        <p:spPr>
-          <a:xfrm>
-            <a:off x="5472962" y="6147077"/>
-            <a:ext cx="838691" cy="338554"/>
-          </a:xfrm>
-          <a:prstGeom prst="rect">
-            <a:avLst/>
-          </a:prstGeom>
-          <a:noFill/>
-        </p:spPr>
-        <p:txBody>
-          <a:bodyPr wrap="none" rtlCol="0">
-            <a:spAutoFit/>
-          </a:bodyPr>
-          <a:lstStyle/>
-          <a:p>
-            <a:pPr algn="ctr"/>
-            <a:r>
-              <a:rPr lang="en-US" sz="800" b="1" noProof="0" dirty="0"/>
-              <a:t>Platform &amp;</a:t>
-            </a:r>
-            <a:br>
-              <a:rPr lang="en-US" sz="800" b="1" noProof="0" dirty="0"/>
-            </a:br>
-            <a:r>
-              <a:rPr lang="en-US" sz="800" b="1" noProof="0" dirty="0"/>
-              <a:t>Infrastructure</a:t>
-            </a:r>
-          </a:p>
-        </p:txBody>
-      </p:sp>
-      <p:sp>
-        <p:nvSpPr>
-          <p:cNvPr id="207" name="TextBox 206">
-            <a:extLst>
-              <a:ext uri="{FF2B5EF4-FFF2-40B4-BE49-F238E27FC236}">
-                <a16:creationId xmlns:a16="http://schemas.microsoft.com/office/drawing/2014/main" id="{4E176CF4-8DC2-148B-1E73-3AD5EF75FBE1}"/>
-              </a:ext>
-            </a:extLst>
-          </p:cNvPr>
-          <p:cNvSpPr txBox="1"/>
-          <p:nvPr/>
-        </p:nvSpPr>
-        <p:spPr>
-          <a:xfrm>
-            <a:off x="6382430" y="6139777"/>
-            <a:ext cx="878767" cy="338554"/>
-          </a:xfrm>
-          <a:prstGeom prst="rect">
-            <a:avLst/>
-          </a:prstGeom>
-          <a:noFill/>
-        </p:spPr>
-        <p:txBody>
-          <a:bodyPr wrap="none" rtlCol="0">
-            <a:spAutoFit/>
-          </a:bodyPr>
-          <a:lstStyle/>
-          <a:p>
-            <a:pPr algn="ctr"/>
-            <a:r>
-              <a:rPr lang="en-US" sz="800" b="1" noProof="0" dirty="0"/>
-              <a:t>Data Storage &amp;</a:t>
-            </a:r>
-            <a:br>
-              <a:rPr lang="en-US" sz="800" b="1" noProof="0" dirty="0"/>
-            </a:br>
-            <a:r>
-              <a:rPr lang="en-US" sz="800" b="1" noProof="0" dirty="0"/>
-              <a:t> Management</a:t>
-            </a:r>
-          </a:p>
-        </p:txBody>
-      </p:sp>
-      <p:sp>
-        <p:nvSpPr>
-          <p:cNvPr id="208" name="TextBox 207">
-            <a:extLst>
-              <a:ext uri="{FF2B5EF4-FFF2-40B4-BE49-F238E27FC236}">
-                <a16:creationId xmlns:a16="http://schemas.microsoft.com/office/drawing/2014/main" id="{2670523D-8677-BA2B-6984-625711CF1CCA}"/>
-              </a:ext>
-            </a:extLst>
-          </p:cNvPr>
-          <p:cNvSpPr txBox="1"/>
-          <p:nvPr/>
-        </p:nvSpPr>
-        <p:spPr>
-          <a:xfrm>
-            <a:off x="7331974" y="6139777"/>
-            <a:ext cx="1175322" cy="338554"/>
-          </a:xfrm>
-          <a:prstGeom prst="rect">
-            <a:avLst/>
-          </a:prstGeom>
-          <a:noFill/>
-        </p:spPr>
-        <p:txBody>
-          <a:bodyPr wrap="none" rtlCol="0">
-            <a:spAutoFit/>
-          </a:bodyPr>
-          <a:lstStyle/>
-          <a:p>
-            <a:pPr algn="ctr"/>
-            <a:r>
-              <a:rPr lang="en-US" sz="800" b="1" noProof="0" dirty="0"/>
-              <a:t>Analytics Platform &amp;</a:t>
-            </a:r>
-            <a:br>
-              <a:rPr lang="en-US" sz="800" b="1" noProof="0" dirty="0"/>
-            </a:br>
-            <a:r>
-              <a:rPr lang="en-US" sz="800" b="1" noProof="0" dirty="0"/>
-              <a:t>Tooling</a:t>
-            </a:r>
-          </a:p>
-        </p:txBody>
-      </p:sp>
-      <p:sp>
-        <p:nvSpPr>
-          <p:cNvPr id="209" name="TextBox 208">
-            <a:extLst>
-              <a:ext uri="{FF2B5EF4-FFF2-40B4-BE49-F238E27FC236}">
-                <a16:creationId xmlns:a16="http://schemas.microsoft.com/office/drawing/2014/main" id="{3BF71F3D-AC10-1474-E4C7-FA9651C377F2}"/>
-              </a:ext>
-            </a:extLst>
-          </p:cNvPr>
-          <p:cNvSpPr txBox="1"/>
-          <p:nvPr/>
-        </p:nvSpPr>
-        <p:spPr>
-          <a:xfrm>
-            <a:off x="8578073" y="6139777"/>
-            <a:ext cx="901208" cy="338554"/>
-          </a:xfrm>
-          <a:prstGeom prst="rect">
-            <a:avLst/>
-          </a:prstGeom>
-          <a:noFill/>
-        </p:spPr>
-        <p:txBody>
-          <a:bodyPr wrap="none" rtlCol="0">
-            <a:spAutoFit/>
-          </a:bodyPr>
-          <a:lstStyle/>
-          <a:p>
-            <a:pPr algn="ctr"/>
-            <a:r>
-              <a:rPr lang="en-US" sz="800" b="1" noProof="0" dirty="0"/>
-              <a:t>Observability &amp;</a:t>
-            </a:r>
-            <a:br>
-              <a:rPr lang="en-US" sz="800" b="1" noProof="0" dirty="0"/>
-            </a:br>
-            <a:r>
-              <a:rPr lang="en-US" sz="800" b="1" noProof="0" dirty="0" err="1"/>
-              <a:t>Resilienz</a:t>
-            </a:r>
-            <a:endParaRPr lang="en-US" sz="800" b="1" noProof="0" dirty="0"/>
-          </a:p>
-        </p:txBody>
-      </p:sp>
-      <p:sp>
-        <p:nvSpPr>
-          <p:cNvPr id="210" name="TextBox 209">
-            <a:extLst>
-              <a:ext uri="{FF2B5EF4-FFF2-40B4-BE49-F238E27FC236}">
-                <a16:creationId xmlns:a16="http://schemas.microsoft.com/office/drawing/2014/main" id="{D5539CF8-DB48-F2DD-E145-F1EEA5E2F963}"/>
-              </a:ext>
-            </a:extLst>
-          </p:cNvPr>
-          <p:cNvSpPr txBox="1"/>
-          <p:nvPr/>
-        </p:nvSpPr>
-        <p:spPr>
-          <a:xfrm>
-            <a:off x="9550056" y="6147077"/>
-            <a:ext cx="662361" cy="338554"/>
-          </a:xfrm>
-          <a:prstGeom prst="rect">
-            <a:avLst/>
-          </a:prstGeom>
-          <a:noFill/>
-        </p:spPr>
-        <p:txBody>
-          <a:bodyPr wrap="none" rtlCol="0">
-            <a:spAutoFit/>
-          </a:bodyPr>
-          <a:lstStyle/>
-          <a:p>
-            <a:pPr algn="ctr"/>
-            <a:r>
-              <a:rPr lang="en-US" sz="800" b="1" noProof="0" dirty="0"/>
-              <a:t>Security &amp;</a:t>
-            </a:r>
-            <a:br>
-              <a:rPr lang="en-US" sz="800" b="1" noProof="0" dirty="0"/>
-            </a:br>
-            <a:r>
-              <a:rPr lang="en-US" sz="800" b="1" noProof="0" dirty="0"/>
-              <a:t>Identity</a:t>
-            </a:r>
-          </a:p>
-        </p:txBody>
-      </p:sp>
-      <p:sp>
-        <p:nvSpPr>
-          <p:cNvPr id="211" name="TextBox 210">
-            <a:extLst>
-              <a:ext uri="{FF2B5EF4-FFF2-40B4-BE49-F238E27FC236}">
-                <a16:creationId xmlns:a16="http://schemas.microsoft.com/office/drawing/2014/main" id="{CC5C0FB7-B55D-2A07-215B-E540A4FD4EB3}"/>
-              </a:ext>
-            </a:extLst>
-          </p:cNvPr>
-          <p:cNvSpPr txBox="1"/>
-          <p:nvPr/>
-        </p:nvSpPr>
-        <p:spPr>
-          <a:xfrm>
-            <a:off x="8044493" y="4876154"/>
-            <a:ext cx="699230" cy="215444"/>
-          </a:xfrm>
-          <a:prstGeom prst="rect">
-            <a:avLst/>
-          </a:prstGeom>
-          <a:noFill/>
-        </p:spPr>
-        <p:txBody>
-          <a:bodyPr wrap="none" rtlCol="0">
-            <a:spAutoFit/>
-          </a:bodyPr>
-          <a:lstStyle/>
-          <a:p>
-            <a:r>
-              <a:rPr lang="en-US" sz="800" b="1" noProof="0" dirty="0"/>
-              <a:t>Integration</a:t>
-            </a:r>
-          </a:p>
-        </p:txBody>
-      </p:sp>
-      <p:sp>
-        <p:nvSpPr>
-          <p:cNvPr id="212" name="TextBox 211">
-            <a:extLst>
-              <a:ext uri="{FF2B5EF4-FFF2-40B4-BE49-F238E27FC236}">
-                <a16:creationId xmlns:a16="http://schemas.microsoft.com/office/drawing/2014/main" id="{6B1660A4-6334-EA65-A554-0FF2B68F19EE}"/>
-              </a:ext>
-            </a:extLst>
-          </p:cNvPr>
-          <p:cNvSpPr txBox="1"/>
-          <p:nvPr/>
-        </p:nvSpPr>
-        <p:spPr>
-          <a:xfrm>
-            <a:off x="8045035" y="2851828"/>
-            <a:ext cx="710451" cy="215444"/>
-          </a:xfrm>
-          <a:prstGeom prst="rect">
-            <a:avLst/>
-          </a:prstGeom>
-          <a:noFill/>
-        </p:spPr>
-        <p:txBody>
-          <a:bodyPr wrap="none" rtlCol="0">
-            <a:spAutoFit/>
-          </a:bodyPr>
-          <a:lstStyle/>
-          <a:p>
-            <a:r>
-              <a:rPr lang="en-US" sz="800" b="1" noProof="0" dirty="0"/>
-              <a:t>Experience</a:t>
-            </a:r>
-          </a:p>
-        </p:txBody>
-      </p:sp>
-      <p:sp>
-        <p:nvSpPr>
-          <p:cNvPr id="213" name="TextBox 212">
-            <a:extLst>
-              <a:ext uri="{FF2B5EF4-FFF2-40B4-BE49-F238E27FC236}">
-                <a16:creationId xmlns:a16="http://schemas.microsoft.com/office/drawing/2014/main" id="{293F98B9-C6F5-E3F1-0292-DE37E432C720}"/>
-              </a:ext>
-            </a:extLst>
-          </p:cNvPr>
-          <p:cNvSpPr txBox="1"/>
-          <p:nvPr/>
-        </p:nvSpPr>
-        <p:spPr>
-          <a:xfrm>
-            <a:off x="6293306" y="3870337"/>
-            <a:ext cx="745717" cy="246221"/>
-          </a:xfrm>
-          <a:prstGeom prst="rect">
-            <a:avLst/>
-          </a:prstGeom>
-          <a:solidFill>
-            <a:schemeClr val="bg1"/>
-          </a:solidFill>
-        </p:spPr>
-        <p:txBody>
-          <a:bodyPr wrap="none" rtlCol="0">
-            <a:spAutoFit/>
-          </a:bodyPr>
-          <a:lstStyle/>
-          <a:p>
-            <a:r>
-              <a:rPr lang="en-US" sz="1000" noProof="0" dirty="0"/>
-              <a:t>Alignment</a:t>
-            </a:r>
-          </a:p>
-        </p:txBody>
-      </p:sp>
-      <p:sp>
-        <p:nvSpPr>
-          <p:cNvPr id="214" name="TextBox 213">
-            <a:extLst>
-              <a:ext uri="{FF2B5EF4-FFF2-40B4-BE49-F238E27FC236}">
-                <a16:creationId xmlns:a16="http://schemas.microsoft.com/office/drawing/2014/main" id="{8E615E07-B076-A695-ED19-B02E3A5C45AB}"/>
-              </a:ext>
-            </a:extLst>
-          </p:cNvPr>
-          <p:cNvSpPr txBox="1"/>
-          <p:nvPr/>
-        </p:nvSpPr>
-        <p:spPr>
-          <a:xfrm>
-            <a:off x="6052610" y="5123443"/>
-            <a:ext cx="1289135" cy="215444"/>
-          </a:xfrm>
-          <a:prstGeom prst="rect">
-            <a:avLst/>
-          </a:prstGeom>
-          <a:noFill/>
-        </p:spPr>
-        <p:txBody>
-          <a:bodyPr wrap="none" rtlCol="0">
-            <a:spAutoFit/>
-          </a:bodyPr>
-          <a:lstStyle/>
-          <a:p>
-            <a:r>
-              <a:rPr lang="en-US" sz="800" b="1" noProof="0" dirty="0"/>
-              <a:t>Services &amp; Applications</a:t>
-            </a:r>
-          </a:p>
-        </p:txBody>
-      </p:sp>
-      <p:sp>
-        <p:nvSpPr>
-          <p:cNvPr id="215" name="TextBox 214">
-            <a:extLst>
-              <a:ext uri="{FF2B5EF4-FFF2-40B4-BE49-F238E27FC236}">
-                <a16:creationId xmlns:a16="http://schemas.microsoft.com/office/drawing/2014/main" id="{7C9D2E60-F492-C430-0848-F04FC06300AF}"/>
-              </a:ext>
-            </a:extLst>
-          </p:cNvPr>
-          <p:cNvSpPr txBox="1"/>
-          <p:nvPr/>
-        </p:nvSpPr>
-        <p:spPr>
-          <a:xfrm>
-            <a:off x="5953434" y="4155242"/>
-            <a:ext cx="1452642" cy="215444"/>
-          </a:xfrm>
-          <a:prstGeom prst="rect">
-            <a:avLst/>
-          </a:prstGeom>
-          <a:noFill/>
-        </p:spPr>
-        <p:txBody>
-          <a:bodyPr wrap="none" rtlCol="0">
-            <a:spAutoFit/>
-          </a:bodyPr>
-          <a:lstStyle/>
-          <a:p>
-            <a:r>
-              <a:rPr lang="en-US" sz="800" b="1" noProof="0" dirty="0"/>
-              <a:t>Workflows &amp; Orchestration</a:t>
-            </a:r>
-          </a:p>
-        </p:txBody>
-      </p:sp>
-      <p:sp>
-        <p:nvSpPr>
-          <p:cNvPr id="216" name="Pentagon 215">
-            <a:extLst>
-              <a:ext uri="{FF2B5EF4-FFF2-40B4-BE49-F238E27FC236}">
-                <a16:creationId xmlns:a16="http://schemas.microsoft.com/office/drawing/2014/main" id="{6459879C-476B-34C3-1B81-2A696B744801}"/>
-              </a:ext>
-            </a:extLst>
-          </p:cNvPr>
-          <p:cNvSpPr/>
-          <p:nvPr/>
-        </p:nvSpPr>
-        <p:spPr>
-          <a:xfrm>
-            <a:off x="5989274" y="2788575"/>
-            <a:ext cx="285243" cy="263192"/>
-          </a:xfrm>
-          <a:prstGeom prst="homePlate">
-            <a:avLst/>
-          </a:prstGeom>
-          <a:ln>
-            <a:noFill/>
-          </a:ln>
-        </p:spPr>
-        <p:style>
-          <a:lnRef idx="2">
-            <a:schemeClr val="accent1">
-              <a:shade val="15000"/>
-            </a:schemeClr>
-          </a:lnRef>
-          <a:fillRef idx="1">
-            <a:schemeClr val="accent1"/>
-          </a:fillRef>
-          <a:effectRef idx="0">
-            <a:schemeClr val="accent1"/>
-          </a:effectRef>
-          <a:fontRef idx="minor">
-            <a:schemeClr val="lt1"/>
-          </a:fontRef>
-        </p:style>
-        <p:txBody>
-          <a:bodyPr rtlCol="0" anchor="ctr"/>
-          <a:lstStyle/>
-          <a:p>
-            <a:pPr algn="ctr"/>
-            <a:endParaRPr lang="de-DE"/>
-          </a:p>
-        </p:txBody>
-      </p:sp>
-      <p:sp>
-        <p:nvSpPr>
-          <p:cNvPr id="217" name="Chevron 216">
-            <a:extLst>
-              <a:ext uri="{FF2B5EF4-FFF2-40B4-BE49-F238E27FC236}">
-                <a16:creationId xmlns:a16="http://schemas.microsoft.com/office/drawing/2014/main" id="{D6144F6F-597C-4BE9-59D0-F7BF86C24827}"/>
-              </a:ext>
-            </a:extLst>
-          </p:cNvPr>
-          <p:cNvSpPr/>
-          <p:nvPr/>
-        </p:nvSpPr>
-        <p:spPr>
-          <a:xfrm>
-            <a:off x="6187489" y="2784541"/>
-            <a:ext cx="387353" cy="267010"/>
-          </a:xfrm>
-          <a:prstGeom prst="chevron">
-            <a:avLst/>
-          </a:prstGeom>
-          <a:ln>
-            <a:noFill/>
-          </a:ln>
-        </p:spPr>
-        <p:style>
-          <a:lnRef idx="2">
-            <a:schemeClr val="accent1">
-              <a:shade val="15000"/>
-            </a:schemeClr>
-          </a:lnRef>
-          <a:fillRef idx="1">
-            <a:schemeClr val="accent1"/>
-          </a:fillRef>
-          <a:effectRef idx="0">
-            <a:schemeClr val="accent1"/>
-          </a:effectRef>
-          <a:fontRef idx="minor">
-            <a:schemeClr val="lt1"/>
-          </a:fontRef>
-        </p:style>
-        <p:txBody>
-          <a:bodyPr rtlCol="0" anchor="ctr"/>
-          <a:lstStyle/>
-          <a:p>
-            <a:pPr algn="ctr"/>
-            <a:endParaRPr lang="de-DE">
-              <a:solidFill>
-                <a:schemeClr val="tx1"/>
-              </a:solidFill>
-            </a:endParaRPr>
-          </a:p>
-        </p:txBody>
-      </p:sp>
-      <p:sp>
-        <p:nvSpPr>
-          <p:cNvPr id="218" name="Chevron 217">
-            <a:extLst>
-              <a:ext uri="{FF2B5EF4-FFF2-40B4-BE49-F238E27FC236}">
-                <a16:creationId xmlns:a16="http://schemas.microsoft.com/office/drawing/2014/main" id="{9E21D856-37F9-A383-6848-A71086FD1E77}"/>
-              </a:ext>
-            </a:extLst>
-          </p:cNvPr>
-          <p:cNvSpPr/>
-          <p:nvPr/>
-        </p:nvSpPr>
-        <p:spPr>
-          <a:xfrm>
-            <a:off x="7089141" y="2784478"/>
-            <a:ext cx="392859" cy="267010"/>
-          </a:xfrm>
-          <a:prstGeom prst="chevron">
-            <a:avLst/>
-          </a:prstGeom>
-          <a:ln>
-            <a:noFill/>
-          </a:ln>
-        </p:spPr>
-        <p:style>
-          <a:lnRef idx="2">
-            <a:schemeClr val="accent1">
-              <a:shade val="15000"/>
-            </a:schemeClr>
-          </a:lnRef>
-          <a:fillRef idx="1">
-            <a:schemeClr val="accent1"/>
-          </a:fillRef>
-          <a:effectRef idx="0">
-            <a:schemeClr val="accent1"/>
-          </a:effectRef>
-          <a:fontRef idx="minor">
-            <a:schemeClr val="lt1"/>
-          </a:fontRef>
-        </p:style>
-        <p:txBody>
-          <a:bodyPr rtlCol="0" anchor="ctr"/>
-          <a:lstStyle/>
-          <a:p>
-            <a:pPr algn="ctr"/>
-            <a:endParaRPr lang="de-DE">
-              <a:solidFill>
-                <a:schemeClr val="tx1"/>
-              </a:solidFill>
-            </a:endParaRPr>
-          </a:p>
-        </p:txBody>
-      </p:sp>
-      <p:sp>
-        <p:nvSpPr>
-          <p:cNvPr id="219" name="Chevron 218">
-            <a:extLst>
-              <a:ext uri="{FF2B5EF4-FFF2-40B4-BE49-F238E27FC236}">
-                <a16:creationId xmlns:a16="http://schemas.microsoft.com/office/drawing/2014/main" id="{DADC790E-F805-3928-38C4-6F50CB3D9754}"/>
-              </a:ext>
-            </a:extLst>
-          </p:cNvPr>
-          <p:cNvSpPr/>
-          <p:nvPr/>
-        </p:nvSpPr>
-        <p:spPr>
-          <a:xfrm>
-            <a:off x="6487647" y="2784477"/>
-            <a:ext cx="392859" cy="267010"/>
-          </a:xfrm>
-          <a:prstGeom prst="chevron">
-            <a:avLst/>
-          </a:prstGeom>
-          <a:ln>
-            <a:noFill/>
-          </a:ln>
-        </p:spPr>
-        <p:style>
-          <a:lnRef idx="2">
-            <a:schemeClr val="accent1">
-              <a:shade val="15000"/>
-            </a:schemeClr>
-          </a:lnRef>
-          <a:fillRef idx="1">
-            <a:schemeClr val="accent1"/>
-          </a:fillRef>
-          <a:effectRef idx="0">
-            <a:schemeClr val="accent1"/>
-          </a:effectRef>
-          <a:fontRef idx="minor">
-            <a:schemeClr val="lt1"/>
-          </a:fontRef>
-        </p:style>
-        <p:txBody>
-          <a:bodyPr rtlCol="0" anchor="ctr"/>
-          <a:lstStyle/>
-          <a:p>
-            <a:pPr algn="ctr"/>
-            <a:endParaRPr lang="de-DE">
-              <a:solidFill>
-                <a:schemeClr val="tx1"/>
-              </a:solidFill>
-            </a:endParaRPr>
-          </a:p>
-        </p:txBody>
-      </p:sp>
-      <p:sp>
-        <p:nvSpPr>
-          <p:cNvPr id="220" name="Rectangle 219">
-            <a:extLst>
-              <a:ext uri="{FF2B5EF4-FFF2-40B4-BE49-F238E27FC236}">
-                <a16:creationId xmlns:a16="http://schemas.microsoft.com/office/drawing/2014/main" id="{B4319795-9B1F-F61F-668F-BD60C0567536}"/>
-              </a:ext>
-            </a:extLst>
-          </p:cNvPr>
-          <p:cNvSpPr/>
-          <p:nvPr/>
-        </p:nvSpPr>
-        <p:spPr>
-          <a:xfrm>
-            <a:off x="5988471" y="3080200"/>
-            <a:ext cx="265792" cy="477877"/>
-          </a:xfrm>
-          <a:prstGeom prst="rect">
-            <a:avLst/>
-          </a:prstGeom>
-          <a:ln>
-            <a:noFill/>
-          </a:ln>
-        </p:spPr>
-        <p:style>
-          <a:lnRef idx="2">
-            <a:schemeClr val="accent1">
-              <a:shade val="15000"/>
-            </a:schemeClr>
-          </a:lnRef>
-          <a:fillRef idx="1">
-            <a:schemeClr val="accent1"/>
-          </a:fillRef>
-          <a:effectRef idx="0">
-            <a:schemeClr val="accent1"/>
-          </a:effectRef>
-          <a:fontRef idx="minor">
-            <a:schemeClr val="lt1"/>
-          </a:fontRef>
-        </p:style>
-        <p:txBody>
-          <a:bodyPr rtlCol="0" anchor="ctr"/>
-          <a:lstStyle/>
-          <a:p>
-            <a:pPr algn="ctr"/>
-            <a:endParaRPr lang="de-DE"/>
-          </a:p>
-        </p:txBody>
-      </p:sp>
-      <p:sp>
-        <p:nvSpPr>
-          <p:cNvPr id="221" name="Rectangle 220">
-            <a:extLst>
-              <a:ext uri="{FF2B5EF4-FFF2-40B4-BE49-F238E27FC236}">
-                <a16:creationId xmlns:a16="http://schemas.microsoft.com/office/drawing/2014/main" id="{972FDF2D-5986-A6CA-58AD-CEBE7EBE29F5}"/>
-              </a:ext>
-            </a:extLst>
-          </p:cNvPr>
-          <p:cNvSpPr/>
-          <p:nvPr/>
-        </p:nvSpPr>
-        <p:spPr>
-          <a:xfrm>
-            <a:off x="6291132" y="3082570"/>
-            <a:ext cx="839098" cy="150029"/>
-          </a:xfrm>
-          <a:prstGeom prst="rect">
-            <a:avLst/>
-          </a:prstGeom>
-          <a:ln>
-            <a:noFill/>
-          </a:ln>
-        </p:spPr>
-        <p:style>
-          <a:lnRef idx="2">
-            <a:schemeClr val="accent1">
-              <a:shade val="15000"/>
-            </a:schemeClr>
-          </a:lnRef>
-          <a:fillRef idx="1">
-            <a:schemeClr val="accent1"/>
-          </a:fillRef>
-          <a:effectRef idx="0">
-            <a:schemeClr val="accent1"/>
-          </a:effectRef>
-          <a:fontRef idx="minor">
-            <a:schemeClr val="lt1"/>
-          </a:fontRef>
-        </p:style>
-        <p:txBody>
-          <a:bodyPr rtlCol="0" anchor="ctr"/>
-          <a:lstStyle/>
-          <a:p>
-            <a:pPr algn="ctr"/>
-            <a:endParaRPr lang="de-DE"/>
-          </a:p>
-        </p:txBody>
-      </p:sp>
-      <p:sp>
-        <p:nvSpPr>
-          <p:cNvPr id="222" name="Chevron 221">
-            <a:extLst>
-              <a:ext uri="{FF2B5EF4-FFF2-40B4-BE49-F238E27FC236}">
-                <a16:creationId xmlns:a16="http://schemas.microsoft.com/office/drawing/2014/main" id="{7472FD23-F2D3-F7BB-EBD0-52EB20404A50}"/>
-              </a:ext>
-            </a:extLst>
-          </p:cNvPr>
-          <p:cNvSpPr/>
-          <p:nvPr/>
-        </p:nvSpPr>
-        <p:spPr>
-          <a:xfrm>
-            <a:off x="6788394" y="2784478"/>
-            <a:ext cx="392859" cy="267010"/>
-          </a:xfrm>
-          <a:prstGeom prst="chevron">
-            <a:avLst/>
-          </a:prstGeom>
-          <a:ln>
-            <a:noFill/>
-          </a:ln>
-        </p:spPr>
-        <p:style>
-          <a:lnRef idx="2">
-            <a:schemeClr val="accent1">
-              <a:shade val="15000"/>
-            </a:schemeClr>
-          </a:lnRef>
-          <a:fillRef idx="1">
-            <a:schemeClr val="accent1"/>
-          </a:fillRef>
-          <a:effectRef idx="0">
-            <a:schemeClr val="accent1"/>
-          </a:effectRef>
-          <a:fontRef idx="minor">
-            <a:schemeClr val="lt1"/>
-          </a:fontRef>
-        </p:style>
-        <p:txBody>
-          <a:bodyPr rtlCol="0" anchor="ctr"/>
-          <a:lstStyle/>
-          <a:p>
-            <a:pPr algn="ctr"/>
-            <a:endParaRPr lang="de-DE">
-              <a:solidFill>
-                <a:schemeClr val="tx1"/>
-              </a:solidFill>
-            </a:endParaRPr>
-          </a:p>
-        </p:txBody>
-      </p:sp>
-      <p:sp>
-        <p:nvSpPr>
-          <p:cNvPr id="223" name="Rectangle 222">
-            <a:extLst>
-              <a:ext uri="{FF2B5EF4-FFF2-40B4-BE49-F238E27FC236}">
-                <a16:creationId xmlns:a16="http://schemas.microsoft.com/office/drawing/2014/main" id="{0AD31D26-46FE-6ED4-0AE0-DDC8CC88D062}"/>
-              </a:ext>
-            </a:extLst>
-          </p:cNvPr>
-          <p:cNvSpPr/>
-          <p:nvPr/>
-        </p:nvSpPr>
-        <p:spPr>
-          <a:xfrm>
-            <a:off x="7172092" y="3083952"/>
-            <a:ext cx="258535" cy="720446"/>
-          </a:xfrm>
-          <a:prstGeom prst="rect">
-            <a:avLst/>
-          </a:prstGeom>
-          <a:ln>
-            <a:noFill/>
-          </a:ln>
-        </p:spPr>
-        <p:style>
-          <a:lnRef idx="2">
-            <a:schemeClr val="accent1">
-              <a:shade val="15000"/>
-            </a:schemeClr>
-          </a:lnRef>
-          <a:fillRef idx="1">
-            <a:schemeClr val="accent1"/>
-          </a:fillRef>
-          <a:effectRef idx="0">
-            <a:schemeClr val="accent1"/>
-          </a:effectRef>
-          <a:fontRef idx="minor">
-            <a:schemeClr val="lt1"/>
-          </a:fontRef>
-        </p:style>
-        <p:txBody>
-          <a:bodyPr rtlCol="0" anchor="ctr"/>
-          <a:lstStyle/>
-          <a:p>
-            <a:pPr algn="ctr"/>
-            <a:endParaRPr lang="de-DE"/>
-          </a:p>
-        </p:txBody>
-      </p:sp>
-      <p:sp>
-        <p:nvSpPr>
-          <p:cNvPr id="224" name="Rectangle 223">
-            <a:extLst>
-              <a:ext uri="{FF2B5EF4-FFF2-40B4-BE49-F238E27FC236}">
-                <a16:creationId xmlns:a16="http://schemas.microsoft.com/office/drawing/2014/main" id="{2C389CF1-A645-E025-E8CB-71CC16EC4240}"/>
-              </a:ext>
-            </a:extLst>
-          </p:cNvPr>
-          <p:cNvSpPr/>
-          <p:nvPr/>
-        </p:nvSpPr>
-        <p:spPr>
-          <a:xfrm>
-            <a:off x="6291131" y="3259168"/>
-            <a:ext cx="254453" cy="300531"/>
-          </a:xfrm>
-          <a:prstGeom prst="rect">
-            <a:avLst/>
-          </a:prstGeom>
-          <a:ln>
-            <a:noFill/>
-          </a:ln>
-        </p:spPr>
-        <p:style>
-          <a:lnRef idx="2">
-            <a:schemeClr val="accent1">
-              <a:shade val="15000"/>
-            </a:schemeClr>
-          </a:lnRef>
-          <a:fillRef idx="1">
-            <a:schemeClr val="accent1"/>
-          </a:fillRef>
-          <a:effectRef idx="0">
-            <a:schemeClr val="accent1"/>
-          </a:effectRef>
-          <a:fontRef idx="minor">
-            <a:schemeClr val="lt1"/>
-          </a:fontRef>
-        </p:style>
-        <p:txBody>
-          <a:bodyPr rtlCol="0" anchor="ctr"/>
-          <a:lstStyle/>
-          <a:p>
-            <a:pPr algn="ctr"/>
-            <a:endParaRPr lang="de-DE"/>
-          </a:p>
-        </p:txBody>
-      </p:sp>
-      <p:sp>
-        <p:nvSpPr>
-          <p:cNvPr id="225" name="Rectangle 224">
-            <a:extLst>
-              <a:ext uri="{FF2B5EF4-FFF2-40B4-BE49-F238E27FC236}">
-                <a16:creationId xmlns:a16="http://schemas.microsoft.com/office/drawing/2014/main" id="{9A98AC69-B204-0E10-381A-A27AB8D39127}"/>
-              </a:ext>
-            </a:extLst>
-          </p:cNvPr>
-          <p:cNvSpPr/>
-          <p:nvPr/>
-        </p:nvSpPr>
-        <p:spPr>
-          <a:xfrm>
-            <a:off x="6582454" y="3259169"/>
-            <a:ext cx="271506" cy="300531"/>
-          </a:xfrm>
-          <a:prstGeom prst="rect">
-            <a:avLst/>
-          </a:prstGeom>
-          <a:ln>
-            <a:noFill/>
-          </a:ln>
-        </p:spPr>
-        <p:style>
-          <a:lnRef idx="2">
-            <a:schemeClr val="accent1">
-              <a:shade val="15000"/>
-            </a:schemeClr>
-          </a:lnRef>
-          <a:fillRef idx="1">
-            <a:schemeClr val="accent1"/>
-          </a:fillRef>
-          <a:effectRef idx="0">
-            <a:schemeClr val="accent1"/>
-          </a:effectRef>
-          <a:fontRef idx="minor">
-            <a:schemeClr val="lt1"/>
-          </a:fontRef>
-        </p:style>
-        <p:txBody>
-          <a:bodyPr rtlCol="0" anchor="ctr"/>
-          <a:lstStyle/>
-          <a:p>
-            <a:pPr algn="ctr"/>
-            <a:endParaRPr lang="de-DE"/>
-          </a:p>
-        </p:txBody>
-      </p:sp>
-      <p:sp>
-        <p:nvSpPr>
-          <p:cNvPr id="226" name="Rectangle 225">
-            <a:extLst>
-              <a:ext uri="{FF2B5EF4-FFF2-40B4-BE49-F238E27FC236}">
-                <a16:creationId xmlns:a16="http://schemas.microsoft.com/office/drawing/2014/main" id="{9069F3FB-EFAD-B79A-77E7-06FF4C60CBF5}"/>
-              </a:ext>
-            </a:extLst>
-          </p:cNvPr>
-          <p:cNvSpPr/>
-          <p:nvPr/>
-        </p:nvSpPr>
-        <p:spPr>
-          <a:xfrm>
-            <a:off x="6897271" y="3259170"/>
-            <a:ext cx="231510" cy="300531"/>
-          </a:xfrm>
-          <a:prstGeom prst="rect">
-            <a:avLst/>
-          </a:prstGeom>
-          <a:ln>
-            <a:noFill/>
-          </a:ln>
-        </p:spPr>
-        <p:style>
-          <a:lnRef idx="2">
-            <a:schemeClr val="accent1">
-              <a:shade val="15000"/>
-            </a:schemeClr>
-          </a:lnRef>
-          <a:fillRef idx="1">
-            <a:schemeClr val="accent1"/>
-          </a:fillRef>
-          <a:effectRef idx="0">
-            <a:schemeClr val="accent1"/>
-          </a:effectRef>
-          <a:fontRef idx="minor">
-            <a:schemeClr val="lt1"/>
-          </a:fontRef>
-        </p:style>
-        <p:txBody>
-          <a:bodyPr rtlCol="0" anchor="ctr"/>
-          <a:lstStyle/>
-          <a:p>
-            <a:pPr algn="ctr"/>
-            <a:endParaRPr lang="de-DE"/>
-          </a:p>
-        </p:txBody>
-      </p:sp>
-      <p:sp>
-        <p:nvSpPr>
-          <p:cNvPr id="227" name="Rectangle 226">
-            <a:extLst>
-              <a:ext uri="{FF2B5EF4-FFF2-40B4-BE49-F238E27FC236}">
-                <a16:creationId xmlns:a16="http://schemas.microsoft.com/office/drawing/2014/main" id="{69C35EF7-C9B1-1B83-55E9-AABA612EF221}"/>
-              </a:ext>
-            </a:extLst>
-          </p:cNvPr>
-          <p:cNvSpPr/>
-          <p:nvPr/>
-        </p:nvSpPr>
-        <p:spPr>
-          <a:xfrm>
-            <a:off x="5989274" y="3593577"/>
-            <a:ext cx="1140956" cy="213165"/>
-          </a:xfrm>
-          <a:prstGeom prst="rect">
-            <a:avLst/>
-          </a:prstGeom>
-          <a:ln>
-            <a:noFill/>
-          </a:ln>
-        </p:spPr>
-        <p:style>
-          <a:lnRef idx="2">
-            <a:schemeClr val="accent1">
-              <a:shade val="15000"/>
-            </a:schemeClr>
-          </a:lnRef>
-          <a:fillRef idx="1">
-            <a:schemeClr val="accent1"/>
-          </a:fillRef>
-          <a:effectRef idx="0">
-            <a:schemeClr val="accent1"/>
-          </a:effectRef>
-          <a:fontRef idx="minor">
-            <a:schemeClr val="lt1"/>
-          </a:fontRef>
-        </p:style>
-        <p:txBody>
-          <a:bodyPr rtlCol="0" anchor="ctr"/>
-          <a:lstStyle/>
-          <a:p>
-            <a:pPr algn="ctr"/>
-            <a:endParaRPr lang="de-DE"/>
-          </a:p>
-        </p:txBody>
-      </p:sp>
-      <p:sp>
-        <p:nvSpPr>
-          <p:cNvPr id="228" name="TextBox 227">
-            <a:extLst>
-              <a:ext uri="{FF2B5EF4-FFF2-40B4-BE49-F238E27FC236}">
-                <a16:creationId xmlns:a16="http://schemas.microsoft.com/office/drawing/2014/main" id="{48347686-BA2C-20AD-F031-7E3F7F90C5A6}"/>
-              </a:ext>
-            </a:extLst>
-          </p:cNvPr>
-          <p:cNvSpPr txBox="1"/>
-          <p:nvPr/>
-        </p:nvSpPr>
-        <p:spPr>
-          <a:xfrm>
-            <a:off x="6155813" y="3199766"/>
-            <a:ext cx="1085801" cy="195814"/>
-          </a:xfrm>
-          <a:prstGeom prst="rect">
-            <a:avLst/>
-          </a:prstGeom>
-          <a:solidFill>
-            <a:schemeClr val="bg1">
-              <a:alpha val="81000"/>
-            </a:schemeClr>
-          </a:solidFill>
-        </p:spPr>
-        <p:txBody>
-          <a:bodyPr wrap="none" lIns="36000" tIns="36000" rIns="36000" bIns="36000" rtlCol="0">
-            <a:spAutoFit/>
-          </a:bodyPr>
-          <a:lstStyle>
-            <a:defPPr>
-              <a:defRPr lang="en-DE"/>
-            </a:defPPr>
-            <a:lvl1pPr>
-              <a:defRPr sz="800" b="1"/>
-            </a:lvl1pPr>
-          </a:lstStyle>
-          <a:p>
-            <a:pPr algn="ctr"/>
-            <a:r>
-              <a:rPr lang="en-US" dirty="0"/>
-              <a:t>Business Capabilities</a:t>
-            </a:r>
-          </a:p>
-        </p:txBody>
-      </p:sp>
-      <p:sp>
-        <p:nvSpPr>
-          <p:cNvPr id="229" name="TextBox 228">
-            <a:extLst>
-              <a:ext uri="{FF2B5EF4-FFF2-40B4-BE49-F238E27FC236}">
-                <a16:creationId xmlns:a16="http://schemas.microsoft.com/office/drawing/2014/main" id="{4CCF3729-4A17-7153-6438-9473ED385E70}"/>
-              </a:ext>
-            </a:extLst>
-          </p:cNvPr>
-          <p:cNvSpPr txBox="1"/>
-          <p:nvPr/>
-        </p:nvSpPr>
-        <p:spPr>
-          <a:xfrm>
-            <a:off x="6091359" y="3491938"/>
-            <a:ext cx="1201145" cy="195814"/>
-          </a:xfrm>
-          <a:prstGeom prst="rect">
-            <a:avLst/>
-          </a:prstGeom>
-          <a:solidFill>
-            <a:schemeClr val="bg1">
-              <a:alpha val="81000"/>
-            </a:schemeClr>
-          </a:solidFill>
-        </p:spPr>
-        <p:txBody>
-          <a:bodyPr wrap="square" lIns="36000" tIns="36000" rIns="36000" bIns="36000" rtlCol="0">
-            <a:spAutoFit/>
-          </a:bodyPr>
-          <a:lstStyle>
-            <a:defPPr>
-              <a:defRPr lang="en-DE"/>
-            </a:defPPr>
-            <a:lvl1pPr>
-              <a:defRPr sz="800" b="1"/>
-            </a:lvl1pPr>
-          </a:lstStyle>
-          <a:p>
-            <a:pPr algn="ctr"/>
-            <a:r>
-              <a:rPr lang="en-US" dirty="0"/>
-              <a:t>Processes</a:t>
-            </a:r>
-          </a:p>
-        </p:txBody>
-      </p:sp>
-      <p:sp>
-        <p:nvSpPr>
-          <p:cNvPr id="230" name="TextBox 229">
-            <a:extLst>
-              <a:ext uri="{FF2B5EF4-FFF2-40B4-BE49-F238E27FC236}">
-                <a16:creationId xmlns:a16="http://schemas.microsoft.com/office/drawing/2014/main" id="{5496173D-F87D-6535-E21D-5E83D09F0413}"/>
-              </a:ext>
-            </a:extLst>
-          </p:cNvPr>
-          <p:cNvSpPr txBox="1"/>
-          <p:nvPr/>
-        </p:nvSpPr>
-        <p:spPr>
-          <a:xfrm>
-            <a:off x="6338647" y="2823560"/>
-            <a:ext cx="701080" cy="195814"/>
-          </a:xfrm>
-          <a:prstGeom prst="rect">
-            <a:avLst/>
-          </a:prstGeom>
-          <a:solidFill>
-            <a:schemeClr val="bg1">
-              <a:alpha val="81000"/>
-            </a:schemeClr>
-          </a:solidFill>
-        </p:spPr>
-        <p:txBody>
-          <a:bodyPr wrap="none" lIns="36000" tIns="36000" rIns="36000" bIns="36000" rtlCol="0">
-            <a:spAutoFit/>
-          </a:bodyPr>
-          <a:lstStyle/>
-          <a:p>
-            <a:pPr algn="ctr"/>
-            <a:r>
-              <a:rPr lang="en-US" sz="800" b="1" noProof="0" dirty="0"/>
-              <a:t>Value Stream</a:t>
-            </a:r>
-          </a:p>
-        </p:txBody>
-      </p:sp>
-      <p:cxnSp>
-        <p:nvCxnSpPr>
-          <p:cNvPr id="231" name="Straight Connector 230">
-            <a:extLst>
-              <a:ext uri="{FF2B5EF4-FFF2-40B4-BE49-F238E27FC236}">
-                <a16:creationId xmlns:a16="http://schemas.microsoft.com/office/drawing/2014/main" id="{EDDF7B06-298B-523F-6FCE-BCDFDE6F8998}"/>
-              </a:ext>
-            </a:extLst>
-          </p:cNvPr>
-          <p:cNvCxnSpPr>
-            <a:cxnSpLocks/>
-          </p:cNvCxnSpPr>
-          <p:nvPr/>
-        </p:nvCxnSpPr>
-        <p:spPr>
-          <a:xfrm>
-            <a:off x="6168804" y="3530429"/>
-            <a:ext cx="166009" cy="92052"/>
-          </a:xfrm>
-          <a:prstGeom prst="line">
-            <a:avLst/>
-          </a:prstGeom>
-          <a:ln w="12700">
-            <a:headEnd type="oval" w="sm" len="sm"/>
-            <a:tailEnd type="oval" w="sm" len="sm"/>
-          </a:ln>
-        </p:spPr>
-        <p:style>
-          <a:lnRef idx="2">
-            <a:schemeClr val="accent1"/>
-          </a:lnRef>
-          <a:fillRef idx="0">
-            <a:schemeClr val="accent1"/>
-          </a:fillRef>
-          <a:effectRef idx="1">
-            <a:schemeClr val="accent1"/>
-          </a:effectRef>
-          <a:fontRef idx="minor">
-            <a:schemeClr val="tx1"/>
-          </a:fontRef>
-        </p:style>
-      </p:cxnSp>
-      <p:cxnSp>
-        <p:nvCxnSpPr>
-          <p:cNvPr id="232" name="Straight Connector 231">
-            <a:extLst>
-              <a:ext uri="{FF2B5EF4-FFF2-40B4-BE49-F238E27FC236}">
-                <a16:creationId xmlns:a16="http://schemas.microsoft.com/office/drawing/2014/main" id="{07307361-1FD1-1FCD-8027-228F2B788ECC}"/>
-              </a:ext>
-            </a:extLst>
-          </p:cNvPr>
-          <p:cNvCxnSpPr>
-            <a:cxnSpLocks/>
-          </p:cNvCxnSpPr>
-          <p:nvPr/>
-        </p:nvCxnSpPr>
-        <p:spPr>
-          <a:xfrm>
-            <a:off x="6987578" y="3525290"/>
-            <a:ext cx="231909" cy="120858"/>
-          </a:xfrm>
-          <a:prstGeom prst="line">
-            <a:avLst/>
-          </a:prstGeom>
-          <a:ln w="12700">
-            <a:headEnd type="oval" w="sm" len="sm"/>
-            <a:tailEnd type="oval" w="sm" len="sm"/>
-          </a:ln>
-        </p:spPr>
-        <p:style>
-          <a:lnRef idx="2">
-            <a:schemeClr val="accent1"/>
-          </a:lnRef>
-          <a:fillRef idx="0">
-            <a:schemeClr val="accent1"/>
-          </a:fillRef>
-          <a:effectRef idx="1">
-            <a:schemeClr val="accent1"/>
-          </a:effectRef>
-          <a:fontRef idx="minor">
-            <a:schemeClr val="tx1"/>
-          </a:fontRef>
-        </p:style>
-      </p:cxnSp>
-      <p:cxnSp>
-        <p:nvCxnSpPr>
-          <p:cNvPr id="233" name="Straight Connector 232">
-            <a:extLst>
-              <a:ext uri="{FF2B5EF4-FFF2-40B4-BE49-F238E27FC236}">
-                <a16:creationId xmlns:a16="http://schemas.microsoft.com/office/drawing/2014/main" id="{66D23BDA-E232-E532-A99B-240E9E5F429B}"/>
-              </a:ext>
-            </a:extLst>
-          </p:cNvPr>
-          <p:cNvCxnSpPr>
-            <a:cxnSpLocks/>
-          </p:cNvCxnSpPr>
-          <p:nvPr/>
-        </p:nvCxnSpPr>
-        <p:spPr>
-          <a:xfrm flipV="1">
-            <a:off x="6257860" y="3523606"/>
-            <a:ext cx="129511" cy="50057"/>
-          </a:xfrm>
-          <a:prstGeom prst="line">
-            <a:avLst/>
-          </a:prstGeom>
-          <a:ln w="12700">
-            <a:headEnd type="none" w="sm" len="sm"/>
-            <a:tailEnd type="oval" w="sm" len="sm"/>
-          </a:ln>
-        </p:spPr>
-        <p:style>
-          <a:lnRef idx="2">
-            <a:schemeClr val="accent1"/>
-          </a:lnRef>
-          <a:fillRef idx="0">
-            <a:schemeClr val="accent1"/>
-          </a:fillRef>
-          <a:effectRef idx="1">
-            <a:schemeClr val="accent1"/>
-          </a:effectRef>
-          <a:fontRef idx="minor">
-            <a:schemeClr val="tx1"/>
-          </a:fontRef>
-        </p:style>
-      </p:cxnSp>
-      <p:cxnSp>
-        <p:nvCxnSpPr>
-          <p:cNvPr id="234" name="Straight Connector 233">
-            <a:extLst>
-              <a:ext uri="{FF2B5EF4-FFF2-40B4-BE49-F238E27FC236}">
-                <a16:creationId xmlns:a16="http://schemas.microsoft.com/office/drawing/2014/main" id="{A3B33A0E-518F-1452-390F-B51051113324}"/>
-              </a:ext>
-            </a:extLst>
-          </p:cNvPr>
-          <p:cNvCxnSpPr>
-            <a:cxnSpLocks/>
-          </p:cNvCxnSpPr>
-          <p:nvPr/>
-        </p:nvCxnSpPr>
-        <p:spPr>
-          <a:xfrm flipH="1">
-            <a:off x="6996187" y="3598888"/>
-            <a:ext cx="121917" cy="47187"/>
-          </a:xfrm>
-          <a:prstGeom prst="line">
-            <a:avLst/>
-          </a:prstGeom>
-          <a:ln w="12700">
-            <a:headEnd type="none" w="sm" len="sm"/>
-            <a:tailEnd type="oval" w="sm" len="sm"/>
-          </a:ln>
-        </p:spPr>
-        <p:style>
-          <a:lnRef idx="2">
-            <a:schemeClr val="accent1"/>
-          </a:lnRef>
-          <a:fillRef idx="0">
-            <a:schemeClr val="accent1"/>
-          </a:fillRef>
-          <a:effectRef idx="1">
-            <a:schemeClr val="accent1"/>
-          </a:effectRef>
-          <a:fontRef idx="minor">
-            <a:schemeClr val="tx1"/>
-          </a:fontRef>
-        </p:style>
-      </p:cxnSp>
-      <p:pic>
-        <p:nvPicPr>
-          <p:cNvPr id="235" name="Graphic 234" descr="Internet Of Things with solid fill">
-            <a:extLst>
-              <a:ext uri="{FF2B5EF4-FFF2-40B4-BE49-F238E27FC236}">
-                <a16:creationId xmlns:a16="http://schemas.microsoft.com/office/drawing/2014/main" id="{3CB14FCA-92F3-33A1-4397-56FE3117D59C}"/>
-              </a:ext>
-            </a:extLst>
-          </p:cNvPr>
-          <p:cNvPicPr>
-            <a:picLocks noChangeAspect="1"/>
-          </p:cNvPicPr>
-          <p:nvPr/>
-        </p:nvPicPr>
-        <p:blipFill>
-          <a:blip>
-            <a:extLst>
-              <a:ext uri="{96DAC541-7B7A-43D3-8B79-37D633B846F1}">
-                <asvg:svgBlip xmlns:asvg="http://schemas.microsoft.com/office/drawing/2016/SVG/main" r:embed="rId19"/>
-              </a:ext>
-            </a:extLst>
-          </a:blip>
-          <a:stretch>
-            <a:fillRect/>
-          </a:stretch>
-        </p:blipFill>
-        <p:spPr>
-          <a:xfrm>
-            <a:off x="10816445" y="4665223"/>
-            <a:ext cx="625008" cy="625008"/>
-          </a:xfrm>
-          <a:prstGeom prst="rect">
-            <a:avLst/>
-          </a:prstGeom>
-        </p:spPr>
-      </p:pic>
-      <p:pic>
-        <p:nvPicPr>
-          <p:cNvPr id="236" name="Graphic 235" descr="Branching diagram with solid fill">
-            <a:extLst>
-              <a:ext uri="{FF2B5EF4-FFF2-40B4-BE49-F238E27FC236}">
-                <a16:creationId xmlns:a16="http://schemas.microsoft.com/office/drawing/2014/main" id="{D9786E89-EAB5-F24D-6066-C91A8244EBCD}"/>
-              </a:ext>
-            </a:extLst>
-          </p:cNvPr>
-          <p:cNvPicPr>
-            <a:picLocks noChangeAspect="1"/>
-          </p:cNvPicPr>
-          <p:nvPr/>
-        </p:nvPicPr>
-        <p:blipFill>
-          <a:blip>
-            <a:extLst>
-              <a:ext uri="{96DAC541-7B7A-43D3-8B79-37D633B846F1}">
-                <asvg:svgBlip xmlns:asvg="http://schemas.microsoft.com/office/drawing/2016/SVG/main" r:embed="rId20"/>
-              </a:ext>
-            </a:extLst>
-          </a:blip>
-          <a:stretch>
-            <a:fillRect/>
-          </a:stretch>
-        </p:blipFill>
-        <p:spPr>
-          <a:xfrm>
-            <a:off x="6530547" y="4396041"/>
-            <a:ext cx="396518" cy="396518"/>
-          </a:xfrm>
-          <a:prstGeom prst="rect">
-            <a:avLst/>
-          </a:prstGeom>
-        </p:spPr>
-      </p:pic>
-      <p:sp>
-        <p:nvSpPr>
-          <p:cNvPr id="237" name="TextBox 236">
-            <a:extLst>
-              <a:ext uri="{FF2B5EF4-FFF2-40B4-BE49-F238E27FC236}">
-                <a16:creationId xmlns:a16="http://schemas.microsoft.com/office/drawing/2014/main" id="{E5114952-DE6D-D798-42C4-40985AB0D323}"/>
-              </a:ext>
-            </a:extLst>
-          </p:cNvPr>
-          <p:cNvSpPr txBox="1"/>
-          <p:nvPr/>
-        </p:nvSpPr>
-        <p:spPr>
-          <a:xfrm>
-            <a:off x="10832233" y="5643693"/>
-            <a:ext cx="593432" cy="461665"/>
-          </a:xfrm>
-          <a:prstGeom prst="rect">
-            <a:avLst/>
-          </a:prstGeom>
-          <a:noFill/>
-        </p:spPr>
-        <p:txBody>
-          <a:bodyPr wrap="none" rtlCol="0">
-            <a:spAutoFit/>
-          </a:bodyPr>
-          <a:lstStyle/>
-          <a:p>
-            <a:pPr algn="ctr"/>
-            <a:r>
-              <a:rPr lang="en-US" sz="800" b="1" noProof="0" dirty="0"/>
-              <a:t>Platform</a:t>
-            </a:r>
-            <a:br>
-              <a:rPr lang="en-US" sz="800" b="1" noProof="0" dirty="0"/>
-            </a:br>
-            <a:r>
-              <a:rPr lang="en-US" sz="800" b="1" noProof="0" dirty="0"/>
-              <a:t>&amp;</a:t>
-            </a:r>
-            <a:br>
-              <a:rPr lang="en-US" sz="800" b="1" noProof="0" dirty="0"/>
-            </a:br>
-            <a:r>
-              <a:rPr lang="en-US" sz="800" b="1" noProof="0" dirty="0"/>
-              <a:t>Security</a:t>
-            </a:r>
-          </a:p>
-        </p:txBody>
-      </p:sp>
-      <p:sp>
-        <p:nvSpPr>
-          <p:cNvPr id="238" name="TextBox 237">
-            <a:extLst>
-              <a:ext uri="{FF2B5EF4-FFF2-40B4-BE49-F238E27FC236}">
-                <a16:creationId xmlns:a16="http://schemas.microsoft.com/office/drawing/2014/main" id="{70803844-2C61-DF69-A865-12081FFE6318}"/>
-              </a:ext>
-            </a:extLst>
-          </p:cNvPr>
-          <p:cNvSpPr txBox="1"/>
-          <p:nvPr/>
-        </p:nvSpPr>
-        <p:spPr>
-          <a:xfrm>
-            <a:off x="10767311" y="3850095"/>
-            <a:ext cx="723275" cy="461665"/>
-          </a:xfrm>
-          <a:prstGeom prst="rect">
-            <a:avLst/>
-          </a:prstGeom>
-          <a:noFill/>
-        </p:spPr>
-        <p:txBody>
-          <a:bodyPr wrap="none" rtlCol="0">
-            <a:spAutoFit/>
-          </a:bodyPr>
-          <a:lstStyle/>
-          <a:p>
-            <a:pPr algn="ctr"/>
-            <a:r>
-              <a:rPr lang="en-US" sz="800" b="1" noProof="0" dirty="0"/>
-              <a:t>Application</a:t>
-            </a:r>
-            <a:br>
-              <a:rPr lang="en-US" sz="800" b="1" noProof="0" dirty="0"/>
-            </a:br>
-            <a:r>
-              <a:rPr lang="en-US" sz="800" b="1" noProof="0" dirty="0"/>
-              <a:t>&amp;</a:t>
-            </a:r>
-            <a:br>
-              <a:rPr lang="en-US" sz="800" b="1" noProof="0" dirty="0"/>
-            </a:br>
-            <a:r>
-              <a:rPr lang="en-US" sz="800" b="1" noProof="0" dirty="0"/>
-              <a:t>Data</a:t>
-            </a:r>
-          </a:p>
-        </p:txBody>
-      </p:sp>
-      <p:sp>
-        <p:nvSpPr>
-          <p:cNvPr id="239" name="TextBox 238">
-            <a:extLst>
-              <a:ext uri="{FF2B5EF4-FFF2-40B4-BE49-F238E27FC236}">
-                <a16:creationId xmlns:a16="http://schemas.microsoft.com/office/drawing/2014/main" id="{D4A2BF96-FBB1-389B-AB1B-04E142CA50E9}"/>
-              </a:ext>
-            </a:extLst>
-          </p:cNvPr>
-          <p:cNvSpPr txBox="1"/>
-          <p:nvPr/>
-        </p:nvSpPr>
-        <p:spPr>
-          <a:xfrm>
-            <a:off x="10738456" y="2056495"/>
-            <a:ext cx="780983" cy="461665"/>
-          </a:xfrm>
-          <a:prstGeom prst="rect">
-            <a:avLst/>
-          </a:prstGeom>
-          <a:noFill/>
-        </p:spPr>
-        <p:txBody>
-          <a:bodyPr wrap="none" rtlCol="0">
-            <a:spAutoFit/>
-          </a:bodyPr>
-          <a:lstStyle/>
-          <a:p>
-            <a:pPr algn="ctr"/>
-            <a:r>
-              <a:rPr lang="en-US" sz="800" b="1" noProof="0" dirty="0"/>
-              <a:t>Business</a:t>
-            </a:r>
-            <a:br>
-              <a:rPr lang="en-US" sz="800" b="1" noProof="0" dirty="0"/>
-            </a:br>
-            <a:r>
-              <a:rPr lang="en-US" sz="800" b="1" noProof="0" dirty="0"/>
-              <a:t>&amp;</a:t>
-            </a:r>
-            <a:br>
-              <a:rPr lang="en-US" sz="800" b="1" noProof="0" dirty="0"/>
-            </a:br>
-            <a:r>
-              <a:rPr lang="en-US" sz="800" b="1" noProof="0" dirty="0"/>
-              <a:t>Organization</a:t>
-            </a:r>
-          </a:p>
-        </p:txBody>
-      </p:sp>
     </p:spTree>
     <p:extLst>
       <p:ext uri="{BB962C8B-B14F-4D97-AF65-F5344CB8AC3E}">
